--- a/suanli/源信网络算力补贴三方合作方案.pptx
+++ b/suanli/源信网络算力补贴三方合作方案.pptx
@@ -17,6 +17,7 @@
     <p:sldId id="265" r:id="rId16"/>
     <p:sldId id="266" r:id="rId17"/>
     <p:sldId id="267" r:id="rId18"/>
+    <p:sldId id="268" r:id="rId19"/>
   </p:sldIdLst>
   <p:sldSz cx="12191695" cy="6858000" type="screen4x3"/>
   <p:notesSz cx="6858000" cy="9144000"/>
@@ -3799,7 +3800,7 @@
                 <a:latin typeface="Microsoft YaHei"/>
                 <a:ea typeface="Microsoft YaHei"/>
               </a:rPr>
-              <a:t>08  可复制模式</a:t>
+              <a:t>08  共赢价值</a:t>
             </a:r>
           </a:p>
         </p:txBody>
@@ -3845,7 +3846,7 @@
                 <a:latin typeface="Microsoft YaHei"/>
                 <a:ea typeface="Microsoft YaHei"/>
               </a:rPr>
-              <a:t>开放式 · 可复制合作模式</a:t>
+              <a:t>三方共赢与协同价值</a:t>
             </a:r>
           </a:p>
         </p:txBody>
@@ -3935,7 +3936,7 @@
                 <a:latin typeface="Microsoft YaHei"/>
                 <a:ea typeface="Microsoft YaHei"/>
               </a:rPr>
-              <a:t>08 / 09</a:t>
+              <a:t>08 / 10</a:t>
             </a:r>
           </a:p>
         </p:txBody>
@@ -3988,60 +3989,14 @@
       </p:sp>
       <p:sp>
         <p:nvSpPr>
-          <p:cNvPr id="10" name="TextBox 9"/>
-          <p:cNvSpPr txBox="1"/>
-          <p:nvPr/>
-        </p:nvSpPr>
-        <p:spPr>
-          <a:xfrm>
-            <a:off x="731520" y="1572768"/>
-            <a:ext cx="10698480" cy="457200"/>
-          </a:xfrm>
-          <a:prstGeom prst="rect">
-            <a:avLst/>
-          </a:prstGeom>
-          <a:noFill/>
-        </p:spPr>
-        <p:txBody>
-          <a:bodyPr wrap="square" anchor="t" lIns="0" rIns="0" tIns="0" bIns="0">
-            <a:spAutoFit/>
-          </a:bodyPr>
-          <a:lstStyle/>
-          <a:p>
-            <a:pPr algn="l">
-              <a:lnSpc>
-                <a:spcPct val="110000"/>
-              </a:lnSpc>
-              <a:spcBef>
-                <a:spcPts val="0"/>
-              </a:spcBef>
-              <a:spcAft>
-                <a:spcPts val="400"/>
-              </a:spcAft>
-            </a:pPr>
-            <a:r>
-              <a:rPr sz="1350" b="0">
-                <a:solidFill>
-                  <a:srgbClr val="5A6472"/>
-                </a:solidFill>
-                <a:latin typeface="Microsoft YaHei"/>
-                <a:ea typeface="Microsoft YaHei"/>
-              </a:rPr>
-              <a:t>把三方合作沉淀为“一次设计、处处可用”的开放式算力普惠样板——任何楼宇 / 园区 / 区域均可低成本接入与复制。</a:t>
-            </a:r>
-          </a:p>
-        </p:txBody>
-      </p:sp>
-      <p:sp>
-        <p:nvSpPr>
-          <p:cNvPr id="11" name="Rounded Rectangle 10"/>
+          <p:cNvPr id="10" name="Rounded Rectangle 9"/>
           <p:cNvSpPr/>
           <p:nvPr/>
         </p:nvSpPr>
         <p:spPr>
           <a:xfrm>
-            <a:off x="731520" y="2240280"/>
-            <a:ext cx="5257800" cy="1783080"/>
+            <a:off x="731520" y="1783080"/>
+            <a:ext cx="5257800" cy="1874519"/>
           </a:xfrm>
           <a:prstGeom prst="roundRect">
             <a:avLst/>
@@ -4078,16 +4033,16 @@
       </p:sp>
       <p:sp>
         <p:nvSpPr>
-          <p:cNvPr id="12" name="Rounded Rectangle 11"/>
+          <p:cNvPr id="11" name="Rectangle 10"/>
           <p:cNvSpPr/>
           <p:nvPr/>
         </p:nvSpPr>
         <p:spPr>
           <a:xfrm>
-            <a:off x="731520" y="2240280"/>
-            <a:ext cx="1417320" cy="1783080"/>
-          </a:xfrm>
-          <a:prstGeom prst="roundRect">
+            <a:off x="731520" y="1783080"/>
+            <a:ext cx="146304" cy="1874519"/>
+          </a:xfrm>
+          <a:prstGeom prst="rect">
             <a:avLst/>
           </a:prstGeom>
           <a:solidFill>
@@ -4122,104 +4077,14 @@
       </p:sp>
       <p:sp>
         <p:nvSpPr>
-          <p:cNvPr id="13" name="Rectangle 12"/>
-          <p:cNvSpPr/>
-          <p:nvPr/>
-        </p:nvSpPr>
-        <p:spPr>
-          <a:xfrm>
-            <a:off x="1828800" y="2240280"/>
-            <a:ext cx="365760" cy="1783080"/>
-          </a:xfrm>
-          <a:prstGeom prst="rect">
-            <a:avLst/>
-          </a:prstGeom>
-          <a:solidFill>
-            <a:srgbClr val="125CC4"/>
-          </a:solidFill>
-          <a:ln>
-            <a:noFill/>
-          </a:ln>
-          <a:effectLst/>
-        </p:spPr>
-        <p:style>
-          <a:lnRef idx="1">
-            <a:schemeClr val="accent1"/>
-          </a:lnRef>
-          <a:fillRef idx="3">
-            <a:schemeClr val="accent1"/>
-          </a:fillRef>
-          <a:effectRef idx="2">
-            <a:schemeClr val="accent1"/>
-          </a:effectRef>
-          <a:fontRef idx="minor">
-            <a:schemeClr val="lt1"/>
-          </a:fontRef>
-        </p:style>
-        <p:txBody>
-          <a:bodyPr rtlCol="0" anchor="ctr"/>
-          <a:lstStyle/>
-          <a:p>
-            <a:pPr algn="ctr"/>
-          </a:p>
-        </p:txBody>
-      </p:sp>
-      <p:sp>
-        <p:nvSpPr>
-          <p:cNvPr id="14" name="TextBox 13"/>
+          <p:cNvPr id="12" name="TextBox 11"/>
           <p:cNvSpPr txBox="1"/>
           <p:nvPr/>
         </p:nvSpPr>
         <p:spPr>
           <a:xfrm>
-            <a:off x="822960" y="2240280"/>
-            <a:ext cx="1234440" cy="1783080"/>
-          </a:xfrm>
-          <a:prstGeom prst="rect">
-            <a:avLst/>
-          </a:prstGeom>
-          <a:noFill/>
-        </p:spPr>
-        <p:txBody>
-          <a:bodyPr wrap="square" anchor="ctr" lIns="0" rIns="0" tIns="0" bIns="0">
-            <a:spAutoFit/>
-          </a:bodyPr>
-          <a:lstStyle/>
-          <a:p>
-            <a:pPr algn="ctr">
-              <a:lnSpc>
-                <a:spcPct val="100000"/>
-              </a:lnSpc>
-              <a:spcBef>
-                <a:spcPts val="0"/>
-              </a:spcBef>
-              <a:spcAft>
-                <a:spcPts val="400"/>
-              </a:spcAft>
-            </a:pPr>
-            <a:r>
-              <a:rPr sz="3000" b="1">
-                <a:solidFill>
-                  <a:srgbClr val="FFFFFF"/>
-                </a:solidFill>
-                <a:latin typeface="Microsoft YaHei"/>
-                <a:ea typeface="Microsoft YaHei"/>
-              </a:rPr>
-              <a:t>01</a:t>
-            </a:r>
-          </a:p>
-        </p:txBody>
-      </p:sp>
-      <p:sp>
-        <p:nvSpPr>
-          <p:cNvPr id="15" name="TextBox 14"/>
-          <p:cNvSpPr txBox="1"/>
-          <p:nvPr/>
-        </p:nvSpPr>
-        <p:spPr>
-          <a:xfrm>
-            <a:off x="2377440" y="2496312"/>
-            <a:ext cx="3429000" cy="457200"/>
+            <a:off x="1097280" y="1947672"/>
+            <a:ext cx="4709160" cy="457200"/>
           </a:xfrm>
           <a:prstGeom prst="rect">
             <a:avLst/>
@@ -4244,252 +4109,28 @@
               </a:spcAft>
             </a:pPr>
             <a:r>
-              <a:rPr sz="1700" b="1">
+              <a:rPr sz="1600" b="1">
                 <a:solidFill>
                   <a:srgbClr val="125CC4"/>
                 </a:solidFill>
                 <a:latin typeface="Microsoft YaHei"/>
                 <a:ea typeface="Microsoft YaHei"/>
               </a:rPr>
-              <a:t>标准化模板</a:t>
-            </a:r>
-          </a:p>
-        </p:txBody>
-      </p:sp>
-      <p:sp>
-        <p:nvSpPr>
-          <p:cNvPr id="16" name="TextBox 15"/>
+              <a:t>大厂（火山/腾讯）</a:t>
+            </a:r>
+          </a:p>
+        </p:txBody>
+      </p:sp>
+      <p:sp>
+        <p:nvSpPr>
+          <p:cNvPr id="13" name="TextBox 12"/>
           <p:cNvSpPr txBox="1"/>
           <p:nvPr/>
         </p:nvSpPr>
         <p:spPr>
           <a:xfrm>
-            <a:off x="2377440" y="3017520"/>
-            <a:ext cx="3383281" cy="914400"/>
-          </a:xfrm>
-          <a:prstGeom prst="rect">
-            <a:avLst/>
-          </a:prstGeom>
-          <a:noFill/>
-        </p:spPr>
-        <p:txBody>
-          <a:bodyPr wrap="square" anchor="t" lIns="0" rIns="0" tIns="0" bIns="0">
-            <a:spAutoFit/>
-          </a:bodyPr>
-          <a:lstStyle/>
-          <a:p>
-            <a:pPr algn="l">
-              <a:lnSpc>
-                <a:spcPct val="115000"/>
-              </a:lnSpc>
-              <a:spcBef>
-                <a:spcPts val="0"/>
-              </a:spcBef>
-              <a:spcAft>
-                <a:spcPts val="400"/>
-              </a:spcAft>
-            </a:pPr>
-            <a:r>
-              <a:rPr sz="1250" b="0">
-                <a:solidFill>
-                  <a:srgbClr val="1B2433"/>
-                </a:solidFill>
-                <a:latin typeface="Microsoft YaHei"/>
-                <a:ea typeface="Microsoft YaHei"/>
-              </a:rPr>
-              <a:t>合作协议、准入条件、补贴标准、核销流程全部模板化，开箱即用。</a:t>
-            </a:r>
-          </a:p>
-        </p:txBody>
-      </p:sp>
-      <p:sp>
-        <p:nvSpPr>
-          <p:cNvPr id="17" name="Rounded Rectangle 16"/>
-          <p:cNvSpPr/>
-          <p:nvPr/>
-        </p:nvSpPr>
-        <p:spPr>
-          <a:xfrm>
-            <a:off x="6263640" y="2240280"/>
-            <a:ext cx="5257800" cy="1783080"/>
-          </a:xfrm>
-          <a:prstGeom prst="roundRect">
-            <a:avLst/>
-          </a:prstGeom>
-          <a:solidFill>
-            <a:srgbClr val="EAF2FB"/>
-          </a:solidFill>
-          <a:ln>
-            <a:noFill/>
-          </a:ln>
-          <a:effectLst/>
-        </p:spPr>
-        <p:style>
-          <a:lnRef idx="1">
-            <a:schemeClr val="accent1"/>
-          </a:lnRef>
-          <a:fillRef idx="3">
-            <a:schemeClr val="accent1"/>
-          </a:fillRef>
-          <a:effectRef idx="2">
-            <a:schemeClr val="accent1"/>
-          </a:effectRef>
-          <a:fontRef idx="minor">
-            <a:schemeClr val="lt1"/>
-          </a:fontRef>
-        </p:style>
-        <p:txBody>
-          <a:bodyPr rtlCol="0" anchor="ctr"/>
-          <a:lstStyle/>
-          <a:p>
-            <a:pPr algn="ctr"/>
-          </a:p>
-        </p:txBody>
-      </p:sp>
-      <p:sp>
-        <p:nvSpPr>
-          <p:cNvPr id="18" name="Rounded Rectangle 17"/>
-          <p:cNvSpPr/>
-          <p:nvPr/>
-        </p:nvSpPr>
-        <p:spPr>
-          <a:xfrm>
-            <a:off x="6263640" y="2240280"/>
-            <a:ext cx="1417320" cy="1783080"/>
-          </a:xfrm>
-          <a:prstGeom prst="roundRect">
-            <a:avLst/>
-          </a:prstGeom>
-          <a:solidFill>
-            <a:srgbClr val="00B4D8"/>
-          </a:solidFill>
-          <a:ln>
-            <a:noFill/>
-          </a:ln>
-          <a:effectLst/>
-        </p:spPr>
-        <p:style>
-          <a:lnRef idx="1">
-            <a:schemeClr val="accent1"/>
-          </a:lnRef>
-          <a:fillRef idx="3">
-            <a:schemeClr val="accent1"/>
-          </a:fillRef>
-          <a:effectRef idx="2">
-            <a:schemeClr val="accent1"/>
-          </a:effectRef>
-          <a:fontRef idx="minor">
-            <a:schemeClr val="lt1"/>
-          </a:fontRef>
-        </p:style>
-        <p:txBody>
-          <a:bodyPr rtlCol="0" anchor="ctr"/>
-          <a:lstStyle/>
-          <a:p>
-            <a:pPr algn="ctr"/>
-          </a:p>
-        </p:txBody>
-      </p:sp>
-      <p:sp>
-        <p:nvSpPr>
-          <p:cNvPr id="19" name="Rectangle 18"/>
-          <p:cNvSpPr/>
-          <p:nvPr/>
-        </p:nvSpPr>
-        <p:spPr>
-          <a:xfrm>
-            <a:off x="7360920" y="2240280"/>
-            <a:ext cx="365760" cy="1783080"/>
-          </a:xfrm>
-          <a:prstGeom prst="rect">
-            <a:avLst/>
-          </a:prstGeom>
-          <a:solidFill>
-            <a:srgbClr val="00B4D8"/>
-          </a:solidFill>
-          <a:ln>
-            <a:noFill/>
-          </a:ln>
-          <a:effectLst/>
-        </p:spPr>
-        <p:style>
-          <a:lnRef idx="1">
-            <a:schemeClr val="accent1"/>
-          </a:lnRef>
-          <a:fillRef idx="3">
-            <a:schemeClr val="accent1"/>
-          </a:fillRef>
-          <a:effectRef idx="2">
-            <a:schemeClr val="accent1"/>
-          </a:effectRef>
-          <a:fontRef idx="minor">
-            <a:schemeClr val="lt1"/>
-          </a:fontRef>
-        </p:style>
-        <p:txBody>
-          <a:bodyPr rtlCol="0" anchor="ctr"/>
-          <a:lstStyle/>
-          <a:p>
-            <a:pPr algn="ctr"/>
-          </a:p>
-        </p:txBody>
-      </p:sp>
-      <p:sp>
-        <p:nvSpPr>
-          <p:cNvPr id="20" name="TextBox 19"/>
-          <p:cNvSpPr txBox="1"/>
-          <p:nvPr/>
-        </p:nvSpPr>
-        <p:spPr>
-          <a:xfrm>
-            <a:off x="6355080" y="2240280"/>
-            <a:ext cx="1234440" cy="1783080"/>
-          </a:xfrm>
-          <a:prstGeom prst="rect">
-            <a:avLst/>
-          </a:prstGeom>
-          <a:noFill/>
-        </p:spPr>
-        <p:txBody>
-          <a:bodyPr wrap="square" anchor="ctr" lIns="0" rIns="0" tIns="0" bIns="0">
-            <a:spAutoFit/>
-          </a:bodyPr>
-          <a:lstStyle/>
-          <a:p>
-            <a:pPr algn="ctr">
-              <a:lnSpc>
-                <a:spcPct val="100000"/>
-              </a:lnSpc>
-              <a:spcBef>
-                <a:spcPts val="0"/>
-              </a:spcBef>
-              <a:spcAft>
-                <a:spcPts val="400"/>
-              </a:spcAft>
-            </a:pPr>
-            <a:r>
-              <a:rPr sz="3000" b="1">
-                <a:solidFill>
-                  <a:srgbClr val="FFFFFF"/>
-                </a:solidFill>
-                <a:latin typeface="Microsoft YaHei"/>
-                <a:ea typeface="Microsoft YaHei"/>
-              </a:rPr>
-              <a:t>02</a:t>
-            </a:r>
-          </a:p>
-        </p:txBody>
-      </p:sp>
-      <p:sp>
-        <p:nvSpPr>
-          <p:cNvPr id="21" name="TextBox 20"/>
-          <p:cNvSpPr txBox="1"/>
-          <p:nvPr/>
-        </p:nvSpPr>
-        <p:spPr>
-          <a:xfrm>
-            <a:off x="7909560" y="2496312"/>
-            <a:ext cx="3429000" cy="457200"/>
+            <a:off x="1143000" y="2441448"/>
+            <a:ext cx="4617720" cy="384048"/>
           </a:xfrm>
           <a:prstGeom prst="rect">
             <a:avLst/>
@@ -4514,252 +4155,38 @@
               </a:spcAft>
             </a:pPr>
             <a:r>
-              <a:rPr sz="1700" b="1">
-                <a:solidFill>
-                  <a:srgbClr val="00B4D8"/>
-                </a:solidFill>
-                <a:latin typeface="Microsoft YaHei"/>
-                <a:ea typeface="Microsoft YaHei"/>
-              </a:rPr>
-              <a:t>模块化组合</a:t>
-            </a:r>
-          </a:p>
-        </p:txBody>
-      </p:sp>
-      <p:sp>
-        <p:nvSpPr>
-          <p:cNvPr id="22" name="TextBox 21"/>
+              <a:rPr sz="1100" b="1">
+                <a:solidFill>
+                  <a:srgbClr val="125CC4"/>
+                </a:solidFill>
+                <a:latin typeface="Microsoft YaHei"/>
+                <a:ea typeface="Microsoft YaHei"/>
+              </a:rPr>
+              <a:t>● </a:t>
+            </a:r>
+            <a:r>
+              <a:rPr sz="1250" b="0">
+                <a:solidFill>
+                  <a:srgbClr val="1B2433"/>
+                </a:solidFill>
+                <a:latin typeface="Microsoft YaHei"/>
+                <a:ea typeface="Microsoft YaHei"/>
+              </a:rPr>
+              <a:t>精准触达 B 端企业客户</a:t>
+            </a:r>
+          </a:p>
+        </p:txBody>
+      </p:sp>
+      <p:sp>
+        <p:nvSpPr>
+          <p:cNvPr id="14" name="TextBox 13"/>
           <p:cNvSpPr txBox="1"/>
           <p:nvPr/>
         </p:nvSpPr>
         <p:spPr>
           <a:xfrm>
-            <a:off x="7909560" y="3017520"/>
-            <a:ext cx="3383281" cy="914400"/>
-          </a:xfrm>
-          <a:prstGeom prst="rect">
-            <a:avLst/>
-          </a:prstGeom>
-          <a:noFill/>
-        </p:spPr>
-        <p:txBody>
-          <a:bodyPr wrap="square" anchor="t" lIns="0" rIns="0" tIns="0" bIns="0">
-            <a:spAutoFit/>
-          </a:bodyPr>
-          <a:lstStyle/>
-          <a:p>
-            <a:pPr algn="l">
-              <a:lnSpc>
-                <a:spcPct val="115000"/>
-              </a:lnSpc>
-              <a:spcBef>
-                <a:spcPts val="0"/>
-              </a:spcBef>
-              <a:spcAft>
-                <a:spcPts val="400"/>
-              </a:spcAft>
-            </a:pPr>
-            <a:r>
-              <a:rPr sz="1250" b="0">
-                <a:solidFill>
-                  <a:srgbClr val="1B2433"/>
-                </a:solidFill>
-                <a:latin typeface="Microsoft YaHei"/>
-                <a:ea typeface="Microsoft YaHei"/>
-              </a:rPr>
-              <a:t>算力补贴 / 租金减免 / 消费补贴可按载体需求自由拼装组合。</a:t>
-            </a:r>
-          </a:p>
-        </p:txBody>
-      </p:sp>
-      <p:sp>
-        <p:nvSpPr>
-          <p:cNvPr id="23" name="Rounded Rectangle 22"/>
-          <p:cNvSpPr/>
-          <p:nvPr/>
-        </p:nvSpPr>
-        <p:spPr>
-          <a:xfrm>
-            <a:off x="731520" y="4178808"/>
-            <a:ext cx="5257800" cy="1783080"/>
-          </a:xfrm>
-          <a:prstGeom prst="roundRect">
-            <a:avLst/>
-          </a:prstGeom>
-          <a:solidFill>
-            <a:srgbClr val="EAF2FB"/>
-          </a:solidFill>
-          <a:ln>
-            <a:noFill/>
-          </a:ln>
-          <a:effectLst/>
-        </p:spPr>
-        <p:style>
-          <a:lnRef idx="1">
-            <a:schemeClr val="accent1"/>
-          </a:lnRef>
-          <a:fillRef idx="3">
-            <a:schemeClr val="accent1"/>
-          </a:fillRef>
-          <a:effectRef idx="2">
-            <a:schemeClr val="accent1"/>
-          </a:effectRef>
-          <a:fontRef idx="minor">
-            <a:schemeClr val="lt1"/>
-          </a:fontRef>
-        </p:style>
-        <p:txBody>
-          <a:bodyPr rtlCol="0" anchor="ctr"/>
-          <a:lstStyle/>
-          <a:p>
-            <a:pPr algn="ctr"/>
-          </a:p>
-        </p:txBody>
-      </p:sp>
-      <p:sp>
-        <p:nvSpPr>
-          <p:cNvPr id="24" name="Rounded Rectangle 23"/>
-          <p:cNvSpPr/>
-          <p:nvPr/>
-        </p:nvSpPr>
-        <p:spPr>
-          <a:xfrm>
-            <a:off x="731520" y="4178808"/>
-            <a:ext cx="1417320" cy="1783080"/>
-          </a:xfrm>
-          <a:prstGeom prst="roundRect">
-            <a:avLst/>
-          </a:prstGeom>
-          <a:solidFill>
-            <a:srgbClr val="F2A02D"/>
-          </a:solidFill>
-          <a:ln>
-            <a:noFill/>
-          </a:ln>
-          <a:effectLst/>
-        </p:spPr>
-        <p:style>
-          <a:lnRef idx="1">
-            <a:schemeClr val="accent1"/>
-          </a:lnRef>
-          <a:fillRef idx="3">
-            <a:schemeClr val="accent1"/>
-          </a:fillRef>
-          <a:effectRef idx="2">
-            <a:schemeClr val="accent1"/>
-          </a:effectRef>
-          <a:fontRef idx="minor">
-            <a:schemeClr val="lt1"/>
-          </a:fontRef>
-        </p:style>
-        <p:txBody>
-          <a:bodyPr rtlCol="0" anchor="ctr"/>
-          <a:lstStyle/>
-          <a:p>
-            <a:pPr algn="ctr"/>
-          </a:p>
-        </p:txBody>
-      </p:sp>
-      <p:sp>
-        <p:nvSpPr>
-          <p:cNvPr id="25" name="Rectangle 24"/>
-          <p:cNvSpPr/>
-          <p:nvPr/>
-        </p:nvSpPr>
-        <p:spPr>
-          <a:xfrm>
-            <a:off x="1828800" y="4178808"/>
-            <a:ext cx="365760" cy="1783080"/>
-          </a:xfrm>
-          <a:prstGeom prst="rect">
-            <a:avLst/>
-          </a:prstGeom>
-          <a:solidFill>
-            <a:srgbClr val="F2A02D"/>
-          </a:solidFill>
-          <a:ln>
-            <a:noFill/>
-          </a:ln>
-          <a:effectLst/>
-        </p:spPr>
-        <p:style>
-          <a:lnRef idx="1">
-            <a:schemeClr val="accent1"/>
-          </a:lnRef>
-          <a:fillRef idx="3">
-            <a:schemeClr val="accent1"/>
-          </a:fillRef>
-          <a:effectRef idx="2">
-            <a:schemeClr val="accent1"/>
-          </a:effectRef>
-          <a:fontRef idx="minor">
-            <a:schemeClr val="lt1"/>
-          </a:fontRef>
-        </p:style>
-        <p:txBody>
-          <a:bodyPr rtlCol="0" anchor="ctr"/>
-          <a:lstStyle/>
-          <a:p>
-            <a:pPr algn="ctr"/>
-          </a:p>
-        </p:txBody>
-      </p:sp>
-      <p:sp>
-        <p:nvSpPr>
-          <p:cNvPr id="26" name="TextBox 25"/>
-          <p:cNvSpPr txBox="1"/>
-          <p:nvPr/>
-        </p:nvSpPr>
-        <p:spPr>
-          <a:xfrm>
-            <a:off x="822960" y="4178808"/>
-            <a:ext cx="1234440" cy="1783080"/>
-          </a:xfrm>
-          <a:prstGeom prst="rect">
-            <a:avLst/>
-          </a:prstGeom>
-          <a:noFill/>
-        </p:spPr>
-        <p:txBody>
-          <a:bodyPr wrap="square" anchor="ctr" lIns="0" rIns="0" tIns="0" bIns="0">
-            <a:spAutoFit/>
-          </a:bodyPr>
-          <a:lstStyle/>
-          <a:p>
-            <a:pPr algn="ctr">
-              <a:lnSpc>
-                <a:spcPct val="100000"/>
-              </a:lnSpc>
-              <a:spcBef>
-                <a:spcPts val="0"/>
-              </a:spcBef>
-              <a:spcAft>
-                <a:spcPts val="400"/>
-              </a:spcAft>
-            </a:pPr>
-            <a:r>
-              <a:rPr sz="3000" b="1">
-                <a:solidFill>
-                  <a:srgbClr val="FFFFFF"/>
-                </a:solidFill>
-                <a:latin typeface="Microsoft YaHei"/>
-                <a:ea typeface="Microsoft YaHei"/>
-              </a:rPr>
-              <a:t>03</a:t>
-            </a:r>
-          </a:p>
-        </p:txBody>
-      </p:sp>
-      <p:sp>
-        <p:nvSpPr>
-          <p:cNvPr id="27" name="TextBox 26"/>
-          <p:cNvSpPr txBox="1"/>
-          <p:nvPr/>
-        </p:nvSpPr>
-        <p:spPr>
-          <a:xfrm>
-            <a:off x="2377440" y="4434840"/>
-            <a:ext cx="3429000" cy="457200"/>
+            <a:off x="1143000" y="2834640"/>
+            <a:ext cx="4617720" cy="384048"/>
           </a:xfrm>
           <a:prstGeom prst="rect">
             <a:avLst/>
@@ -4784,252 +4211,38 @@
               </a:spcAft>
             </a:pPr>
             <a:r>
-              <a:rPr sz="1700" b="1">
-                <a:solidFill>
-                  <a:srgbClr val="F2A02D"/>
-                </a:solidFill>
-                <a:latin typeface="Microsoft YaHei"/>
-                <a:ea typeface="Microsoft YaHei"/>
-              </a:rPr>
-              <a:t>开放式接入</a:t>
-            </a:r>
-          </a:p>
-        </p:txBody>
-      </p:sp>
-      <p:sp>
-        <p:nvSpPr>
-          <p:cNvPr id="28" name="TextBox 27"/>
+              <a:rPr sz="1100" b="1">
+                <a:solidFill>
+                  <a:srgbClr val="125CC4"/>
+                </a:solidFill>
+                <a:latin typeface="Microsoft YaHei"/>
+                <a:ea typeface="Microsoft YaHei"/>
+              </a:rPr>
+              <a:t>● </a:t>
+            </a:r>
+            <a:r>
+              <a:rPr sz="1250" b="0">
+                <a:solidFill>
+                  <a:srgbClr val="1B2433"/>
+                </a:solidFill>
+                <a:latin typeface="Microsoft YaHei"/>
+                <a:ea typeface="Microsoft YaHei"/>
+              </a:rPr>
+              <a:t>补贴转化为云消费与留存</a:t>
+            </a:r>
+          </a:p>
+        </p:txBody>
+      </p:sp>
+      <p:sp>
+        <p:nvSpPr>
+          <p:cNvPr id="15" name="TextBox 14"/>
           <p:cNvSpPr txBox="1"/>
           <p:nvPr/>
         </p:nvSpPr>
         <p:spPr>
           <a:xfrm>
-            <a:off x="2377440" y="4956048"/>
-            <a:ext cx="3383281" cy="914400"/>
-          </a:xfrm>
-          <a:prstGeom prst="rect">
-            <a:avLst/>
-          </a:prstGeom>
-          <a:noFill/>
-        </p:spPr>
-        <p:txBody>
-          <a:bodyPr wrap="square" anchor="t" lIns="0" rIns="0" tIns="0" bIns="0">
-            <a:spAutoFit/>
-          </a:bodyPr>
-          <a:lstStyle/>
-          <a:p>
-            <a:pPr algn="l">
-              <a:lnSpc>
-                <a:spcPct val="115000"/>
-              </a:lnSpc>
-              <a:spcBef>
-                <a:spcPts val="0"/>
-              </a:spcBef>
-              <a:spcAft>
-                <a:spcPts val="400"/>
-              </a:spcAft>
-            </a:pPr>
-            <a:r>
-              <a:rPr sz="1250" b="0">
-                <a:solidFill>
-                  <a:srgbClr val="1B2433"/>
-                </a:solidFill>
-                <a:latin typeface="Microsoft YaHei"/>
-                <a:ea typeface="Microsoft YaHei"/>
-              </a:rPr>
-              <a:t>对大厂、物业、园区、企业开放，白名单动态扩容、平台化运营。</a:t>
-            </a:r>
-          </a:p>
-        </p:txBody>
-      </p:sp>
-      <p:sp>
-        <p:nvSpPr>
-          <p:cNvPr id="29" name="Rounded Rectangle 28"/>
-          <p:cNvSpPr/>
-          <p:nvPr/>
-        </p:nvSpPr>
-        <p:spPr>
-          <a:xfrm>
-            <a:off x="6263640" y="4178808"/>
-            <a:ext cx="5257800" cy="1783080"/>
-          </a:xfrm>
-          <a:prstGeom prst="roundRect">
-            <a:avLst/>
-          </a:prstGeom>
-          <a:solidFill>
-            <a:srgbClr val="EAF2FB"/>
-          </a:solidFill>
-          <a:ln>
-            <a:noFill/>
-          </a:ln>
-          <a:effectLst/>
-        </p:spPr>
-        <p:style>
-          <a:lnRef idx="1">
-            <a:schemeClr val="accent1"/>
-          </a:lnRef>
-          <a:fillRef idx="3">
-            <a:schemeClr val="accent1"/>
-          </a:fillRef>
-          <a:effectRef idx="2">
-            <a:schemeClr val="accent1"/>
-          </a:effectRef>
-          <a:fontRef idx="minor">
-            <a:schemeClr val="lt1"/>
-          </a:fontRef>
-        </p:style>
-        <p:txBody>
-          <a:bodyPr rtlCol="0" anchor="ctr"/>
-          <a:lstStyle/>
-          <a:p>
-            <a:pPr algn="ctr"/>
-          </a:p>
-        </p:txBody>
-      </p:sp>
-      <p:sp>
-        <p:nvSpPr>
-          <p:cNvPr id="30" name="Rounded Rectangle 29"/>
-          <p:cNvSpPr/>
-          <p:nvPr/>
-        </p:nvSpPr>
-        <p:spPr>
-          <a:xfrm>
-            <a:off x="6263640" y="4178808"/>
-            <a:ext cx="1417320" cy="1783080"/>
-          </a:xfrm>
-          <a:prstGeom prst="roundRect">
-            <a:avLst/>
-          </a:prstGeom>
-          <a:solidFill>
-            <a:srgbClr val="0B2A5B"/>
-          </a:solidFill>
-          <a:ln>
-            <a:noFill/>
-          </a:ln>
-          <a:effectLst/>
-        </p:spPr>
-        <p:style>
-          <a:lnRef idx="1">
-            <a:schemeClr val="accent1"/>
-          </a:lnRef>
-          <a:fillRef idx="3">
-            <a:schemeClr val="accent1"/>
-          </a:fillRef>
-          <a:effectRef idx="2">
-            <a:schemeClr val="accent1"/>
-          </a:effectRef>
-          <a:fontRef idx="minor">
-            <a:schemeClr val="lt1"/>
-          </a:fontRef>
-        </p:style>
-        <p:txBody>
-          <a:bodyPr rtlCol="0" anchor="ctr"/>
-          <a:lstStyle/>
-          <a:p>
-            <a:pPr algn="ctr"/>
-          </a:p>
-        </p:txBody>
-      </p:sp>
-      <p:sp>
-        <p:nvSpPr>
-          <p:cNvPr id="31" name="Rectangle 30"/>
-          <p:cNvSpPr/>
-          <p:nvPr/>
-        </p:nvSpPr>
-        <p:spPr>
-          <a:xfrm>
-            <a:off x="7360920" y="4178808"/>
-            <a:ext cx="365760" cy="1783080"/>
-          </a:xfrm>
-          <a:prstGeom prst="rect">
-            <a:avLst/>
-          </a:prstGeom>
-          <a:solidFill>
-            <a:srgbClr val="0B2A5B"/>
-          </a:solidFill>
-          <a:ln>
-            <a:noFill/>
-          </a:ln>
-          <a:effectLst/>
-        </p:spPr>
-        <p:style>
-          <a:lnRef idx="1">
-            <a:schemeClr val="accent1"/>
-          </a:lnRef>
-          <a:fillRef idx="3">
-            <a:schemeClr val="accent1"/>
-          </a:fillRef>
-          <a:effectRef idx="2">
-            <a:schemeClr val="accent1"/>
-          </a:effectRef>
-          <a:fontRef idx="minor">
-            <a:schemeClr val="lt1"/>
-          </a:fontRef>
-        </p:style>
-        <p:txBody>
-          <a:bodyPr rtlCol="0" anchor="ctr"/>
-          <a:lstStyle/>
-          <a:p>
-            <a:pPr algn="ctr"/>
-          </a:p>
-        </p:txBody>
-      </p:sp>
-      <p:sp>
-        <p:nvSpPr>
-          <p:cNvPr id="32" name="TextBox 31"/>
-          <p:cNvSpPr txBox="1"/>
-          <p:nvPr/>
-        </p:nvSpPr>
-        <p:spPr>
-          <a:xfrm>
-            <a:off x="6355080" y="4178808"/>
-            <a:ext cx="1234440" cy="1783080"/>
-          </a:xfrm>
-          <a:prstGeom prst="rect">
-            <a:avLst/>
-          </a:prstGeom>
-          <a:noFill/>
-        </p:spPr>
-        <p:txBody>
-          <a:bodyPr wrap="square" anchor="ctr" lIns="0" rIns="0" tIns="0" bIns="0">
-            <a:spAutoFit/>
-          </a:bodyPr>
-          <a:lstStyle/>
-          <a:p>
-            <a:pPr algn="ctr">
-              <a:lnSpc>
-                <a:spcPct val="100000"/>
-              </a:lnSpc>
-              <a:spcBef>
-                <a:spcPts val="0"/>
-              </a:spcBef>
-              <a:spcAft>
-                <a:spcPts val="400"/>
-              </a:spcAft>
-            </a:pPr>
-            <a:r>
-              <a:rPr sz="3000" b="1">
-                <a:solidFill>
-                  <a:srgbClr val="FFFFFF"/>
-                </a:solidFill>
-                <a:latin typeface="Microsoft YaHei"/>
-                <a:ea typeface="Microsoft YaHei"/>
-              </a:rPr>
-              <a:t>04</a:t>
-            </a:r>
-          </a:p>
-        </p:txBody>
-      </p:sp>
-      <p:sp>
-        <p:nvSpPr>
-          <p:cNvPr id="33" name="TextBox 32"/>
-          <p:cNvSpPr txBox="1"/>
-          <p:nvPr/>
-        </p:nvSpPr>
-        <p:spPr>
-          <a:xfrm>
-            <a:off x="7909560" y="4434840"/>
-            <a:ext cx="3429000" cy="457200"/>
+            <a:off x="1143000" y="3227831"/>
+            <a:ext cx="4617720" cy="384048"/>
           </a:xfrm>
           <a:prstGeom prst="rect">
             <a:avLst/>
@@ -5054,28 +4267,126 @@
               </a:spcAft>
             </a:pPr>
             <a:r>
-              <a:rPr sz="1700" b="1">
-                <a:solidFill>
-                  <a:srgbClr val="0B2A5B"/>
-                </a:solidFill>
-                <a:latin typeface="Microsoft YaHei"/>
-                <a:ea typeface="Microsoft YaHei"/>
-              </a:rPr>
-              <a:t>可复制推广</a:t>
-            </a:r>
-          </a:p>
-        </p:txBody>
-      </p:sp>
-      <p:sp>
-        <p:nvSpPr>
-          <p:cNvPr id="34" name="TextBox 33"/>
+              <a:rPr sz="1100" b="1">
+                <a:solidFill>
+                  <a:srgbClr val="125CC4"/>
+                </a:solidFill>
+                <a:latin typeface="Microsoft YaHei"/>
+                <a:ea typeface="Microsoft YaHei"/>
+              </a:rPr>
+              <a:t>● </a:t>
+            </a:r>
+            <a:r>
+              <a:rPr sz="1250" b="0">
+                <a:solidFill>
+                  <a:srgbClr val="1B2433"/>
+                </a:solidFill>
+                <a:latin typeface="Microsoft YaHei"/>
+                <a:ea typeface="Microsoft YaHei"/>
+              </a:rPr>
+              <a:t>打造区域算力普惠样板</a:t>
+            </a:r>
+          </a:p>
+        </p:txBody>
+      </p:sp>
+      <p:sp>
+        <p:nvSpPr>
+          <p:cNvPr id="16" name="Rounded Rectangle 15"/>
+          <p:cNvSpPr/>
+          <p:nvPr/>
+        </p:nvSpPr>
+        <p:spPr>
+          <a:xfrm>
+            <a:off x="6263640" y="1783080"/>
+            <a:ext cx="5257800" cy="1874519"/>
+          </a:xfrm>
+          <a:prstGeom prst="roundRect">
+            <a:avLst/>
+          </a:prstGeom>
+          <a:solidFill>
+            <a:srgbClr val="EAF2FB"/>
+          </a:solidFill>
+          <a:ln>
+            <a:noFill/>
+          </a:ln>
+          <a:effectLst/>
+        </p:spPr>
+        <p:style>
+          <a:lnRef idx="1">
+            <a:schemeClr val="accent1"/>
+          </a:lnRef>
+          <a:fillRef idx="3">
+            <a:schemeClr val="accent1"/>
+          </a:fillRef>
+          <a:effectRef idx="2">
+            <a:schemeClr val="accent1"/>
+          </a:effectRef>
+          <a:fontRef idx="minor">
+            <a:schemeClr val="lt1"/>
+          </a:fontRef>
+        </p:style>
+        <p:txBody>
+          <a:bodyPr rtlCol="0" anchor="ctr"/>
+          <a:lstStyle/>
+          <a:p>
+            <a:pPr algn="ctr"/>
+          </a:p>
+        </p:txBody>
+      </p:sp>
+      <p:sp>
+        <p:nvSpPr>
+          <p:cNvPr id="17" name="Rectangle 16"/>
+          <p:cNvSpPr/>
+          <p:nvPr/>
+        </p:nvSpPr>
+        <p:spPr>
+          <a:xfrm>
+            <a:off x="6263640" y="1783080"/>
+            <a:ext cx="146304" cy="1874519"/>
+          </a:xfrm>
+          <a:prstGeom prst="rect">
+            <a:avLst/>
+          </a:prstGeom>
+          <a:solidFill>
+            <a:srgbClr val="00B4D8"/>
+          </a:solidFill>
+          <a:ln>
+            <a:noFill/>
+          </a:ln>
+          <a:effectLst/>
+        </p:spPr>
+        <p:style>
+          <a:lnRef idx="1">
+            <a:schemeClr val="accent1"/>
+          </a:lnRef>
+          <a:fillRef idx="3">
+            <a:schemeClr val="accent1"/>
+          </a:fillRef>
+          <a:effectRef idx="2">
+            <a:schemeClr val="accent1"/>
+          </a:effectRef>
+          <a:fontRef idx="minor">
+            <a:schemeClr val="lt1"/>
+          </a:fontRef>
+        </p:style>
+        <p:txBody>
+          <a:bodyPr rtlCol="0" anchor="ctr"/>
+          <a:lstStyle/>
+          <a:p>
+            <a:pPr algn="ctr"/>
+          </a:p>
+        </p:txBody>
+      </p:sp>
+      <p:sp>
+        <p:nvSpPr>
+          <p:cNvPr id="18" name="TextBox 17"/>
           <p:cNvSpPr txBox="1"/>
           <p:nvPr/>
         </p:nvSpPr>
         <p:spPr>
           <a:xfrm>
-            <a:off x="7909560" y="4956048"/>
-            <a:ext cx="3383281" cy="914400"/>
+            <a:off x="6629400" y="1947672"/>
+            <a:ext cx="4709160" cy="457200"/>
           </a:xfrm>
           <a:prstGeom prst="rect">
             <a:avLst/>
@@ -5089,52 +4400,6 @@
           <a:lstStyle/>
           <a:p>
             <a:pPr algn="l">
-              <a:lnSpc>
-                <a:spcPct val="115000"/>
-              </a:lnSpc>
-              <a:spcBef>
-                <a:spcPts val="0"/>
-              </a:spcBef>
-              <a:spcAft>
-                <a:spcPts val="400"/>
-              </a:spcAft>
-            </a:pPr>
-            <a:r>
-              <a:rPr sz="1250" b="0">
-                <a:solidFill>
-                  <a:srgbClr val="1B2433"/>
-                </a:solidFill>
-                <a:latin typeface="Microsoft YaHei"/>
-                <a:ea typeface="Microsoft YaHei"/>
-              </a:rPr>
-              <a:t>一套打法复制到多楼宇、多园区乃至跨区域，边际成本递减。</a:t>
-            </a:r>
-          </a:p>
-        </p:txBody>
-      </p:sp>
-      <p:sp>
-        <p:nvSpPr>
-          <p:cNvPr id="35" name="TextBox 34"/>
-          <p:cNvSpPr txBox="1"/>
-          <p:nvPr/>
-        </p:nvSpPr>
-        <p:spPr>
-          <a:xfrm>
-            <a:off x="731520" y="6144768"/>
-            <a:ext cx="10698480" cy="320040"/>
-          </a:xfrm>
-          <a:prstGeom prst="rect">
-            <a:avLst/>
-          </a:prstGeom>
-          <a:noFill/>
-        </p:spPr>
-        <p:txBody>
-          <a:bodyPr wrap="square" anchor="t" lIns="0" rIns="0" tIns="0" bIns="0">
-            <a:spAutoFit/>
-          </a:bodyPr>
-          <a:lstStyle/>
-          <a:p>
-            <a:pPr algn="ctr">
               <a:lnSpc>
                 <a:spcPct val="100000"/>
               </a:lnSpc>
@@ -5146,14 +4411,786 @@
               </a:spcAft>
             </a:pPr>
             <a:r>
-              <a:rPr sz="1300" b="1">
+              <a:rPr sz="1600" b="1">
+                <a:solidFill>
+                  <a:srgbClr val="00B4D8"/>
+                </a:solidFill>
+                <a:latin typeface="Microsoft YaHei"/>
+                <a:ea typeface="Microsoft YaHei"/>
+              </a:rPr>
+              <a:t>楼宇 / 园区物业</a:t>
+            </a:r>
+          </a:p>
+        </p:txBody>
+      </p:sp>
+      <p:sp>
+        <p:nvSpPr>
+          <p:cNvPr id="19" name="TextBox 18"/>
+          <p:cNvSpPr txBox="1"/>
+          <p:nvPr/>
+        </p:nvSpPr>
+        <p:spPr>
+          <a:xfrm>
+            <a:off x="6675120" y="2441448"/>
+            <a:ext cx="4617720" cy="384048"/>
+          </a:xfrm>
+          <a:prstGeom prst="rect">
+            <a:avLst/>
+          </a:prstGeom>
+          <a:noFill/>
+        </p:spPr>
+        <p:txBody>
+          <a:bodyPr wrap="square" anchor="t" lIns="0" rIns="0" tIns="0" bIns="0">
+            <a:spAutoFit/>
+          </a:bodyPr>
+          <a:lstStyle/>
+          <a:p>
+            <a:pPr algn="l">
+              <a:lnSpc>
+                <a:spcPct val="100000"/>
+              </a:lnSpc>
+              <a:spcBef>
+                <a:spcPts val="0"/>
+              </a:spcBef>
+              <a:spcAft>
+                <a:spcPts val="400"/>
+              </a:spcAft>
+            </a:pPr>
+            <a:r>
+              <a:rPr sz="1100" b="1">
+                <a:solidFill>
+                  <a:srgbClr val="00B4D8"/>
+                </a:solidFill>
+                <a:latin typeface="Microsoft YaHei"/>
+                <a:ea typeface="Microsoft YaHei"/>
+              </a:rPr>
+              <a:t>● </a:t>
+            </a:r>
+            <a:r>
+              <a:rPr sz="1250" b="0">
+                <a:solidFill>
+                  <a:srgbClr val="1B2433"/>
+                </a:solidFill>
+                <a:latin typeface="Microsoft YaHei"/>
+                <a:ea typeface="Microsoft YaHei"/>
+              </a:rPr>
+              <a:t>差异化招商卖点</a:t>
+            </a:r>
+          </a:p>
+        </p:txBody>
+      </p:sp>
+      <p:sp>
+        <p:nvSpPr>
+          <p:cNvPr id="20" name="TextBox 19"/>
+          <p:cNvSpPr txBox="1"/>
+          <p:nvPr/>
+        </p:nvSpPr>
+        <p:spPr>
+          <a:xfrm>
+            <a:off x="6675120" y="2834640"/>
+            <a:ext cx="4617720" cy="384048"/>
+          </a:xfrm>
+          <a:prstGeom prst="rect">
+            <a:avLst/>
+          </a:prstGeom>
+          <a:noFill/>
+        </p:spPr>
+        <p:txBody>
+          <a:bodyPr wrap="square" anchor="t" lIns="0" rIns="0" tIns="0" bIns="0">
+            <a:spAutoFit/>
+          </a:bodyPr>
+          <a:lstStyle/>
+          <a:p>
+            <a:pPr algn="l">
+              <a:lnSpc>
+                <a:spcPct val="100000"/>
+              </a:lnSpc>
+              <a:spcBef>
+                <a:spcPts val="0"/>
+              </a:spcBef>
+              <a:spcAft>
+                <a:spcPts val="400"/>
+              </a:spcAft>
+            </a:pPr>
+            <a:r>
+              <a:rPr sz="1100" b="1">
+                <a:solidFill>
+                  <a:srgbClr val="00B4D8"/>
+                </a:solidFill>
+                <a:latin typeface="Microsoft YaHei"/>
+                <a:ea typeface="Microsoft YaHei"/>
+              </a:rPr>
+              <a:t>● </a:t>
+            </a:r>
+            <a:r>
+              <a:rPr sz="1250" b="0">
+                <a:solidFill>
+                  <a:srgbClr val="1B2433"/>
+                </a:solidFill>
+                <a:latin typeface="Microsoft YaHei"/>
+                <a:ea typeface="Microsoft YaHei"/>
+              </a:rPr>
+              <a:t>提升入驻率与续约率</a:t>
+            </a:r>
+          </a:p>
+        </p:txBody>
+      </p:sp>
+      <p:sp>
+        <p:nvSpPr>
+          <p:cNvPr id="21" name="TextBox 20"/>
+          <p:cNvSpPr txBox="1"/>
+          <p:nvPr/>
+        </p:nvSpPr>
+        <p:spPr>
+          <a:xfrm>
+            <a:off x="6675120" y="3227831"/>
+            <a:ext cx="4617720" cy="384048"/>
+          </a:xfrm>
+          <a:prstGeom prst="rect">
+            <a:avLst/>
+          </a:prstGeom>
+          <a:noFill/>
+        </p:spPr>
+        <p:txBody>
+          <a:bodyPr wrap="square" anchor="t" lIns="0" rIns="0" tIns="0" bIns="0">
+            <a:spAutoFit/>
+          </a:bodyPr>
+          <a:lstStyle/>
+          <a:p>
+            <a:pPr algn="l">
+              <a:lnSpc>
+                <a:spcPct val="100000"/>
+              </a:lnSpc>
+              <a:spcBef>
+                <a:spcPts val="0"/>
+              </a:spcBef>
+              <a:spcAft>
+                <a:spcPts val="400"/>
+              </a:spcAft>
+            </a:pPr>
+            <a:r>
+              <a:rPr sz="1100" b="1">
+                <a:solidFill>
+                  <a:srgbClr val="00B4D8"/>
+                </a:solidFill>
+                <a:latin typeface="Microsoft YaHei"/>
+                <a:ea typeface="Microsoft YaHei"/>
+              </a:rPr>
+              <a:t>● </a:t>
+            </a:r>
+            <a:r>
+              <a:rPr sz="1250" b="0">
+                <a:solidFill>
+                  <a:srgbClr val="1B2433"/>
+                </a:solidFill>
+                <a:latin typeface="Microsoft YaHei"/>
+                <a:ea typeface="Microsoft YaHei"/>
+              </a:rPr>
+              <a:t>升级为“算力友好型”载体</a:t>
+            </a:r>
+          </a:p>
+        </p:txBody>
+      </p:sp>
+      <p:sp>
+        <p:nvSpPr>
+          <p:cNvPr id="22" name="Rounded Rectangle 21"/>
+          <p:cNvSpPr/>
+          <p:nvPr/>
+        </p:nvSpPr>
+        <p:spPr>
+          <a:xfrm>
+            <a:off x="731520" y="3840480"/>
+            <a:ext cx="5257800" cy="1874519"/>
+          </a:xfrm>
+          <a:prstGeom prst="roundRect">
+            <a:avLst/>
+          </a:prstGeom>
+          <a:solidFill>
+            <a:srgbClr val="EAF2FB"/>
+          </a:solidFill>
+          <a:ln>
+            <a:noFill/>
+          </a:ln>
+          <a:effectLst/>
+        </p:spPr>
+        <p:style>
+          <a:lnRef idx="1">
+            <a:schemeClr val="accent1"/>
+          </a:lnRef>
+          <a:fillRef idx="3">
+            <a:schemeClr val="accent1"/>
+          </a:fillRef>
+          <a:effectRef idx="2">
+            <a:schemeClr val="accent1"/>
+          </a:effectRef>
+          <a:fontRef idx="minor">
+            <a:schemeClr val="lt1"/>
+          </a:fontRef>
+        </p:style>
+        <p:txBody>
+          <a:bodyPr rtlCol="0" anchor="ctr"/>
+          <a:lstStyle/>
+          <a:p>
+            <a:pPr algn="ctr"/>
+          </a:p>
+        </p:txBody>
+      </p:sp>
+      <p:sp>
+        <p:nvSpPr>
+          <p:cNvPr id="23" name="Rectangle 22"/>
+          <p:cNvSpPr/>
+          <p:nvPr/>
+        </p:nvSpPr>
+        <p:spPr>
+          <a:xfrm>
+            <a:off x="731520" y="3840480"/>
+            <a:ext cx="146304" cy="1874519"/>
+          </a:xfrm>
+          <a:prstGeom prst="rect">
+            <a:avLst/>
+          </a:prstGeom>
+          <a:solidFill>
+            <a:srgbClr val="F2A02D"/>
+          </a:solidFill>
+          <a:ln>
+            <a:noFill/>
+          </a:ln>
+          <a:effectLst/>
+        </p:spPr>
+        <p:style>
+          <a:lnRef idx="1">
+            <a:schemeClr val="accent1"/>
+          </a:lnRef>
+          <a:fillRef idx="3">
+            <a:schemeClr val="accent1"/>
+          </a:fillRef>
+          <a:effectRef idx="2">
+            <a:schemeClr val="accent1"/>
+          </a:effectRef>
+          <a:fontRef idx="minor">
+            <a:schemeClr val="lt1"/>
+          </a:fontRef>
+        </p:style>
+        <p:txBody>
+          <a:bodyPr rtlCol="0" anchor="ctr"/>
+          <a:lstStyle/>
+          <a:p>
+            <a:pPr algn="ctr"/>
+          </a:p>
+        </p:txBody>
+      </p:sp>
+      <p:sp>
+        <p:nvSpPr>
+          <p:cNvPr id="24" name="TextBox 23"/>
+          <p:cNvSpPr txBox="1"/>
+          <p:nvPr/>
+        </p:nvSpPr>
+        <p:spPr>
+          <a:xfrm>
+            <a:off x="1097280" y="4005072"/>
+            <a:ext cx="4709160" cy="457200"/>
+          </a:xfrm>
+          <a:prstGeom prst="rect">
+            <a:avLst/>
+          </a:prstGeom>
+          <a:noFill/>
+        </p:spPr>
+        <p:txBody>
+          <a:bodyPr wrap="square" anchor="t" lIns="0" rIns="0" tIns="0" bIns="0">
+            <a:spAutoFit/>
+          </a:bodyPr>
+          <a:lstStyle/>
+          <a:p>
+            <a:pPr algn="l">
+              <a:lnSpc>
+                <a:spcPct val="100000"/>
+              </a:lnSpc>
+              <a:spcBef>
+                <a:spcPts val="0"/>
+              </a:spcBef>
+              <a:spcAft>
+                <a:spcPts val="400"/>
+              </a:spcAft>
+            </a:pPr>
+            <a:r>
+              <a:rPr sz="1600" b="1">
+                <a:solidFill>
+                  <a:srgbClr val="F2A02D"/>
+                </a:solidFill>
+                <a:latin typeface="Microsoft YaHei"/>
+                <a:ea typeface="Microsoft YaHei"/>
+              </a:rPr>
+              <a:t>入驻 B 端企业</a:t>
+            </a:r>
+          </a:p>
+        </p:txBody>
+      </p:sp>
+      <p:sp>
+        <p:nvSpPr>
+          <p:cNvPr id="25" name="TextBox 24"/>
+          <p:cNvSpPr txBox="1"/>
+          <p:nvPr/>
+        </p:nvSpPr>
+        <p:spPr>
+          <a:xfrm>
+            <a:off x="1143000" y="4498848"/>
+            <a:ext cx="4617720" cy="384048"/>
+          </a:xfrm>
+          <a:prstGeom prst="rect">
+            <a:avLst/>
+          </a:prstGeom>
+          <a:noFill/>
+        </p:spPr>
+        <p:txBody>
+          <a:bodyPr wrap="square" anchor="t" lIns="0" rIns="0" tIns="0" bIns="0">
+            <a:spAutoFit/>
+          </a:bodyPr>
+          <a:lstStyle/>
+          <a:p>
+            <a:pPr algn="l">
+              <a:lnSpc>
+                <a:spcPct val="100000"/>
+              </a:lnSpc>
+              <a:spcBef>
+                <a:spcPts val="0"/>
+              </a:spcBef>
+              <a:spcAft>
+                <a:spcPts val="400"/>
+              </a:spcAft>
+            </a:pPr>
+            <a:r>
+              <a:rPr sz="1100" b="1">
+                <a:solidFill>
+                  <a:srgbClr val="F2A02D"/>
+                </a:solidFill>
+                <a:latin typeface="Microsoft YaHei"/>
+                <a:ea typeface="Microsoft YaHei"/>
+              </a:rPr>
+              <a:t>● </a:t>
+            </a:r>
+            <a:r>
+              <a:rPr sz="1250" b="0">
+                <a:solidFill>
+                  <a:srgbClr val="1B2433"/>
+                </a:solidFill>
+                <a:latin typeface="Microsoft YaHei"/>
+                <a:ea typeface="Microsoft YaHei"/>
+              </a:rPr>
+              <a:t>降低用云与租金成本</a:t>
+            </a:r>
+          </a:p>
+        </p:txBody>
+      </p:sp>
+      <p:sp>
+        <p:nvSpPr>
+          <p:cNvPr id="26" name="TextBox 25"/>
+          <p:cNvSpPr txBox="1"/>
+          <p:nvPr/>
+        </p:nvSpPr>
+        <p:spPr>
+          <a:xfrm>
+            <a:off x="1143000" y="4892040"/>
+            <a:ext cx="4617720" cy="384048"/>
+          </a:xfrm>
+          <a:prstGeom prst="rect">
+            <a:avLst/>
+          </a:prstGeom>
+          <a:noFill/>
+        </p:spPr>
+        <p:txBody>
+          <a:bodyPr wrap="square" anchor="t" lIns="0" rIns="0" tIns="0" bIns="0">
+            <a:spAutoFit/>
+          </a:bodyPr>
+          <a:lstStyle/>
+          <a:p>
+            <a:pPr algn="l">
+              <a:lnSpc>
+                <a:spcPct val="100000"/>
+              </a:lnSpc>
+              <a:spcBef>
+                <a:spcPts val="0"/>
+              </a:spcBef>
+              <a:spcAft>
+                <a:spcPts val="400"/>
+              </a:spcAft>
+            </a:pPr>
+            <a:r>
+              <a:rPr sz="1100" b="1">
+                <a:solidFill>
+                  <a:srgbClr val="F2A02D"/>
+                </a:solidFill>
+                <a:latin typeface="Microsoft YaHei"/>
+                <a:ea typeface="Microsoft YaHei"/>
+              </a:rPr>
+              <a:t>● </a:t>
+            </a:r>
+            <a:r>
+              <a:rPr sz="1250" b="0">
+                <a:solidFill>
+                  <a:srgbClr val="1B2433"/>
+                </a:solidFill>
+                <a:latin typeface="Microsoft YaHei"/>
+                <a:ea typeface="Microsoft YaHei"/>
+              </a:rPr>
+              <a:t>获得算力与上云支持</a:t>
+            </a:r>
+          </a:p>
+        </p:txBody>
+      </p:sp>
+      <p:sp>
+        <p:nvSpPr>
+          <p:cNvPr id="27" name="TextBox 26"/>
+          <p:cNvSpPr txBox="1"/>
+          <p:nvPr/>
+        </p:nvSpPr>
+        <p:spPr>
+          <a:xfrm>
+            <a:off x="1143000" y="5285231"/>
+            <a:ext cx="4617720" cy="384048"/>
+          </a:xfrm>
+          <a:prstGeom prst="rect">
+            <a:avLst/>
+          </a:prstGeom>
+          <a:noFill/>
+        </p:spPr>
+        <p:txBody>
+          <a:bodyPr wrap="square" anchor="t" lIns="0" rIns="0" tIns="0" bIns="0">
+            <a:spAutoFit/>
+          </a:bodyPr>
+          <a:lstStyle/>
+          <a:p>
+            <a:pPr algn="l">
+              <a:lnSpc>
+                <a:spcPct val="100000"/>
+              </a:lnSpc>
+              <a:spcBef>
+                <a:spcPts val="0"/>
+              </a:spcBef>
+              <a:spcAft>
+                <a:spcPts val="400"/>
+              </a:spcAft>
+            </a:pPr>
+            <a:r>
+              <a:rPr sz="1100" b="1">
+                <a:solidFill>
+                  <a:srgbClr val="F2A02D"/>
+                </a:solidFill>
+                <a:latin typeface="Microsoft YaHei"/>
+                <a:ea typeface="Microsoft YaHei"/>
+              </a:rPr>
+              <a:t>● </a:t>
+            </a:r>
+            <a:r>
+              <a:rPr sz="1250" b="0">
+                <a:solidFill>
+                  <a:srgbClr val="1B2433"/>
+                </a:solidFill>
+                <a:latin typeface="Microsoft YaHei"/>
+                <a:ea typeface="Microsoft YaHei"/>
+              </a:rPr>
+              <a:t>加速 AI 应用落地</a:t>
+            </a:r>
+          </a:p>
+        </p:txBody>
+      </p:sp>
+      <p:sp>
+        <p:nvSpPr>
+          <p:cNvPr id="28" name="Rounded Rectangle 27"/>
+          <p:cNvSpPr/>
+          <p:nvPr/>
+        </p:nvSpPr>
+        <p:spPr>
+          <a:xfrm>
+            <a:off x="6263640" y="3840480"/>
+            <a:ext cx="5257800" cy="1874519"/>
+          </a:xfrm>
+          <a:prstGeom prst="roundRect">
+            <a:avLst/>
+          </a:prstGeom>
+          <a:solidFill>
+            <a:srgbClr val="EAF2FB"/>
+          </a:solidFill>
+          <a:ln>
+            <a:noFill/>
+          </a:ln>
+          <a:effectLst/>
+        </p:spPr>
+        <p:style>
+          <a:lnRef idx="1">
+            <a:schemeClr val="accent1"/>
+          </a:lnRef>
+          <a:fillRef idx="3">
+            <a:schemeClr val="accent1"/>
+          </a:fillRef>
+          <a:effectRef idx="2">
+            <a:schemeClr val="accent1"/>
+          </a:effectRef>
+          <a:fontRef idx="minor">
+            <a:schemeClr val="lt1"/>
+          </a:fontRef>
+        </p:style>
+        <p:txBody>
+          <a:bodyPr rtlCol="0" anchor="ctr"/>
+          <a:lstStyle/>
+          <a:p>
+            <a:pPr algn="ctr"/>
+          </a:p>
+        </p:txBody>
+      </p:sp>
+      <p:sp>
+        <p:nvSpPr>
+          <p:cNvPr id="29" name="Rectangle 28"/>
+          <p:cNvSpPr/>
+          <p:nvPr/>
+        </p:nvSpPr>
+        <p:spPr>
+          <a:xfrm>
+            <a:off x="6263640" y="3840480"/>
+            <a:ext cx="146304" cy="1874519"/>
+          </a:xfrm>
+          <a:prstGeom prst="rect">
+            <a:avLst/>
+          </a:prstGeom>
+          <a:solidFill>
+            <a:srgbClr val="0B2A5B"/>
+          </a:solidFill>
+          <a:ln>
+            <a:noFill/>
+          </a:ln>
+          <a:effectLst/>
+        </p:spPr>
+        <p:style>
+          <a:lnRef idx="1">
+            <a:schemeClr val="accent1"/>
+          </a:lnRef>
+          <a:fillRef idx="3">
+            <a:schemeClr val="accent1"/>
+          </a:fillRef>
+          <a:effectRef idx="2">
+            <a:schemeClr val="accent1"/>
+          </a:effectRef>
+          <a:fontRef idx="minor">
+            <a:schemeClr val="lt1"/>
+          </a:fontRef>
+        </p:style>
+        <p:txBody>
+          <a:bodyPr rtlCol="0" anchor="ctr"/>
+          <a:lstStyle/>
+          <a:p>
+            <a:pPr algn="ctr"/>
+          </a:p>
+        </p:txBody>
+      </p:sp>
+      <p:sp>
+        <p:nvSpPr>
+          <p:cNvPr id="30" name="TextBox 29"/>
+          <p:cNvSpPr txBox="1"/>
+          <p:nvPr/>
+        </p:nvSpPr>
+        <p:spPr>
+          <a:xfrm>
+            <a:off x="6629400" y="4005072"/>
+            <a:ext cx="4709160" cy="457200"/>
+          </a:xfrm>
+          <a:prstGeom prst="rect">
+            <a:avLst/>
+          </a:prstGeom>
+          <a:noFill/>
+        </p:spPr>
+        <p:txBody>
+          <a:bodyPr wrap="square" anchor="t" lIns="0" rIns="0" tIns="0" bIns="0">
+            <a:spAutoFit/>
+          </a:bodyPr>
+          <a:lstStyle/>
+          <a:p>
+            <a:pPr algn="l">
+              <a:lnSpc>
+                <a:spcPct val="100000"/>
+              </a:lnSpc>
+              <a:spcBef>
+                <a:spcPts val="0"/>
+              </a:spcBef>
+              <a:spcAft>
+                <a:spcPts val="400"/>
+              </a:spcAft>
+            </a:pPr>
+            <a:r>
+              <a:rPr sz="1600" b="1">
                 <a:solidFill>
                   <a:srgbClr val="0B2A5B"/>
                 </a:solidFill>
                 <a:latin typeface="Microsoft YaHei"/>
                 <a:ea typeface="Microsoft YaHei"/>
               </a:rPr>
-              <a:t>开放接入 · 标准复制 · 平台运营 —— 形成可持续扩张的算力普惠生态</a:t>
+              <a:t>源信网络 + 研究中心 + 联合会</a:t>
+            </a:r>
+          </a:p>
+        </p:txBody>
+      </p:sp>
+      <p:sp>
+        <p:nvSpPr>
+          <p:cNvPr id="31" name="TextBox 30"/>
+          <p:cNvSpPr txBox="1"/>
+          <p:nvPr/>
+        </p:nvSpPr>
+        <p:spPr>
+          <a:xfrm>
+            <a:off x="6675120" y="4498848"/>
+            <a:ext cx="4617720" cy="384048"/>
+          </a:xfrm>
+          <a:prstGeom prst="rect">
+            <a:avLst/>
+          </a:prstGeom>
+          <a:noFill/>
+        </p:spPr>
+        <p:txBody>
+          <a:bodyPr wrap="square" anchor="t" lIns="0" rIns="0" tIns="0" bIns="0">
+            <a:spAutoFit/>
+          </a:bodyPr>
+          <a:lstStyle/>
+          <a:p>
+            <a:pPr algn="l">
+              <a:lnSpc>
+                <a:spcPct val="100000"/>
+              </a:lnSpc>
+              <a:spcBef>
+                <a:spcPts val="0"/>
+              </a:spcBef>
+              <a:spcAft>
+                <a:spcPts val="400"/>
+              </a:spcAft>
+            </a:pPr>
+            <a:r>
+              <a:rPr sz="1100" b="1">
+                <a:solidFill>
+                  <a:srgbClr val="0B2A5B"/>
+                </a:solidFill>
+                <a:latin typeface="Microsoft YaHei"/>
+                <a:ea typeface="Microsoft YaHei"/>
+              </a:rPr>
+              <a:t>● </a:t>
+            </a:r>
+            <a:r>
+              <a:rPr sz="1250" b="0">
+                <a:solidFill>
+                  <a:srgbClr val="1B2433"/>
+                </a:solidFill>
+                <a:latin typeface="Microsoft YaHei"/>
+                <a:ea typeface="Microsoft YaHei"/>
+              </a:rPr>
+              <a:t>运营服务与生态收益</a:t>
+            </a:r>
+          </a:p>
+        </p:txBody>
+      </p:sp>
+      <p:sp>
+        <p:nvSpPr>
+          <p:cNvPr id="32" name="TextBox 31"/>
+          <p:cNvSpPr txBox="1"/>
+          <p:nvPr/>
+        </p:nvSpPr>
+        <p:spPr>
+          <a:xfrm>
+            <a:off x="6675120" y="4892040"/>
+            <a:ext cx="4617720" cy="384048"/>
+          </a:xfrm>
+          <a:prstGeom prst="rect">
+            <a:avLst/>
+          </a:prstGeom>
+          <a:noFill/>
+        </p:spPr>
+        <p:txBody>
+          <a:bodyPr wrap="square" anchor="t" lIns="0" rIns="0" tIns="0" bIns="0">
+            <a:spAutoFit/>
+          </a:bodyPr>
+          <a:lstStyle/>
+          <a:p>
+            <a:pPr algn="l">
+              <a:lnSpc>
+                <a:spcPct val="100000"/>
+              </a:lnSpc>
+              <a:spcBef>
+                <a:spcPts val="0"/>
+              </a:spcBef>
+              <a:spcAft>
+                <a:spcPts val="400"/>
+              </a:spcAft>
+            </a:pPr>
+            <a:r>
+              <a:rPr sz="1100" b="1">
+                <a:solidFill>
+                  <a:srgbClr val="0B2A5B"/>
+                </a:solidFill>
+                <a:latin typeface="Microsoft YaHei"/>
+                <a:ea typeface="Microsoft YaHei"/>
+              </a:rPr>
+              <a:t>● </a:t>
+            </a:r>
+            <a:r>
+              <a:rPr sz="1250" b="0">
+                <a:solidFill>
+                  <a:srgbClr val="1B2433"/>
+                </a:solidFill>
+                <a:latin typeface="Microsoft YaHei"/>
+                <a:ea typeface="Microsoft YaHei"/>
+              </a:rPr>
+              <a:t>政策研究与成果背书</a:t>
+            </a:r>
+          </a:p>
+        </p:txBody>
+      </p:sp>
+      <p:sp>
+        <p:nvSpPr>
+          <p:cNvPr id="33" name="TextBox 32"/>
+          <p:cNvSpPr txBox="1"/>
+          <p:nvPr/>
+        </p:nvSpPr>
+        <p:spPr>
+          <a:xfrm>
+            <a:off x="6675120" y="5285231"/>
+            <a:ext cx="4617720" cy="384048"/>
+          </a:xfrm>
+          <a:prstGeom prst="rect">
+            <a:avLst/>
+          </a:prstGeom>
+          <a:noFill/>
+        </p:spPr>
+        <p:txBody>
+          <a:bodyPr wrap="square" anchor="t" lIns="0" rIns="0" tIns="0" bIns="0">
+            <a:spAutoFit/>
+          </a:bodyPr>
+          <a:lstStyle/>
+          <a:p>
+            <a:pPr algn="l">
+              <a:lnSpc>
+                <a:spcPct val="100000"/>
+              </a:lnSpc>
+              <a:spcBef>
+                <a:spcPts val="0"/>
+              </a:spcBef>
+              <a:spcAft>
+                <a:spcPts val="400"/>
+              </a:spcAft>
+            </a:pPr>
+            <a:r>
+              <a:rPr sz="1100" b="1">
+                <a:solidFill>
+                  <a:srgbClr val="0B2A5B"/>
+                </a:solidFill>
+                <a:latin typeface="Microsoft YaHei"/>
+                <a:ea typeface="Microsoft YaHei"/>
+              </a:rPr>
+              <a:t>● </a:t>
+            </a:r>
+            <a:r>
+              <a:rPr sz="1250" b="0">
+                <a:solidFill>
+                  <a:srgbClr val="1B2433"/>
+                </a:solidFill>
+                <a:latin typeface="Microsoft YaHei"/>
+                <a:ea typeface="Microsoft YaHei"/>
+              </a:rPr>
+              <a:t>区域科创影响力提升</a:t>
             </a:r>
           </a:p>
         </p:txBody>
@@ -5349,7 +5386,7 @@
                 <a:latin typeface="Microsoft YaHei"/>
                 <a:ea typeface="Microsoft YaHei"/>
               </a:rPr>
-              <a:t>09  落地路径</a:t>
+              <a:t>09  可复制模式</a:t>
             </a:r>
           </a:p>
         </p:txBody>
@@ -5395,7 +5432,7 @@
                 <a:latin typeface="Microsoft YaHei"/>
                 <a:ea typeface="Microsoft YaHei"/>
               </a:rPr>
-              <a:t>落地路径与下一步</a:t>
+              <a:t>开放式 · 可复制合作模式</a:t>
             </a:r>
           </a:p>
         </p:txBody>
@@ -5485,7 +5522,7 @@
                 <a:latin typeface="Microsoft YaHei"/>
                 <a:ea typeface="Microsoft YaHei"/>
               </a:rPr>
-              <a:t>09 / 09</a:t>
+              <a:t>09 / 10</a:t>
             </a:r>
           </a:p>
         </p:txBody>
@@ -5538,14 +5575,60 @@
       </p:sp>
       <p:sp>
         <p:nvSpPr>
-          <p:cNvPr id="10" name="Rounded Rectangle 9"/>
+          <p:cNvPr id="10" name="TextBox 9"/>
+          <p:cNvSpPr txBox="1"/>
+          <p:nvPr/>
+        </p:nvSpPr>
+        <p:spPr>
+          <a:xfrm>
+            <a:off x="731520" y="1572768"/>
+            <a:ext cx="10698480" cy="457200"/>
+          </a:xfrm>
+          <a:prstGeom prst="rect">
+            <a:avLst/>
+          </a:prstGeom>
+          <a:noFill/>
+        </p:spPr>
+        <p:txBody>
+          <a:bodyPr wrap="square" anchor="t" lIns="0" rIns="0" tIns="0" bIns="0">
+            <a:spAutoFit/>
+          </a:bodyPr>
+          <a:lstStyle/>
+          <a:p>
+            <a:pPr algn="l">
+              <a:lnSpc>
+                <a:spcPct val="110000"/>
+              </a:lnSpc>
+              <a:spcBef>
+                <a:spcPts val="0"/>
+              </a:spcBef>
+              <a:spcAft>
+                <a:spcPts val="400"/>
+              </a:spcAft>
+            </a:pPr>
+            <a:r>
+              <a:rPr sz="1350" b="0">
+                <a:solidFill>
+                  <a:srgbClr val="5A6472"/>
+                </a:solidFill>
+                <a:latin typeface="Microsoft YaHei"/>
+                <a:ea typeface="Microsoft YaHei"/>
+              </a:rPr>
+              <a:t>把三方合作沉淀为“一次设计、处处可用”的开放式算力普惠样板——任何楼宇 / 园区 / 区域均可低成本接入与复制。</a:t>
+            </a:r>
+          </a:p>
+        </p:txBody>
+      </p:sp>
+      <p:sp>
+        <p:nvSpPr>
+          <p:cNvPr id="11" name="Rounded Rectangle 10"/>
           <p:cNvSpPr/>
           <p:nvPr/>
         </p:nvSpPr>
         <p:spPr>
           <a:xfrm>
-            <a:off x="777240" y="1828800"/>
-            <a:ext cx="3474720" cy="2286000"/>
+            <a:off x="731520" y="2240280"/>
+            <a:ext cx="5257800" cy="1783080"/>
           </a:xfrm>
           <a:prstGeom prst="roundRect">
             <a:avLst/>
@@ -5582,14 +5665,14 @@
       </p:sp>
       <p:sp>
         <p:nvSpPr>
-          <p:cNvPr id="11" name="Rounded Rectangle 10"/>
+          <p:cNvPr id="12" name="Rounded Rectangle 11"/>
           <p:cNvSpPr/>
           <p:nvPr/>
         </p:nvSpPr>
         <p:spPr>
           <a:xfrm>
-            <a:off x="777240" y="1828800"/>
-            <a:ext cx="3474720" cy="868680"/>
+            <a:off x="731520" y="2240280"/>
+            <a:ext cx="1417320" cy="1783080"/>
           </a:xfrm>
           <a:prstGeom prst="roundRect">
             <a:avLst/>
@@ -5626,14 +5709,58 @@
       </p:sp>
       <p:sp>
         <p:nvSpPr>
-          <p:cNvPr id="12" name="TextBox 11"/>
+          <p:cNvPr id="13" name="Rectangle 12"/>
+          <p:cNvSpPr/>
+          <p:nvPr/>
+        </p:nvSpPr>
+        <p:spPr>
+          <a:xfrm>
+            <a:off x="1828800" y="2240280"/>
+            <a:ext cx="365760" cy="1783080"/>
+          </a:xfrm>
+          <a:prstGeom prst="rect">
+            <a:avLst/>
+          </a:prstGeom>
+          <a:solidFill>
+            <a:srgbClr val="125CC4"/>
+          </a:solidFill>
+          <a:ln>
+            <a:noFill/>
+          </a:ln>
+          <a:effectLst/>
+        </p:spPr>
+        <p:style>
+          <a:lnRef idx="1">
+            <a:schemeClr val="accent1"/>
+          </a:lnRef>
+          <a:fillRef idx="3">
+            <a:schemeClr val="accent1"/>
+          </a:fillRef>
+          <a:effectRef idx="2">
+            <a:schemeClr val="accent1"/>
+          </a:effectRef>
+          <a:fontRef idx="minor">
+            <a:schemeClr val="lt1"/>
+          </a:fontRef>
+        </p:style>
+        <p:txBody>
+          <a:bodyPr rtlCol="0" anchor="ctr"/>
+          <a:lstStyle/>
+          <a:p>
+            <a:pPr algn="ctr"/>
+          </a:p>
+        </p:txBody>
+      </p:sp>
+      <p:sp>
+        <p:nvSpPr>
+          <p:cNvPr id="14" name="TextBox 13"/>
           <p:cNvSpPr txBox="1"/>
           <p:nvPr/>
         </p:nvSpPr>
         <p:spPr>
           <a:xfrm>
-            <a:off x="777240" y="1920240"/>
-            <a:ext cx="3474720" cy="731520"/>
+            <a:off x="822960" y="2240280"/>
+            <a:ext cx="1234440" cy="1783080"/>
           </a:xfrm>
           <a:prstGeom prst="rect">
             <a:avLst/>
@@ -5641,7 +5768,7 @@
           <a:noFill/>
         </p:spPr>
         <p:txBody>
-          <a:bodyPr wrap="square" anchor="t" lIns="0" rIns="0" tIns="0" bIns="0">
+          <a:bodyPr wrap="square" anchor="ctr" lIns="0" rIns="0" tIns="0" bIns="0">
             <a:spAutoFit/>
           </a:bodyPr>
           <a:lstStyle/>
@@ -5658,16 +5785,263 @@
               </a:spcAft>
             </a:pPr>
             <a:r>
-              <a:rPr sz="1500" b="1">
+              <a:rPr sz="3000" b="1">
                 <a:solidFill>
                   <a:srgbClr val="FFFFFF"/>
                 </a:solidFill>
                 <a:latin typeface="Microsoft YaHei"/>
                 <a:ea typeface="Microsoft YaHei"/>
               </a:rPr>
-              <a:t>第一阶段</a:t>
-            </a:r>
-          </a:p>
+              <a:t>01</a:t>
+            </a:r>
+          </a:p>
+        </p:txBody>
+      </p:sp>
+      <p:sp>
+        <p:nvSpPr>
+          <p:cNvPr id="15" name="TextBox 14"/>
+          <p:cNvSpPr txBox="1"/>
+          <p:nvPr/>
+        </p:nvSpPr>
+        <p:spPr>
+          <a:xfrm>
+            <a:off x="2377440" y="2496312"/>
+            <a:ext cx="3429000" cy="457200"/>
+          </a:xfrm>
+          <a:prstGeom prst="rect">
+            <a:avLst/>
+          </a:prstGeom>
+          <a:noFill/>
+        </p:spPr>
+        <p:txBody>
+          <a:bodyPr wrap="square" anchor="t" lIns="0" rIns="0" tIns="0" bIns="0">
+            <a:spAutoFit/>
+          </a:bodyPr>
+          <a:lstStyle/>
+          <a:p>
+            <a:pPr algn="l">
+              <a:lnSpc>
+                <a:spcPct val="100000"/>
+              </a:lnSpc>
+              <a:spcBef>
+                <a:spcPts val="0"/>
+              </a:spcBef>
+              <a:spcAft>
+                <a:spcPts val="400"/>
+              </a:spcAft>
+            </a:pPr>
+            <a:r>
+              <a:rPr sz="1700" b="1">
+                <a:solidFill>
+                  <a:srgbClr val="125CC4"/>
+                </a:solidFill>
+                <a:latin typeface="Microsoft YaHei"/>
+                <a:ea typeface="Microsoft YaHei"/>
+              </a:rPr>
+              <a:t>标准化模板</a:t>
+            </a:r>
+          </a:p>
+        </p:txBody>
+      </p:sp>
+      <p:sp>
+        <p:nvSpPr>
+          <p:cNvPr id="16" name="TextBox 15"/>
+          <p:cNvSpPr txBox="1"/>
+          <p:nvPr/>
+        </p:nvSpPr>
+        <p:spPr>
+          <a:xfrm>
+            <a:off x="2377440" y="3017520"/>
+            <a:ext cx="3383281" cy="914400"/>
+          </a:xfrm>
+          <a:prstGeom prst="rect">
+            <a:avLst/>
+          </a:prstGeom>
+          <a:noFill/>
+        </p:spPr>
+        <p:txBody>
+          <a:bodyPr wrap="square" anchor="t" lIns="0" rIns="0" tIns="0" bIns="0">
+            <a:spAutoFit/>
+          </a:bodyPr>
+          <a:lstStyle/>
+          <a:p>
+            <a:pPr algn="l">
+              <a:lnSpc>
+                <a:spcPct val="115000"/>
+              </a:lnSpc>
+              <a:spcBef>
+                <a:spcPts val="0"/>
+              </a:spcBef>
+              <a:spcAft>
+                <a:spcPts val="400"/>
+              </a:spcAft>
+            </a:pPr>
+            <a:r>
+              <a:rPr sz="1250" b="0">
+                <a:solidFill>
+                  <a:srgbClr val="1B2433"/>
+                </a:solidFill>
+                <a:latin typeface="Microsoft YaHei"/>
+                <a:ea typeface="Microsoft YaHei"/>
+              </a:rPr>
+              <a:t>合作协议、准入条件、补贴标准、核销流程全部模板化，开箱即用。</a:t>
+            </a:r>
+          </a:p>
+        </p:txBody>
+      </p:sp>
+      <p:sp>
+        <p:nvSpPr>
+          <p:cNvPr id="17" name="Rounded Rectangle 16"/>
+          <p:cNvSpPr/>
+          <p:nvPr/>
+        </p:nvSpPr>
+        <p:spPr>
+          <a:xfrm>
+            <a:off x="6263640" y="2240280"/>
+            <a:ext cx="5257800" cy="1783080"/>
+          </a:xfrm>
+          <a:prstGeom prst="roundRect">
+            <a:avLst/>
+          </a:prstGeom>
+          <a:solidFill>
+            <a:srgbClr val="EAF2FB"/>
+          </a:solidFill>
+          <a:ln>
+            <a:noFill/>
+          </a:ln>
+          <a:effectLst/>
+        </p:spPr>
+        <p:style>
+          <a:lnRef idx="1">
+            <a:schemeClr val="accent1"/>
+          </a:lnRef>
+          <a:fillRef idx="3">
+            <a:schemeClr val="accent1"/>
+          </a:fillRef>
+          <a:effectRef idx="2">
+            <a:schemeClr val="accent1"/>
+          </a:effectRef>
+          <a:fontRef idx="minor">
+            <a:schemeClr val="lt1"/>
+          </a:fontRef>
+        </p:style>
+        <p:txBody>
+          <a:bodyPr rtlCol="0" anchor="ctr"/>
+          <a:lstStyle/>
+          <a:p>
+            <a:pPr algn="ctr"/>
+          </a:p>
+        </p:txBody>
+      </p:sp>
+      <p:sp>
+        <p:nvSpPr>
+          <p:cNvPr id="18" name="Rounded Rectangle 17"/>
+          <p:cNvSpPr/>
+          <p:nvPr/>
+        </p:nvSpPr>
+        <p:spPr>
+          <a:xfrm>
+            <a:off x="6263640" y="2240280"/>
+            <a:ext cx="1417320" cy="1783080"/>
+          </a:xfrm>
+          <a:prstGeom prst="roundRect">
+            <a:avLst/>
+          </a:prstGeom>
+          <a:solidFill>
+            <a:srgbClr val="00B4D8"/>
+          </a:solidFill>
+          <a:ln>
+            <a:noFill/>
+          </a:ln>
+          <a:effectLst/>
+        </p:spPr>
+        <p:style>
+          <a:lnRef idx="1">
+            <a:schemeClr val="accent1"/>
+          </a:lnRef>
+          <a:fillRef idx="3">
+            <a:schemeClr val="accent1"/>
+          </a:fillRef>
+          <a:effectRef idx="2">
+            <a:schemeClr val="accent1"/>
+          </a:effectRef>
+          <a:fontRef idx="minor">
+            <a:schemeClr val="lt1"/>
+          </a:fontRef>
+        </p:style>
+        <p:txBody>
+          <a:bodyPr rtlCol="0" anchor="ctr"/>
+          <a:lstStyle/>
+          <a:p>
+            <a:pPr algn="ctr"/>
+          </a:p>
+        </p:txBody>
+      </p:sp>
+      <p:sp>
+        <p:nvSpPr>
+          <p:cNvPr id="19" name="Rectangle 18"/>
+          <p:cNvSpPr/>
+          <p:nvPr/>
+        </p:nvSpPr>
+        <p:spPr>
+          <a:xfrm>
+            <a:off x="7360920" y="2240280"/>
+            <a:ext cx="365760" cy="1783080"/>
+          </a:xfrm>
+          <a:prstGeom prst="rect">
+            <a:avLst/>
+          </a:prstGeom>
+          <a:solidFill>
+            <a:srgbClr val="00B4D8"/>
+          </a:solidFill>
+          <a:ln>
+            <a:noFill/>
+          </a:ln>
+          <a:effectLst/>
+        </p:spPr>
+        <p:style>
+          <a:lnRef idx="1">
+            <a:schemeClr val="accent1"/>
+          </a:lnRef>
+          <a:fillRef idx="3">
+            <a:schemeClr val="accent1"/>
+          </a:fillRef>
+          <a:effectRef idx="2">
+            <a:schemeClr val="accent1"/>
+          </a:effectRef>
+          <a:fontRef idx="minor">
+            <a:schemeClr val="lt1"/>
+          </a:fontRef>
+        </p:style>
+        <p:txBody>
+          <a:bodyPr rtlCol="0" anchor="ctr"/>
+          <a:lstStyle/>
+          <a:p>
+            <a:pPr algn="ctr"/>
+          </a:p>
+        </p:txBody>
+      </p:sp>
+      <p:sp>
+        <p:nvSpPr>
+          <p:cNvPr id="20" name="TextBox 19"/>
+          <p:cNvSpPr txBox="1"/>
+          <p:nvPr/>
+        </p:nvSpPr>
+        <p:spPr>
+          <a:xfrm>
+            <a:off x="6355080" y="2240280"/>
+            <a:ext cx="1234440" cy="1783080"/>
+          </a:xfrm>
+          <a:prstGeom prst="rect">
+            <a:avLst/>
+          </a:prstGeom>
+          <a:noFill/>
+        </p:spPr>
+        <p:txBody>
+          <a:bodyPr wrap="square" anchor="ctr" lIns="0" rIns="0" tIns="0" bIns="0">
+            <a:spAutoFit/>
+          </a:bodyPr>
+          <a:lstStyle/>
           <a:p>
             <a:pPr algn="ctr">
               <a:lnSpc>
@@ -5681,28 +6055,74 @@
               </a:spcAft>
             </a:pPr>
             <a:r>
-              <a:rPr sz="1500" b="1">
+              <a:rPr sz="3000" b="1">
                 <a:solidFill>
                   <a:srgbClr val="FFFFFF"/>
                 </a:solidFill>
                 <a:latin typeface="Microsoft YaHei"/>
                 <a:ea typeface="Microsoft YaHei"/>
               </a:rPr>
-              <a:t>试点</a:t>
-            </a:r>
-          </a:p>
-        </p:txBody>
-      </p:sp>
-      <p:sp>
-        <p:nvSpPr>
-          <p:cNvPr id="13" name="TextBox 12"/>
+              <a:t>02</a:t>
+            </a:r>
+          </a:p>
+        </p:txBody>
+      </p:sp>
+      <p:sp>
+        <p:nvSpPr>
+          <p:cNvPr id="21" name="TextBox 20"/>
           <p:cNvSpPr txBox="1"/>
           <p:nvPr/>
         </p:nvSpPr>
         <p:spPr>
           <a:xfrm>
-            <a:off x="1051560" y="2880360"/>
-            <a:ext cx="2926080" cy="1097280"/>
+            <a:off x="7909560" y="2496312"/>
+            <a:ext cx="3429000" cy="457200"/>
+          </a:xfrm>
+          <a:prstGeom prst="rect">
+            <a:avLst/>
+          </a:prstGeom>
+          <a:noFill/>
+        </p:spPr>
+        <p:txBody>
+          <a:bodyPr wrap="square" anchor="t" lIns="0" rIns="0" tIns="0" bIns="0">
+            <a:spAutoFit/>
+          </a:bodyPr>
+          <a:lstStyle/>
+          <a:p>
+            <a:pPr algn="l">
+              <a:lnSpc>
+                <a:spcPct val="100000"/>
+              </a:lnSpc>
+              <a:spcBef>
+                <a:spcPts val="0"/>
+              </a:spcBef>
+              <a:spcAft>
+                <a:spcPts val="400"/>
+              </a:spcAft>
+            </a:pPr>
+            <a:r>
+              <a:rPr sz="1700" b="1">
+                <a:solidFill>
+                  <a:srgbClr val="00B4D8"/>
+                </a:solidFill>
+                <a:latin typeface="Microsoft YaHei"/>
+                <a:ea typeface="Microsoft YaHei"/>
+              </a:rPr>
+              <a:t>模块化组合</a:t>
+            </a:r>
+          </a:p>
+        </p:txBody>
+      </p:sp>
+      <p:sp>
+        <p:nvSpPr>
+          <p:cNvPr id="22" name="TextBox 21"/>
+          <p:cNvSpPr txBox="1"/>
+          <p:nvPr/>
+        </p:nvSpPr>
+        <p:spPr>
+          <a:xfrm>
+            <a:off x="7909560" y="3017520"/>
+            <a:ext cx="3383281" cy="914400"/>
           </a:xfrm>
           <a:prstGeom prst="rect">
             <a:avLst/>
@@ -5734,23 +6154,67 @@
                 <a:latin typeface="Microsoft YaHei"/>
                 <a:ea typeface="Microsoft YaHei"/>
               </a:rPr>
-              <a:t>选取 1–2 个标杆楼宇 / 园区，确定补贴池与白名单，落地首批企业。</a:t>
-            </a:r>
-          </a:p>
-        </p:txBody>
-      </p:sp>
-      <p:sp>
-        <p:nvSpPr>
-          <p:cNvPr id="14" name="Chevron 13"/>
+              <a:t>算力补贴 / 租金减免 / 消费补贴可按载体需求自由拼装组合。</a:t>
+            </a:r>
+          </a:p>
+        </p:txBody>
+      </p:sp>
+      <p:sp>
+        <p:nvSpPr>
+          <p:cNvPr id="23" name="Rounded Rectangle 22"/>
           <p:cNvSpPr/>
           <p:nvPr/>
         </p:nvSpPr>
         <p:spPr>
           <a:xfrm>
-            <a:off x="4233672" y="2697480"/>
-            <a:ext cx="201168" cy="548640"/>
-          </a:xfrm>
-          <a:prstGeom prst="chevron">
+            <a:off x="731520" y="4178808"/>
+            <a:ext cx="5257800" cy="1783080"/>
+          </a:xfrm>
+          <a:prstGeom prst="roundRect">
+            <a:avLst/>
+          </a:prstGeom>
+          <a:solidFill>
+            <a:srgbClr val="EAF2FB"/>
+          </a:solidFill>
+          <a:ln>
+            <a:noFill/>
+          </a:ln>
+          <a:effectLst/>
+        </p:spPr>
+        <p:style>
+          <a:lnRef idx="1">
+            <a:schemeClr val="accent1"/>
+          </a:lnRef>
+          <a:fillRef idx="3">
+            <a:schemeClr val="accent1"/>
+          </a:fillRef>
+          <a:effectRef idx="2">
+            <a:schemeClr val="accent1"/>
+          </a:effectRef>
+          <a:fontRef idx="minor">
+            <a:schemeClr val="lt1"/>
+          </a:fontRef>
+        </p:style>
+        <p:txBody>
+          <a:bodyPr rtlCol="0" anchor="ctr"/>
+          <a:lstStyle/>
+          <a:p>
+            <a:pPr algn="ctr"/>
+          </a:p>
+        </p:txBody>
+      </p:sp>
+      <p:sp>
+        <p:nvSpPr>
+          <p:cNvPr id="24" name="Rounded Rectangle 23"/>
+          <p:cNvSpPr/>
+          <p:nvPr/>
+        </p:nvSpPr>
+        <p:spPr>
+          <a:xfrm>
+            <a:off x="731520" y="4178808"/>
+            <a:ext cx="1417320" cy="1783080"/>
+          </a:xfrm>
+          <a:prstGeom prst="roundRect">
             <a:avLst/>
           </a:prstGeom>
           <a:solidFill>
@@ -5785,20 +6249,20 @@
       </p:sp>
       <p:sp>
         <p:nvSpPr>
-          <p:cNvPr id="15" name="Rounded Rectangle 14"/>
+          <p:cNvPr id="25" name="Rectangle 24"/>
           <p:cNvSpPr/>
           <p:nvPr/>
         </p:nvSpPr>
         <p:spPr>
           <a:xfrm>
-            <a:off x="4389120" y="1828800"/>
-            <a:ext cx="3474720" cy="2286000"/>
-          </a:xfrm>
-          <a:prstGeom prst="roundRect">
+            <a:off x="1828800" y="4178808"/>
+            <a:ext cx="365760" cy="1783080"/>
+          </a:xfrm>
+          <a:prstGeom prst="rect">
             <a:avLst/>
           </a:prstGeom>
           <a:solidFill>
-            <a:srgbClr val="EAF2FB"/>
+            <a:srgbClr val="F2A02D"/>
           </a:solidFill>
           <a:ln>
             <a:noFill/>
@@ -5829,58 +6293,14 @@
       </p:sp>
       <p:sp>
         <p:nvSpPr>
-          <p:cNvPr id="16" name="Rounded Rectangle 15"/>
-          <p:cNvSpPr/>
-          <p:nvPr/>
-        </p:nvSpPr>
-        <p:spPr>
-          <a:xfrm>
-            <a:off x="4389120" y="1828800"/>
-            <a:ext cx="3474720" cy="868680"/>
-          </a:xfrm>
-          <a:prstGeom prst="roundRect">
-            <a:avLst/>
-          </a:prstGeom>
-          <a:solidFill>
-            <a:srgbClr val="00B4D8"/>
-          </a:solidFill>
-          <a:ln>
-            <a:noFill/>
-          </a:ln>
-          <a:effectLst/>
-        </p:spPr>
-        <p:style>
-          <a:lnRef idx="1">
-            <a:schemeClr val="accent1"/>
-          </a:lnRef>
-          <a:fillRef idx="3">
-            <a:schemeClr val="accent1"/>
-          </a:fillRef>
-          <a:effectRef idx="2">
-            <a:schemeClr val="accent1"/>
-          </a:effectRef>
-          <a:fontRef idx="minor">
-            <a:schemeClr val="lt1"/>
-          </a:fontRef>
-        </p:style>
-        <p:txBody>
-          <a:bodyPr rtlCol="0" anchor="ctr"/>
-          <a:lstStyle/>
-          <a:p>
-            <a:pPr algn="ctr"/>
-          </a:p>
-        </p:txBody>
-      </p:sp>
-      <p:sp>
-        <p:nvSpPr>
-          <p:cNvPr id="17" name="TextBox 16"/>
+          <p:cNvPr id="26" name="TextBox 25"/>
           <p:cNvSpPr txBox="1"/>
           <p:nvPr/>
         </p:nvSpPr>
         <p:spPr>
           <a:xfrm>
-            <a:off x="4389120" y="1920240"/>
-            <a:ext cx="3474720" cy="731520"/>
+            <a:off x="822960" y="4178808"/>
+            <a:ext cx="1234440" cy="1783080"/>
           </a:xfrm>
           <a:prstGeom prst="rect">
             <a:avLst/>
@@ -5888,7 +6308,7 @@
           <a:noFill/>
         </p:spPr>
         <p:txBody>
-          <a:bodyPr wrap="square" anchor="t" lIns="0" rIns="0" tIns="0" bIns="0">
+          <a:bodyPr wrap="square" anchor="ctr" lIns="0" rIns="0" tIns="0" bIns="0">
             <a:spAutoFit/>
           </a:bodyPr>
           <a:lstStyle/>
@@ -5905,16 +6325,263 @@
               </a:spcAft>
             </a:pPr>
             <a:r>
-              <a:rPr sz="1500" b="1">
+              <a:rPr sz="3000" b="1">
                 <a:solidFill>
                   <a:srgbClr val="FFFFFF"/>
                 </a:solidFill>
                 <a:latin typeface="Microsoft YaHei"/>
                 <a:ea typeface="Microsoft YaHei"/>
               </a:rPr>
-              <a:t>第二阶段</a:t>
-            </a:r>
-          </a:p>
+              <a:t>03</a:t>
+            </a:r>
+          </a:p>
+        </p:txBody>
+      </p:sp>
+      <p:sp>
+        <p:nvSpPr>
+          <p:cNvPr id="27" name="TextBox 26"/>
+          <p:cNvSpPr txBox="1"/>
+          <p:nvPr/>
+        </p:nvSpPr>
+        <p:spPr>
+          <a:xfrm>
+            <a:off x="2377440" y="4434840"/>
+            <a:ext cx="3429000" cy="457200"/>
+          </a:xfrm>
+          <a:prstGeom prst="rect">
+            <a:avLst/>
+          </a:prstGeom>
+          <a:noFill/>
+        </p:spPr>
+        <p:txBody>
+          <a:bodyPr wrap="square" anchor="t" lIns="0" rIns="0" tIns="0" bIns="0">
+            <a:spAutoFit/>
+          </a:bodyPr>
+          <a:lstStyle/>
+          <a:p>
+            <a:pPr algn="l">
+              <a:lnSpc>
+                <a:spcPct val="100000"/>
+              </a:lnSpc>
+              <a:spcBef>
+                <a:spcPts val="0"/>
+              </a:spcBef>
+              <a:spcAft>
+                <a:spcPts val="400"/>
+              </a:spcAft>
+            </a:pPr>
+            <a:r>
+              <a:rPr sz="1700" b="1">
+                <a:solidFill>
+                  <a:srgbClr val="F2A02D"/>
+                </a:solidFill>
+                <a:latin typeface="Microsoft YaHei"/>
+                <a:ea typeface="Microsoft YaHei"/>
+              </a:rPr>
+              <a:t>开放式接入</a:t>
+            </a:r>
+          </a:p>
+        </p:txBody>
+      </p:sp>
+      <p:sp>
+        <p:nvSpPr>
+          <p:cNvPr id="28" name="TextBox 27"/>
+          <p:cNvSpPr txBox="1"/>
+          <p:nvPr/>
+        </p:nvSpPr>
+        <p:spPr>
+          <a:xfrm>
+            <a:off x="2377440" y="4956048"/>
+            <a:ext cx="3383281" cy="914400"/>
+          </a:xfrm>
+          <a:prstGeom prst="rect">
+            <a:avLst/>
+          </a:prstGeom>
+          <a:noFill/>
+        </p:spPr>
+        <p:txBody>
+          <a:bodyPr wrap="square" anchor="t" lIns="0" rIns="0" tIns="0" bIns="0">
+            <a:spAutoFit/>
+          </a:bodyPr>
+          <a:lstStyle/>
+          <a:p>
+            <a:pPr algn="l">
+              <a:lnSpc>
+                <a:spcPct val="115000"/>
+              </a:lnSpc>
+              <a:spcBef>
+                <a:spcPts val="0"/>
+              </a:spcBef>
+              <a:spcAft>
+                <a:spcPts val="400"/>
+              </a:spcAft>
+            </a:pPr>
+            <a:r>
+              <a:rPr sz="1250" b="0">
+                <a:solidFill>
+                  <a:srgbClr val="1B2433"/>
+                </a:solidFill>
+                <a:latin typeface="Microsoft YaHei"/>
+                <a:ea typeface="Microsoft YaHei"/>
+              </a:rPr>
+              <a:t>对大厂、物业、园区、企业开放，白名单动态扩容、平台化运营。</a:t>
+            </a:r>
+          </a:p>
+        </p:txBody>
+      </p:sp>
+      <p:sp>
+        <p:nvSpPr>
+          <p:cNvPr id="29" name="Rounded Rectangle 28"/>
+          <p:cNvSpPr/>
+          <p:nvPr/>
+        </p:nvSpPr>
+        <p:spPr>
+          <a:xfrm>
+            <a:off x="6263640" y="4178808"/>
+            <a:ext cx="5257800" cy="1783080"/>
+          </a:xfrm>
+          <a:prstGeom prst="roundRect">
+            <a:avLst/>
+          </a:prstGeom>
+          <a:solidFill>
+            <a:srgbClr val="EAF2FB"/>
+          </a:solidFill>
+          <a:ln>
+            <a:noFill/>
+          </a:ln>
+          <a:effectLst/>
+        </p:spPr>
+        <p:style>
+          <a:lnRef idx="1">
+            <a:schemeClr val="accent1"/>
+          </a:lnRef>
+          <a:fillRef idx="3">
+            <a:schemeClr val="accent1"/>
+          </a:fillRef>
+          <a:effectRef idx="2">
+            <a:schemeClr val="accent1"/>
+          </a:effectRef>
+          <a:fontRef idx="minor">
+            <a:schemeClr val="lt1"/>
+          </a:fontRef>
+        </p:style>
+        <p:txBody>
+          <a:bodyPr rtlCol="0" anchor="ctr"/>
+          <a:lstStyle/>
+          <a:p>
+            <a:pPr algn="ctr"/>
+          </a:p>
+        </p:txBody>
+      </p:sp>
+      <p:sp>
+        <p:nvSpPr>
+          <p:cNvPr id="30" name="Rounded Rectangle 29"/>
+          <p:cNvSpPr/>
+          <p:nvPr/>
+        </p:nvSpPr>
+        <p:spPr>
+          <a:xfrm>
+            <a:off x="6263640" y="4178808"/>
+            <a:ext cx="1417320" cy="1783080"/>
+          </a:xfrm>
+          <a:prstGeom prst="roundRect">
+            <a:avLst/>
+          </a:prstGeom>
+          <a:solidFill>
+            <a:srgbClr val="0B2A5B"/>
+          </a:solidFill>
+          <a:ln>
+            <a:noFill/>
+          </a:ln>
+          <a:effectLst/>
+        </p:spPr>
+        <p:style>
+          <a:lnRef idx="1">
+            <a:schemeClr val="accent1"/>
+          </a:lnRef>
+          <a:fillRef idx="3">
+            <a:schemeClr val="accent1"/>
+          </a:fillRef>
+          <a:effectRef idx="2">
+            <a:schemeClr val="accent1"/>
+          </a:effectRef>
+          <a:fontRef idx="minor">
+            <a:schemeClr val="lt1"/>
+          </a:fontRef>
+        </p:style>
+        <p:txBody>
+          <a:bodyPr rtlCol="0" anchor="ctr"/>
+          <a:lstStyle/>
+          <a:p>
+            <a:pPr algn="ctr"/>
+          </a:p>
+        </p:txBody>
+      </p:sp>
+      <p:sp>
+        <p:nvSpPr>
+          <p:cNvPr id="31" name="Rectangle 30"/>
+          <p:cNvSpPr/>
+          <p:nvPr/>
+        </p:nvSpPr>
+        <p:spPr>
+          <a:xfrm>
+            <a:off x="7360920" y="4178808"/>
+            <a:ext cx="365760" cy="1783080"/>
+          </a:xfrm>
+          <a:prstGeom prst="rect">
+            <a:avLst/>
+          </a:prstGeom>
+          <a:solidFill>
+            <a:srgbClr val="0B2A5B"/>
+          </a:solidFill>
+          <a:ln>
+            <a:noFill/>
+          </a:ln>
+          <a:effectLst/>
+        </p:spPr>
+        <p:style>
+          <a:lnRef idx="1">
+            <a:schemeClr val="accent1"/>
+          </a:lnRef>
+          <a:fillRef idx="3">
+            <a:schemeClr val="accent1"/>
+          </a:fillRef>
+          <a:effectRef idx="2">
+            <a:schemeClr val="accent1"/>
+          </a:effectRef>
+          <a:fontRef idx="minor">
+            <a:schemeClr val="lt1"/>
+          </a:fontRef>
+        </p:style>
+        <p:txBody>
+          <a:bodyPr rtlCol="0" anchor="ctr"/>
+          <a:lstStyle/>
+          <a:p>
+            <a:pPr algn="ctr"/>
+          </a:p>
+        </p:txBody>
+      </p:sp>
+      <p:sp>
+        <p:nvSpPr>
+          <p:cNvPr id="32" name="TextBox 31"/>
+          <p:cNvSpPr txBox="1"/>
+          <p:nvPr/>
+        </p:nvSpPr>
+        <p:spPr>
+          <a:xfrm>
+            <a:off x="6355080" y="4178808"/>
+            <a:ext cx="1234440" cy="1783080"/>
+          </a:xfrm>
+          <a:prstGeom prst="rect">
+            <a:avLst/>
+          </a:prstGeom>
+          <a:noFill/>
+        </p:spPr>
+        <p:txBody>
+          <a:bodyPr wrap="square" anchor="ctr" lIns="0" rIns="0" tIns="0" bIns="0">
+            <a:spAutoFit/>
+          </a:bodyPr>
+          <a:lstStyle/>
           <a:p>
             <a:pPr algn="ctr">
               <a:lnSpc>
@@ -5928,28 +6595,74 @@
               </a:spcAft>
             </a:pPr>
             <a:r>
-              <a:rPr sz="1500" b="1">
+              <a:rPr sz="3000" b="1">
                 <a:solidFill>
                   <a:srgbClr val="FFFFFF"/>
                 </a:solidFill>
                 <a:latin typeface="Microsoft YaHei"/>
                 <a:ea typeface="Microsoft YaHei"/>
               </a:rPr>
-              <a:t>推广</a:t>
-            </a:r>
-          </a:p>
-        </p:txBody>
-      </p:sp>
-      <p:sp>
-        <p:nvSpPr>
-          <p:cNvPr id="18" name="TextBox 17"/>
+              <a:t>04</a:t>
+            </a:r>
+          </a:p>
+        </p:txBody>
+      </p:sp>
+      <p:sp>
+        <p:nvSpPr>
+          <p:cNvPr id="33" name="TextBox 32"/>
           <p:cNvSpPr txBox="1"/>
           <p:nvPr/>
         </p:nvSpPr>
         <p:spPr>
           <a:xfrm>
-            <a:off x="4663440" y="2880360"/>
-            <a:ext cx="2926080" cy="1097280"/>
+            <a:off x="7909560" y="4434840"/>
+            <a:ext cx="3429000" cy="457200"/>
+          </a:xfrm>
+          <a:prstGeom prst="rect">
+            <a:avLst/>
+          </a:prstGeom>
+          <a:noFill/>
+        </p:spPr>
+        <p:txBody>
+          <a:bodyPr wrap="square" anchor="t" lIns="0" rIns="0" tIns="0" bIns="0">
+            <a:spAutoFit/>
+          </a:bodyPr>
+          <a:lstStyle/>
+          <a:p>
+            <a:pPr algn="l">
+              <a:lnSpc>
+                <a:spcPct val="100000"/>
+              </a:lnSpc>
+              <a:spcBef>
+                <a:spcPts val="0"/>
+              </a:spcBef>
+              <a:spcAft>
+                <a:spcPts val="400"/>
+              </a:spcAft>
+            </a:pPr>
+            <a:r>
+              <a:rPr sz="1700" b="1">
+                <a:solidFill>
+                  <a:srgbClr val="0B2A5B"/>
+                </a:solidFill>
+                <a:latin typeface="Microsoft YaHei"/>
+                <a:ea typeface="Microsoft YaHei"/>
+              </a:rPr>
+              <a:t>可复制推广</a:t>
+            </a:r>
+          </a:p>
+        </p:txBody>
+      </p:sp>
+      <p:sp>
+        <p:nvSpPr>
+          <p:cNvPr id="34" name="TextBox 33"/>
+          <p:cNvSpPr txBox="1"/>
+          <p:nvPr/>
+        </p:nvSpPr>
+        <p:spPr>
+          <a:xfrm>
+            <a:off x="7909560" y="4956048"/>
+            <a:ext cx="3383281" cy="914400"/>
           </a:xfrm>
           <a:prstGeom prst="rect">
             <a:avLst/>
@@ -5981,153 +6694,21 @@
                 <a:latin typeface="Microsoft YaHei"/>
                 <a:ea typeface="Microsoft YaHei"/>
               </a:rPr>
-              <a:t>总结试点成效，由联合会组织区内载体规模化申报与宣贯。</a:t>
-            </a:r>
-          </a:p>
-        </p:txBody>
-      </p:sp>
-      <p:sp>
-        <p:nvSpPr>
-          <p:cNvPr id="19" name="Chevron 18"/>
-          <p:cNvSpPr/>
-          <p:nvPr/>
-        </p:nvSpPr>
-        <p:spPr>
-          <a:xfrm>
-            <a:off x="7845552" y="2697480"/>
-            <a:ext cx="201168" cy="548640"/>
-          </a:xfrm>
-          <a:prstGeom prst="chevron">
-            <a:avLst/>
-          </a:prstGeom>
-          <a:solidFill>
-            <a:srgbClr val="F2A02D"/>
-          </a:solidFill>
-          <a:ln>
-            <a:noFill/>
-          </a:ln>
-          <a:effectLst/>
-        </p:spPr>
-        <p:style>
-          <a:lnRef idx="1">
-            <a:schemeClr val="accent1"/>
-          </a:lnRef>
-          <a:fillRef idx="3">
-            <a:schemeClr val="accent1"/>
-          </a:fillRef>
-          <a:effectRef idx="2">
-            <a:schemeClr val="accent1"/>
-          </a:effectRef>
-          <a:fontRef idx="minor">
-            <a:schemeClr val="lt1"/>
-          </a:fontRef>
-        </p:style>
-        <p:txBody>
-          <a:bodyPr rtlCol="0" anchor="ctr"/>
-          <a:lstStyle/>
-          <a:p>
-            <a:pPr algn="ctr"/>
-          </a:p>
-        </p:txBody>
-      </p:sp>
-      <p:sp>
-        <p:nvSpPr>
-          <p:cNvPr id="20" name="Rounded Rectangle 19"/>
-          <p:cNvSpPr/>
-          <p:nvPr/>
-        </p:nvSpPr>
-        <p:spPr>
-          <a:xfrm>
-            <a:off x="8001000" y="1828800"/>
-            <a:ext cx="3474720" cy="2286000"/>
-          </a:xfrm>
-          <a:prstGeom prst="roundRect">
-            <a:avLst/>
-          </a:prstGeom>
-          <a:solidFill>
-            <a:srgbClr val="EAF2FB"/>
-          </a:solidFill>
-          <a:ln>
-            <a:noFill/>
-          </a:ln>
-          <a:effectLst/>
-        </p:spPr>
-        <p:style>
-          <a:lnRef idx="1">
-            <a:schemeClr val="accent1"/>
-          </a:lnRef>
-          <a:fillRef idx="3">
-            <a:schemeClr val="accent1"/>
-          </a:fillRef>
-          <a:effectRef idx="2">
-            <a:schemeClr val="accent1"/>
-          </a:effectRef>
-          <a:fontRef idx="minor">
-            <a:schemeClr val="lt1"/>
-          </a:fontRef>
-        </p:style>
-        <p:txBody>
-          <a:bodyPr rtlCol="0" anchor="ctr"/>
-          <a:lstStyle/>
-          <a:p>
-            <a:pPr algn="ctr"/>
-          </a:p>
-        </p:txBody>
-      </p:sp>
-      <p:sp>
-        <p:nvSpPr>
-          <p:cNvPr id="21" name="Rounded Rectangle 20"/>
-          <p:cNvSpPr/>
-          <p:nvPr/>
-        </p:nvSpPr>
-        <p:spPr>
-          <a:xfrm>
-            <a:off x="8001000" y="1828800"/>
-            <a:ext cx="3474720" cy="868680"/>
-          </a:xfrm>
-          <a:prstGeom prst="roundRect">
-            <a:avLst/>
-          </a:prstGeom>
-          <a:solidFill>
-            <a:srgbClr val="F2A02D"/>
-          </a:solidFill>
-          <a:ln>
-            <a:noFill/>
-          </a:ln>
-          <a:effectLst/>
-        </p:spPr>
-        <p:style>
-          <a:lnRef idx="1">
-            <a:schemeClr val="accent1"/>
-          </a:lnRef>
-          <a:fillRef idx="3">
-            <a:schemeClr val="accent1"/>
-          </a:fillRef>
-          <a:effectRef idx="2">
-            <a:schemeClr val="accent1"/>
-          </a:effectRef>
-          <a:fontRef idx="minor">
-            <a:schemeClr val="lt1"/>
-          </a:fontRef>
-        </p:style>
-        <p:txBody>
-          <a:bodyPr rtlCol="0" anchor="ctr"/>
-          <a:lstStyle/>
-          <a:p>
-            <a:pPr algn="ctr"/>
-          </a:p>
-        </p:txBody>
-      </p:sp>
-      <p:sp>
-        <p:nvSpPr>
-          <p:cNvPr id="22" name="TextBox 21"/>
+              <a:t>一套打法复制到多楼宇、多园区乃至跨区域，边际成本递减。</a:t>
+            </a:r>
+          </a:p>
+        </p:txBody>
+      </p:sp>
+      <p:sp>
+        <p:nvSpPr>
+          <p:cNvPr id="35" name="TextBox 34"/>
           <p:cNvSpPr txBox="1"/>
           <p:nvPr/>
         </p:nvSpPr>
         <p:spPr>
           <a:xfrm>
-            <a:off x="8001000" y="1920240"/>
-            <a:ext cx="3474720" cy="731520"/>
+            <a:off x="731520" y="6144768"/>
+            <a:ext cx="10698480" cy="320040"/>
           </a:xfrm>
           <a:prstGeom prst="rect">
             <a:avLst/>
@@ -6152,311 +6733,14 @@
               </a:spcAft>
             </a:pPr>
             <a:r>
-              <a:rPr sz="1500" b="1">
-                <a:solidFill>
-                  <a:srgbClr val="FFFFFF"/>
-                </a:solidFill>
-                <a:latin typeface="Microsoft YaHei"/>
-                <a:ea typeface="Microsoft YaHei"/>
-              </a:rPr>
-              <a:t>第三阶段</a:t>
-            </a:r>
-          </a:p>
-          <a:p>
-            <a:pPr algn="ctr">
-              <a:lnSpc>
-                <a:spcPct val="100000"/>
-              </a:lnSpc>
-              <a:spcBef>
-                <a:spcPts val="0"/>
-              </a:spcBef>
-              <a:spcAft>
-                <a:spcPts val="400"/>
-              </a:spcAft>
-            </a:pPr>
-            <a:r>
-              <a:rPr sz="1500" b="1">
-                <a:solidFill>
-                  <a:srgbClr val="FFFFFF"/>
-                </a:solidFill>
-                <a:latin typeface="Microsoft YaHei"/>
-                <a:ea typeface="Microsoft YaHei"/>
-              </a:rPr>
-              <a:t>复制</a:t>
-            </a:r>
-          </a:p>
-        </p:txBody>
-      </p:sp>
-      <p:sp>
-        <p:nvSpPr>
-          <p:cNvPr id="23" name="TextBox 22"/>
-          <p:cNvSpPr txBox="1"/>
-          <p:nvPr/>
-        </p:nvSpPr>
-        <p:spPr>
-          <a:xfrm>
-            <a:off x="8275320" y="2880360"/>
-            <a:ext cx="2926080" cy="1097280"/>
-          </a:xfrm>
-          <a:prstGeom prst="rect">
-            <a:avLst/>
-          </a:prstGeom>
-          <a:noFill/>
-        </p:spPr>
-        <p:txBody>
-          <a:bodyPr wrap="square" anchor="t" lIns="0" rIns="0" tIns="0" bIns="0">
-            <a:spAutoFit/>
-          </a:bodyPr>
-          <a:lstStyle/>
-          <a:p>
-            <a:pPr algn="l">
-              <a:lnSpc>
-                <a:spcPct val="115000"/>
-              </a:lnSpc>
-              <a:spcBef>
-                <a:spcPts val="0"/>
-              </a:spcBef>
-              <a:spcAft>
-                <a:spcPts val="400"/>
-              </a:spcAft>
-            </a:pPr>
-            <a:r>
-              <a:rPr sz="1250" b="0">
-                <a:solidFill>
-                  <a:srgbClr val="1B2433"/>
-                </a:solidFill>
-                <a:latin typeface="Microsoft YaHei"/>
-                <a:ea typeface="Microsoft YaHei"/>
-              </a:rPr>
-              <a:t>形成标准化合作模板与政策研究报告，向全区乃至更大范围复制。</a:t>
-            </a:r>
-          </a:p>
-        </p:txBody>
-      </p:sp>
-      <p:sp>
-        <p:nvSpPr>
-          <p:cNvPr id="24" name="Rounded Rectangle 23"/>
-          <p:cNvSpPr/>
-          <p:nvPr/>
-        </p:nvSpPr>
-        <p:spPr>
-          <a:xfrm>
-            <a:off x="777240" y="4526280"/>
-            <a:ext cx="10652760" cy="1417320"/>
-          </a:xfrm>
-          <a:prstGeom prst="roundRect">
-            <a:avLst/>
-          </a:prstGeom>
-          <a:solidFill>
-            <a:srgbClr val="0B2A5B"/>
-          </a:solidFill>
-          <a:ln>
-            <a:noFill/>
-          </a:ln>
-          <a:effectLst/>
-        </p:spPr>
-        <p:style>
-          <a:lnRef idx="1">
-            <a:schemeClr val="accent1"/>
-          </a:lnRef>
-          <a:fillRef idx="3">
-            <a:schemeClr val="accent1"/>
-          </a:fillRef>
-          <a:effectRef idx="2">
-            <a:schemeClr val="accent1"/>
-          </a:effectRef>
-          <a:fontRef idx="minor">
-            <a:schemeClr val="lt1"/>
-          </a:fontRef>
-        </p:style>
-        <p:txBody>
-          <a:bodyPr rtlCol="0" anchor="ctr"/>
-          <a:lstStyle/>
-          <a:p>
-            <a:pPr algn="ctr"/>
-          </a:p>
-        </p:txBody>
-      </p:sp>
-      <p:sp>
-        <p:nvSpPr>
-          <p:cNvPr id="25" name="TextBox 24"/>
-          <p:cNvSpPr txBox="1"/>
-          <p:nvPr/>
-        </p:nvSpPr>
-        <p:spPr>
-          <a:xfrm>
-            <a:off x="1097280" y="4663440"/>
-            <a:ext cx="10058400" cy="457200"/>
-          </a:xfrm>
-          <a:prstGeom prst="rect">
-            <a:avLst/>
-          </a:prstGeom>
-          <a:noFill/>
-        </p:spPr>
-        <p:txBody>
-          <a:bodyPr wrap="square" anchor="t" lIns="0" rIns="0" tIns="0" bIns="0">
-            <a:spAutoFit/>
-          </a:bodyPr>
-          <a:lstStyle/>
-          <a:p>
-            <a:pPr algn="l">
-              <a:lnSpc>
-                <a:spcPct val="100000"/>
-              </a:lnSpc>
-              <a:spcBef>
-                <a:spcPts val="0"/>
-              </a:spcBef>
-              <a:spcAft>
-                <a:spcPts val="400"/>
-              </a:spcAft>
-            </a:pPr>
-            <a:r>
-              <a:rPr sz="1600" b="1">
-                <a:solidFill>
-                  <a:srgbClr val="00B4D8"/>
-                </a:solidFill>
-                <a:latin typeface="Microsoft YaHei"/>
-                <a:ea typeface="Microsoft YaHei"/>
-              </a:rPr>
-              <a:t>下一步行动</a:t>
-            </a:r>
-          </a:p>
-        </p:txBody>
-      </p:sp>
-      <p:sp>
-        <p:nvSpPr>
-          <p:cNvPr id="26" name="TextBox 25"/>
-          <p:cNvSpPr txBox="1"/>
-          <p:nvPr/>
-        </p:nvSpPr>
-        <p:spPr>
-          <a:xfrm>
-            <a:off x="1097280" y="5212080"/>
-            <a:ext cx="3383280" cy="640080"/>
-          </a:xfrm>
-          <a:prstGeom prst="rect">
-            <a:avLst/>
-          </a:prstGeom>
-          <a:noFill/>
-        </p:spPr>
-        <p:txBody>
-          <a:bodyPr wrap="square" anchor="t" lIns="0" rIns="0" tIns="0" bIns="0">
-            <a:spAutoFit/>
-          </a:bodyPr>
-          <a:lstStyle/>
-          <a:p>
-            <a:pPr algn="l">
-              <a:lnSpc>
-                <a:spcPct val="105000"/>
-              </a:lnSpc>
-              <a:spcBef>
-                <a:spcPts val="0"/>
-              </a:spcBef>
-              <a:spcAft>
-                <a:spcPts val="400"/>
-              </a:spcAft>
-            </a:pPr>
-            <a:r>
-              <a:rPr sz="1250" b="0">
-                <a:solidFill>
-                  <a:srgbClr val="FFFFFF"/>
-                </a:solidFill>
-                <a:latin typeface="Microsoft YaHei"/>
-                <a:ea typeface="Microsoft YaHei"/>
-              </a:rPr>
-              <a:t>① 三方明确分工与补贴池规模</a:t>
-            </a:r>
-          </a:p>
-        </p:txBody>
-      </p:sp>
-      <p:sp>
-        <p:nvSpPr>
-          <p:cNvPr id="27" name="TextBox 26"/>
-          <p:cNvSpPr txBox="1"/>
-          <p:nvPr/>
-        </p:nvSpPr>
-        <p:spPr>
-          <a:xfrm>
-            <a:off x="4572000" y="5212080"/>
-            <a:ext cx="3383280" cy="640080"/>
-          </a:xfrm>
-          <a:prstGeom prst="rect">
-            <a:avLst/>
-          </a:prstGeom>
-          <a:noFill/>
-        </p:spPr>
-        <p:txBody>
-          <a:bodyPr wrap="square" anchor="t" lIns="0" rIns="0" tIns="0" bIns="0">
-            <a:spAutoFit/>
-          </a:bodyPr>
-          <a:lstStyle/>
-          <a:p>
-            <a:pPr algn="l">
-              <a:lnSpc>
-                <a:spcPct val="105000"/>
-              </a:lnSpc>
-              <a:spcBef>
-                <a:spcPts val="0"/>
-              </a:spcBef>
-              <a:spcAft>
-                <a:spcPts val="400"/>
-              </a:spcAft>
-            </a:pPr>
-            <a:r>
-              <a:rPr sz="1250" b="0">
-                <a:solidFill>
-                  <a:srgbClr val="FFFFFF"/>
-                </a:solidFill>
-                <a:latin typeface="Microsoft YaHei"/>
-                <a:ea typeface="Microsoft YaHei"/>
-              </a:rPr>
-              <a:t>② 对接大厂确认算力补贴政策</a:t>
-            </a:r>
-          </a:p>
-        </p:txBody>
-      </p:sp>
-      <p:sp>
-        <p:nvSpPr>
-          <p:cNvPr id="28" name="TextBox 27"/>
-          <p:cNvSpPr txBox="1"/>
-          <p:nvPr/>
-        </p:nvSpPr>
-        <p:spPr>
-          <a:xfrm>
-            <a:off x="8046719" y="5212080"/>
-            <a:ext cx="3383280" cy="640080"/>
-          </a:xfrm>
-          <a:prstGeom prst="rect">
-            <a:avLst/>
-          </a:prstGeom>
-          <a:noFill/>
-        </p:spPr>
-        <p:txBody>
-          <a:bodyPr wrap="square" anchor="t" lIns="0" rIns="0" tIns="0" bIns="0">
-            <a:spAutoFit/>
-          </a:bodyPr>
-          <a:lstStyle/>
-          <a:p>
-            <a:pPr algn="l">
-              <a:lnSpc>
-                <a:spcPct val="105000"/>
-              </a:lnSpc>
-              <a:spcBef>
-                <a:spcPts val="0"/>
-              </a:spcBef>
-              <a:spcAft>
-                <a:spcPts val="400"/>
-              </a:spcAft>
-            </a:pPr>
-            <a:r>
-              <a:rPr sz="1250" b="0">
-                <a:solidFill>
-                  <a:srgbClr val="FFFFFF"/>
-                </a:solidFill>
-                <a:latin typeface="Microsoft YaHei"/>
-                <a:ea typeface="Microsoft YaHei"/>
-              </a:rPr>
-              <a:t>③ 确定首批试点载体与企业名单</a:t>
+              <a:rPr sz="1300" b="1">
+                <a:solidFill>
+                  <a:srgbClr val="0B2A5B"/>
+                </a:solidFill>
+                <a:latin typeface="Microsoft YaHei"/>
+                <a:ea typeface="Microsoft YaHei"/>
+              </a:rPr>
+              <a:t>开放接入 · 标准复制 · 平台运营 —— 形成可持续扩张的算力普惠生态</a:t>
             </a:r>
           </a:p>
         </p:txBody>
@@ -6493,6 +6777,1309 @@
           <a:prstGeom prst="rect">
             <a:avLst/>
           </a:prstGeom>
+          <a:solidFill>
+            <a:srgbClr val="FFFFFF"/>
+          </a:solidFill>
+          <a:ln>
+            <a:noFill/>
+          </a:ln>
+          <a:effectLst/>
+        </p:spPr>
+        <p:style>
+          <a:lnRef idx="1">
+            <a:schemeClr val="accent1"/>
+          </a:lnRef>
+          <a:fillRef idx="3">
+            <a:schemeClr val="accent1"/>
+          </a:fillRef>
+          <a:effectRef idx="2">
+            <a:schemeClr val="accent1"/>
+          </a:effectRef>
+          <a:fontRef idx="minor">
+            <a:schemeClr val="lt1"/>
+          </a:fontRef>
+        </p:style>
+        <p:txBody>
+          <a:bodyPr rtlCol="0" anchor="ctr"/>
+          <a:lstStyle/>
+          <a:p>
+            <a:pPr algn="ctr"/>
+          </a:p>
+        </p:txBody>
+      </p:sp>
+      <p:sp>
+        <p:nvSpPr>
+          <p:cNvPr id="3" name="Rectangle 2"/>
+          <p:cNvSpPr/>
+          <p:nvPr/>
+        </p:nvSpPr>
+        <p:spPr>
+          <a:xfrm>
+            <a:off x="0" y="0"/>
+            <a:ext cx="201168" cy="6858000"/>
+          </a:xfrm>
+          <a:prstGeom prst="rect">
+            <a:avLst/>
+          </a:prstGeom>
+          <a:solidFill>
+            <a:srgbClr val="125CC4"/>
+          </a:solidFill>
+          <a:ln>
+            <a:noFill/>
+          </a:ln>
+          <a:effectLst/>
+        </p:spPr>
+        <p:style>
+          <a:lnRef idx="1">
+            <a:schemeClr val="accent1"/>
+          </a:lnRef>
+          <a:fillRef idx="3">
+            <a:schemeClr val="accent1"/>
+          </a:fillRef>
+          <a:effectRef idx="2">
+            <a:schemeClr val="accent1"/>
+          </a:effectRef>
+          <a:fontRef idx="minor">
+            <a:schemeClr val="lt1"/>
+          </a:fontRef>
+        </p:style>
+        <p:txBody>
+          <a:bodyPr rtlCol="0" anchor="ctr"/>
+          <a:lstStyle/>
+          <a:p>
+            <a:pPr algn="ctr"/>
+          </a:p>
+        </p:txBody>
+      </p:sp>
+      <p:sp>
+        <p:nvSpPr>
+          <p:cNvPr id="4" name="Rectangle 3"/>
+          <p:cNvSpPr/>
+          <p:nvPr/>
+        </p:nvSpPr>
+        <p:spPr>
+          <a:xfrm>
+            <a:off x="201168" y="0"/>
+            <a:ext cx="73152" cy="6858000"/>
+          </a:xfrm>
+          <a:prstGeom prst="rect">
+            <a:avLst/>
+          </a:prstGeom>
+          <a:solidFill>
+            <a:srgbClr val="00B4D8"/>
+          </a:solidFill>
+          <a:ln>
+            <a:noFill/>
+          </a:ln>
+          <a:effectLst/>
+        </p:spPr>
+        <p:style>
+          <a:lnRef idx="1">
+            <a:schemeClr val="accent1"/>
+          </a:lnRef>
+          <a:fillRef idx="3">
+            <a:schemeClr val="accent1"/>
+          </a:fillRef>
+          <a:effectRef idx="2">
+            <a:schemeClr val="accent1"/>
+          </a:effectRef>
+          <a:fontRef idx="minor">
+            <a:schemeClr val="lt1"/>
+          </a:fontRef>
+        </p:style>
+        <p:txBody>
+          <a:bodyPr rtlCol="0" anchor="ctr"/>
+          <a:lstStyle/>
+          <a:p>
+            <a:pPr algn="ctr"/>
+          </a:p>
+        </p:txBody>
+      </p:sp>
+      <p:sp>
+        <p:nvSpPr>
+          <p:cNvPr id="5" name="TextBox 4"/>
+          <p:cNvSpPr txBox="1"/>
+          <p:nvPr/>
+        </p:nvSpPr>
+        <p:spPr>
+          <a:xfrm>
+            <a:off x="640080" y="411480"/>
+            <a:ext cx="10515600" cy="365760"/>
+          </a:xfrm>
+          <a:prstGeom prst="rect">
+            <a:avLst/>
+          </a:prstGeom>
+          <a:noFill/>
+        </p:spPr>
+        <p:txBody>
+          <a:bodyPr wrap="square" anchor="t" lIns="0" rIns="0" tIns="0" bIns="0">
+            <a:spAutoFit/>
+          </a:bodyPr>
+          <a:lstStyle/>
+          <a:p>
+            <a:pPr algn="l">
+              <a:lnSpc>
+                <a:spcPct val="100000"/>
+              </a:lnSpc>
+              <a:spcBef>
+                <a:spcPts val="0"/>
+              </a:spcBef>
+              <a:spcAft>
+                <a:spcPts val="400"/>
+              </a:spcAft>
+            </a:pPr>
+            <a:r>
+              <a:rPr sz="1300" b="1">
+                <a:solidFill>
+                  <a:srgbClr val="2E8BE6"/>
+                </a:solidFill>
+                <a:latin typeface="Microsoft YaHei"/>
+                <a:ea typeface="Microsoft YaHei"/>
+              </a:rPr>
+              <a:t>10  落地路径</a:t>
+            </a:r>
+          </a:p>
+        </p:txBody>
+      </p:sp>
+      <p:sp>
+        <p:nvSpPr>
+          <p:cNvPr id="6" name="TextBox 5"/>
+          <p:cNvSpPr txBox="1"/>
+          <p:nvPr/>
+        </p:nvSpPr>
+        <p:spPr>
+          <a:xfrm>
+            <a:off x="640080" y="713232"/>
+            <a:ext cx="10881360" cy="640080"/>
+          </a:xfrm>
+          <a:prstGeom prst="rect">
+            <a:avLst/>
+          </a:prstGeom>
+          <a:noFill/>
+        </p:spPr>
+        <p:txBody>
+          <a:bodyPr wrap="square" anchor="t" lIns="0" rIns="0" tIns="0" bIns="0">
+            <a:spAutoFit/>
+          </a:bodyPr>
+          <a:lstStyle/>
+          <a:p>
+            <a:pPr algn="l">
+              <a:lnSpc>
+                <a:spcPct val="100000"/>
+              </a:lnSpc>
+              <a:spcBef>
+                <a:spcPts val="0"/>
+              </a:spcBef>
+              <a:spcAft>
+                <a:spcPts val="400"/>
+              </a:spcAft>
+            </a:pPr>
+            <a:r>
+              <a:rPr sz="2700" b="1">
+                <a:solidFill>
+                  <a:srgbClr val="0B2A5B"/>
+                </a:solidFill>
+                <a:latin typeface="Microsoft YaHei"/>
+                <a:ea typeface="Microsoft YaHei"/>
+              </a:rPr>
+              <a:t>落地路径与下一步</a:t>
+            </a:r>
+          </a:p>
+        </p:txBody>
+      </p:sp>
+      <p:sp>
+        <p:nvSpPr>
+          <p:cNvPr id="7" name="Rectangle 6"/>
+          <p:cNvSpPr/>
+          <p:nvPr/>
+        </p:nvSpPr>
+        <p:spPr>
+          <a:xfrm>
+            <a:off x="658368" y="1371600"/>
+            <a:ext cx="1371600" cy="54864"/>
+          </a:xfrm>
+          <a:prstGeom prst="rect">
+            <a:avLst/>
+          </a:prstGeom>
+          <a:solidFill>
+            <a:srgbClr val="F2A02D"/>
+          </a:solidFill>
+          <a:ln>
+            <a:noFill/>
+          </a:ln>
+          <a:effectLst/>
+        </p:spPr>
+        <p:style>
+          <a:lnRef idx="1">
+            <a:schemeClr val="accent1"/>
+          </a:lnRef>
+          <a:fillRef idx="3">
+            <a:schemeClr val="accent1"/>
+          </a:fillRef>
+          <a:effectRef idx="2">
+            <a:schemeClr val="accent1"/>
+          </a:effectRef>
+          <a:fontRef idx="minor">
+            <a:schemeClr val="lt1"/>
+          </a:fontRef>
+        </p:style>
+        <p:txBody>
+          <a:bodyPr rtlCol="0" anchor="ctr"/>
+          <a:lstStyle/>
+          <a:p>
+            <a:pPr algn="ctr"/>
+          </a:p>
+        </p:txBody>
+      </p:sp>
+      <p:sp>
+        <p:nvSpPr>
+          <p:cNvPr id="8" name="TextBox 7"/>
+          <p:cNvSpPr txBox="1"/>
+          <p:nvPr/>
+        </p:nvSpPr>
+        <p:spPr>
+          <a:xfrm>
+            <a:off x="10881360" y="457200"/>
+            <a:ext cx="914400" cy="457200"/>
+          </a:xfrm>
+          <a:prstGeom prst="rect">
+            <a:avLst/>
+          </a:prstGeom>
+          <a:noFill/>
+        </p:spPr>
+        <p:txBody>
+          <a:bodyPr wrap="square" anchor="t" lIns="0" rIns="0" tIns="0" bIns="0">
+            <a:spAutoFit/>
+          </a:bodyPr>
+          <a:lstStyle/>
+          <a:p>
+            <a:pPr algn="r">
+              <a:lnSpc>
+                <a:spcPct val="100000"/>
+              </a:lnSpc>
+              <a:spcBef>
+                <a:spcPts val="0"/>
+              </a:spcBef>
+              <a:spcAft>
+                <a:spcPts val="400"/>
+              </a:spcAft>
+            </a:pPr>
+            <a:r>
+              <a:rPr sz="1200" b="0">
+                <a:solidFill>
+                  <a:srgbClr val="5A6472"/>
+                </a:solidFill>
+                <a:latin typeface="Microsoft YaHei"/>
+                <a:ea typeface="Microsoft YaHei"/>
+              </a:rPr>
+              <a:t>10 / 10</a:t>
+            </a:r>
+          </a:p>
+        </p:txBody>
+      </p:sp>
+      <p:sp>
+        <p:nvSpPr>
+          <p:cNvPr id="9" name="TextBox 8"/>
+          <p:cNvSpPr txBox="1"/>
+          <p:nvPr/>
+        </p:nvSpPr>
+        <p:spPr>
+          <a:xfrm>
+            <a:off x="640080" y="6419088"/>
+            <a:ext cx="8229600" cy="274320"/>
+          </a:xfrm>
+          <a:prstGeom prst="rect">
+            <a:avLst/>
+          </a:prstGeom>
+          <a:noFill/>
+        </p:spPr>
+        <p:txBody>
+          <a:bodyPr wrap="square" anchor="t" lIns="0" rIns="0" tIns="0" bIns="0">
+            <a:spAutoFit/>
+          </a:bodyPr>
+          <a:lstStyle/>
+          <a:p>
+            <a:pPr algn="l">
+              <a:lnSpc>
+                <a:spcPct val="100000"/>
+              </a:lnSpc>
+              <a:spcBef>
+                <a:spcPts val="0"/>
+              </a:spcBef>
+              <a:spcAft>
+                <a:spcPts val="400"/>
+              </a:spcAft>
+            </a:pPr>
+            <a:r>
+              <a:rPr sz="900" b="0">
+                <a:solidFill>
+                  <a:srgbClr val="5A6472"/>
+                </a:solidFill>
+                <a:latin typeface="Microsoft YaHei"/>
+                <a:ea typeface="Microsoft YaHei"/>
+              </a:rPr>
+              <a:t>源信网络 × 复旦大学住房政策研究中心 × 杨浦区科技企业联合会  |  算力补贴合作方案</a:t>
+            </a:r>
+          </a:p>
+        </p:txBody>
+      </p:sp>
+      <p:sp>
+        <p:nvSpPr>
+          <p:cNvPr id="10" name="Rounded Rectangle 9"/>
+          <p:cNvSpPr/>
+          <p:nvPr/>
+        </p:nvSpPr>
+        <p:spPr>
+          <a:xfrm>
+            <a:off x="777240" y="1828800"/>
+            <a:ext cx="3474720" cy="2286000"/>
+          </a:xfrm>
+          <a:prstGeom prst="roundRect">
+            <a:avLst/>
+          </a:prstGeom>
+          <a:solidFill>
+            <a:srgbClr val="EAF2FB"/>
+          </a:solidFill>
+          <a:ln>
+            <a:noFill/>
+          </a:ln>
+          <a:effectLst/>
+        </p:spPr>
+        <p:style>
+          <a:lnRef idx="1">
+            <a:schemeClr val="accent1"/>
+          </a:lnRef>
+          <a:fillRef idx="3">
+            <a:schemeClr val="accent1"/>
+          </a:fillRef>
+          <a:effectRef idx="2">
+            <a:schemeClr val="accent1"/>
+          </a:effectRef>
+          <a:fontRef idx="minor">
+            <a:schemeClr val="lt1"/>
+          </a:fontRef>
+        </p:style>
+        <p:txBody>
+          <a:bodyPr rtlCol="0" anchor="ctr"/>
+          <a:lstStyle/>
+          <a:p>
+            <a:pPr algn="ctr"/>
+          </a:p>
+        </p:txBody>
+      </p:sp>
+      <p:sp>
+        <p:nvSpPr>
+          <p:cNvPr id="11" name="Rounded Rectangle 10"/>
+          <p:cNvSpPr/>
+          <p:nvPr/>
+        </p:nvSpPr>
+        <p:spPr>
+          <a:xfrm>
+            <a:off x="777240" y="1828800"/>
+            <a:ext cx="3474720" cy="868680"/>
+          </a:xfrm>
+          <a:prstGeom prst="roundRect">
+            <a:avLst/>
+          </a:prstGeom>
+          <a:solidFill>
+            <a:srgbClr val="125CC4"/>
+          </a:solidFill>
+          <a:ln>
+            <a:noFill/>
+          </a:ln>
+          <a:effectLst/>
+        </p:spPr>
+        <p:style>
+          <a:lnRef idx="1">
+            <a:schemeClr val="accent1"/>
+          </a:lnRef>
+          <a:fillRef idx="3">
+            <a:schemeClr val="accent1"/>
+          </a:fillRef>
+          <a:effectRef idx="2">
+            <a:schemeClr val="accent1"/>
+          </a:effectRef>
+          <a:fontRef idx="minor">
+            <a:schemeClr val="lt1"/>
+          </a:fontRef>
+        </p:style>
+        <p:txBody>
+          <a:bodyPr rtlCol="0" anchor="ctr"/>
+          <a:lstStyle/>
+          <a:p>
+            <a:pPr algn="ctr"/>
+          </a:p>
+        </p:txBody>
+      </p:sp>
+      <p:sp>
+        <p:nvSpPr>
+          <p:cNvPr id="12" name="TextBox 11"/>
+          <p:cNvSpPr txBox="1"/>
+          <p:nvPr/>
+        </p:nvSpPr>
+        <p:spPr>
+          <a:xfrm>
+            <a:off x="777240" y="1920240"/>
+            <a:ext cx="3474720" cy="731520"/>
+          </a:xfrm>
+          <a:prstGeom prst="rect">
+            <a:avLst/>
+          </a:prstGeom>
+          <a:noFill/>
+        </p:spPr>
+        <p:txBody>
+          <a:bodyPr wrap="square" anchor="t" lIns="0" rIns="0" tIns="0" bIns="0">
+            <a:spAutoFit/>
+          </a:bodyPr>
+          <a:lstStyle/>
+          <a:p>
+            <a:pPr algn="ctr">
+              <a:lnSpc>
+                <a:spcPct val="100000"/>
+              </a:lnSpc>
+              <a:spcBef>
+                <a:spcPts val="0"/>
+              </a:spcBef>
+              <a:spcAft>
+                <a:spcPts val="400"/>
+              </a:spcAft>
+            </a:pPr>
+            <a:r>
+              <a:rPr sz="1500" b="1">
+                <a:solidFill>
+                  <a:srgbClr val="FFFFFF"/>
+                </a:solidFill>
+                <a:latin typeface="Microsoft YaHei"/>
+                <a:ea typeface="Microsoft YaHei"/>
+              </a:rPr>
+              <a:t>第一阶段</a:t>
+            </a:r>
+          </a:p>
+          <a:p>
+            <a:pPr algn="ctr">
+              <a:lnSpc>
+                <a:spcPct val="100000"/>
+              </a:lnSpc>
+              <a:spcBef>
+                <a:spcPts val="0"/>
+              </a:spcBef>
+              <a:spcAft>
+                <a:spcPts val="400"/>
+              </a:spcAft>
+            </a:pPr>
+            <a:r>
+              <a:rPr sz="1500" b="1">
+                <a:solidFill>
+                  <a:srgbClr val="FFFFFF"/>
+                </a:solidFill>
+                <a:latin typeface="Microsoft YaHei"/>
+                <a:ea typeface="Microsoft YaHei"/>
+              </a:rPr>
+              <a:t>试点</a:t>
+            </a:r>
+          </a:p>
+        </p:txBody>
+      </p:sp>
+      <p:sp>
+        <p:nvSpPr>
+          <p:cNvPr id="13" name="TextBox 12"/>
+          <p:cNvSpPr txBox="1"/>
+          <p:nvPr/>
+        </p:nvSpPr>
+        <p:spPr>
+          <a:xfrm>
+            <a:off x="1051560" y="2880360"/>
+            <a:ext cx="2926080" cy="1097280"/>
+          </a:xfrm>
+          <a:prstGeom prst="rect">
+            <a:avLst/>
+          </a:prstGeom>
+          <a:noFill/>
+        </p:spPr>
+        <p:txBody>
+          <a:bodyPr wrap="square" anchor="t" lIns="0" rIns="0" tIns="0" bIns="0">
+            <a:spAutoFit/>
+          </a:bodyPr>
+          <a:lstStyle/>
+          <a:p>
+            <a:pPr algn="l">
+              <a:lnSpc>
+                <a:spcPct val="115000"/>
+              </a:lnSpc>
+              <a:spcBef>
+                <a:spcPts val="0"/>
+              </a:spcBef>
+              <a:spcAft>
+                <a:spcPts val="400"/>
+              </a:spcAft>
+            </a:pPr>
+            <a:r>
+              <a:rPr sz="1250" b="0">
+                <a:solidFill>
+                  <a:srgbClr val="1B2433"/>
+                </a:solidFill>
+                <a:latin typeface="Microsoft YaHei"/>
+                <a:ea typeface="Microsoft YaHei"/>
+              </a:rPr>
+              <a:t>选取 1–2 个标杆楼宇 / 园区，确定补贴池与白名单，落地首批企业。</a:t>
+            </a:r>
+          </a:p>
+        </p:txBody>
+      </p:sp>
+      <p:sp>
+        <p:nvSpPr>
+          <p:cNvPr id="14" name="Chevron 13"/>
+          <p:cNvSpPr/>
+          <p:nvPr/>
+        </p:nvSpPr>
+        <p:spPr>
+          <a:xfrm>
+            <a:off x="4233672" y="2697480"/>
+            <a:ext cx="201168" cy="548640"/>
+          </a:xfrm>
+          <a:prstGeom prst="chevron">
+            <a:avLst/>
+          </a:prstGeom>
+          <a:solidFill>
+            <a:srgbClr val="F2A02D"/>
+          </a:solidFill>
+          <a:ln>
+            <a:noFill/>
+          </a:ln>
+          <a:effectLst/>
+        </p:spPr>
+        <p:style>
+          <a:lnRef idx="1">
+            <a:schemeClr val="accent1"/>
+          </a:lnRef>
+          <a:fillRef idx="3">
+            <a:schemeClr val="accent1"/>
+          </a:fillRef>
+          <a:effectRef idx="2">
+            <a:schemeClr val="accent1"/>
+          </a:effectRef>
+          <a:fontRef idx="minor">
+            <a:schemeClr val="lt1"/>
+          </a:fontRef>
+        </p:style>
+        <p:txBody>
+          <a:bodyPr rtlCol="0" anchor="ctr"/>
+          <a:lstStyle/>
+          <a:p>
+            <a:pPr algn="ctr"/>
+          </a:p>
+        </p:txBody>
+      </p:sp>
+      <p:sp>
+        <p:nvSpPr>
+          <p:cNvPr id="15" name="Rounded Rectangle 14"/>
+          <p:cNvSpPr/>
+          <p:nvPr/>
+        </p:nvSpPr>
+        <p:spPr>
+          <a:xfrm>
+            <a:off x="4389120" y="1828800"/>
+            <a:ext cx="3474720" cy="2286000"/>
+          </a:xfrm>
+          <a:prstGeom prst="roundRect">
+            <a:avLst/>
+          </a:prstGeom>
+          <a:solidFill>
+            <a:srgbClr val="EAF2FB"/>
+          </a:solidFill>
+          <a:ln>
+            <a:noFill/>
+          </a:ln>
+          <a:effectLst/>
+        </p:spPr>
+        <p:style>
+          <a:lnRef idx="1">
+            <a:schemeClr val="accent1"/>
+          </a:lnRef>
+          <a:fillRef idx="3">
+            <a:schemeClr val="accent1"/>
+          </a:fillRef>
+          <a:effectRef idx="2">
+            <a:schemeClr val="accent1"/>
+          </a:effectRef>
+          <a:fontRef idx="minor">
+            <a:schemeClr val="lt1"/>
+          </a:fontRef>
+        </p:style>
+        <p:txBody>
+          <a:bodyPr rtlCol="0" anchor="ctr"/>
+          <a:lstStyle/>
+          <a:p>
+            <a:pPr algn="ctr"/>
+          </a:p>
+        </p:txBody>
+      </p:sp>
+      <p:sp>
+        <p:nvSpPr>
+          <p:cNvPr id="16" name="Rounded Rectangle 15"/>
+          <p:cNvSpPr/>
+          <p:nvPr/>
+        </p:nvSpPr>
+        <p:spPr>
+          <a:xfrm>
+            <a:off x="4389120" y="1828800"/>
+            <a:ext cx="3474720" cy="868680"/>
+          </a:xfrm>
+          <a:prstGeom prst="roundRect">
+            <a:avLst/>
+          </a:prstGeom>
+          <a:solidFill>
+            <a:srgbClr val="00B4D8"/>
+          </a:solidFill>
+          <a:ln>
+            <a:noFill/>
+          </a:ln>
+          <a:effectLst/>
+        </p:spPr>
+        <p:style>
+          <a:lnRef idx="1">
+            <a:schemeClr val="accent1"/>
+          </a:lnRef>
+          <a:fillRef idx="3">
+            <a:schemeClr val="accent1"/>
+          </a:fillRef>
+          <a:effectRef idx="2">
+            <a:schemeClr val="accent1"/>
+          </a:effectRef>
+          <a:fontRef idx="minor">
+            <a:schemeClr val="lt1"/>
+          </a:fontRef>
+        </p:style>
+        <p:txBody>
+          <a:bodyPr rtlCol="0" anchor="ctr"/>
+          <a:lstStyle/>
+          <a:p>
+            <a:pPr algn="ctr"/>
+          </a:p>
+        </p:txBody>
+      </p:sp>
+      <p:sp>
+        <p:nvSpPr>
+          <p:cNvPr id="17" name="TextBox 16"/>
+          <p:cNvSpPr txBox="1"/>
+          <p:nvPr/>
+        </p:nvSpPr>
+        <p:spPr>
+          <a:xfrm>
+            <a:off x="4389120" y="1920240"/>
+            <a:ext cx="3474720" cy="731520"/>
+          </a:xfrm>
+          <a:prstGeom prst="rect">
+            <a:avLst/>
+          </a:prstGeom>
+          <a:noFill/>
+        </p:spPr>
+        <p:txBody>
+          <a:bodyPr wrap="square" anchor="t" lIns="0" rIns="0" tIns="0" bIns="0">
+            <a:spAutoFit/>
+          </a:bodyPr>
+          <a:lstStyle/>
+          <a:p>
+            <a:pPr algn="ctr">
+              <a:lnSpc>
+                <a:spcPct val="100000"/>
+              </a:lnSpc>
+              <a:spcBef>
+                <a:spcPts val="0"/>
+              </a:spcBef>
+              <a:spcAft>
+                <a:spcPts val="400"/>
+              </a:spcAft>
+            </a:pPr>
+            <a:r>
+              <a:rPr sz="1500" b="1">
+                <a:solidFill>
+                  <a:srgbClr val="FFFFFF"/>
+                </a:solidFill>
+                <a:latin typeface="Microsoft YaHei"/>
+                <a:ea typeface="Microsoft YaHei"/>
+              </a:rPr>
+              <a:t>第二阶段</a:t>
+            </a:r>
+          </a:p>
+          <a:p>
+            <a:pPr algn="ctr">
+              <a:lnSpc>
+                <a:spcPct val="100000"/>
+              </a:lnSpc>
+              <a:spcBef>
+                <a:spcPts val="0"/>
+              </a:spcBef>
+              <a:spcAft>
+                <a:spcPts val="400"/>
+              </a:spcAft>
+            </a:pPr>
+            <a:r>
+              <a:rPr sz="1500" b="1">
+                <a:solidFill>
+                  <a:srgbClr val="FFFFFF"/>
+                </a:solidFill>
+                <a:latin typeface="Microsoft YaHei"/>
+                <a:ea typeface="Microsoft YaHei"/>
+              </a:rPr>
+              <a:t>推广</a:t>
+            </a:r>
+          </a:p>
+        </p:txBody>
+      </p:sp>
+      <p:sp>
+        <p:nvSpPr>
+          <p:cNvPr id="18" name="TextBox 17"/>
+          <p:cNvSpPr txBox="1"/>
+          <p:nvPr/>
+        </p:nvSpPr>
+        <p:spPr>
+          <a:xfrm>
+            <a:off x="4663440" y="2880360"/>
+            <a:ext cx="2926080" cy="1097280"/>
+          </a:xfrm>
+          <a:prstGeom prst="rect">
+            <a:avLst/>
+          </a:prstGeom>
+          <a:noFill/>
+        </p:spPr>
+        <p:txBody>
+          <a:bodyPr wrap="square" anchor="t" lIns="0" rIns="0" tIns="0" bIns="0">
+            <a:spAutoFit/>
+          </a:bodyPr>
+          <a:lstStyle/>
+          <a:p>
+            <a:pPr algn="l">
+              <a:lnSpc>
+                <a:spcPct val="115000"/>
+              </a:lnSpc>
+              <a:spcBef>
+                <a:spcPts val="0"/>
+              </a:spcBef>
+              <a:spcAft>
+                <a:spcPts val="400"/>
+              </a:spcAft>
+            </a:pPr>
+            <a:r>
+              <a:rPr sz="1250" b="0">
+                <a:solidFill>
+                  <a:srgbClr val="1B2433"/>
+                </a:solidFill>
+                <a:latin typeface="Microsoft YaHei"/>
+                <a:ea typeface="Microsoft YaHei"/>
+              </a:rPr>
+              <a:t>总结试点成效，由联合会组织区内载体规模化申报与宣贯。</a:t>
+            </a:r>
+          </a:p>
+        </p:txBody>
+      </p:sp>
+      <p:sp>
+        <p:nvSpPr>
+          <p:cNvPr id="19" name="Chevron 18"/>
+          <p:cNvSpPr/>
+          <p:nvPr/>
+        </p:nvSpPr>
+        <p:spPr>
+          <a:xfrm>
+            <a:off x="7845552" y="2697480"/>
+            <a:ext cx="201168" cy="548640"/>
+          </a:xfrm>
+          <a:prstGeom prst="chevron">
+            <a:avLst/>
+          </a:prstGeom>
+          <a:solidFill>
+            <a:srgbClr val="F2A02D"/>
+          </a:solidFill>
+          <a:ln>
+            <a:noFill/>
+          </a:ln>
+          <a:effectLst/>
+        </p:spPr>
+        <p:style>
+          <a:lnRef idx="1">
+            <a:schemeClr val="accent1"/>
+          </a:lnRef>
+          <a:fillRef idx="3">
+            <a:schemeClr val="accent1"/>
+          </a:fillRef>
+          <a:effectRef idx="2">
+            <a:schemeClr val="accent1"/>
+          </a:effectRef>
+          <a:fontRef idx="minor">
+            <a:schemeClr val="lt1"/>
+          </a:fontRef>
+        </p:style>
+        <p:txBody>
+          <a:bodyPr rtlCol="0" anchor="ctr"/>
+          <a:lstStyle/>
+          <a:p>
+            <a:pPr algn="ctr"/>
+          </a:p>
+        </p:txBody>
+      </p:sp>
+      <p:sp>
+        <p:nvSpPr>
+          <p:cNvPr id="20" name="Rounded Rectangle 19"/>
+          <p:cNvSpPr/>
+          <p:nvPr/>
+        </p:nvSpPr>
+        <p:spPr>
+          <a:xfrm>
+            <a:off x="8001000" y="1828800"/>
+            <a:ext cx="3474720" cy="2286000"/>
+          </a:xfrm>
+          <a:prstGeom prst="roundRect">
+            <a:avLst/>
+          </a:prstGeom>
+          <a:solidFill>
+            <a:srgbClr val="EAF2FB"/>
+          </a:solidFill>
+          <a:ln>
+            <a:noFill/>
+          </a:ln>
+          <a:effectLst/>
+        </p:spPr>
+        <p:style>
+          <a:lnRef idx="1">
+            <a:schemeClr val="accent1"/>
+          </a:lnRef>
+          <a:fillRef idx="3">
+            <a:schemeClr val="accent1"/>
+          </a:fillRef>
+          <a:effectRef idx="2">
+            <a:schemeClr val="accent1"/>
+          </a:effectRef>
+          <a:fontRef idx="minor">
+            <a:schemeClr val="lt1"/>
+          </a:fontRef>
+        </p:style>
+        <p:txBody>
+          <a:bodyPr rtlCol="0" anchor="ctr"/>
+          <a:lstStyle/>
+          <a:p>
+            <a:pPr algn="ctr"/>
+          </a:p>
+        </p:txBody>
+      </p:sp>
+      <p:sp>
+        <p:nvSpPr>
+          <p:cNvPr id="21" name="Rounded Rectangle 20"/>
+          <p:cNvSpPr/>
+          <p:nvPr/>
+        </p:nvSpPr>
+        <p:spPr>
+          <a:xfrm>
+            <a:off x="8001000" y="1828800"/>
+            <a:ext cx="3474720" cy="868680"/>
+          </a:xfrm>
+          <a:prstGeom prst="roundRect">
+            <a:avLst/>
+          </a:prstGeom>
+          <a:solidFill>
+            <a:srgbClr val="F2A02D"/>
+          </a:solidFill>
+          <a:ln>
+            <a:noFill/>
+          </a:ln>
+          <a:effectLst/>
+        </p:spPr>
+        <p:style>
+          <a:lnRef idx="1">
+            <a:schemeClr val="accent1"/>
+          </a:lnRef>
+          <a:fillRef idx="3">
+            <a:schemeClr val="accent1"/>
+          </a:fillRef>
+          <a:effectRef idx="2">
+            <a:schemeClr val="accent1"/>
+          </a:effectRef>
+          <a:fontRef idx="minor">
+            <a:schemeClr val="lt1"/>
+          </a:fontRef>
+        </p:style>
+        <p:txBody>
+          <a:bodyPr rtlCol="0" anchor="ctr"/>
+          <a:lstStyle/>
+          <a:p>
+            <a:pPr algn="ctr"/>
+          </a:p>
+        </p:txBody>
+      </p:sp>
+      <p:sp>
+        <p:nvSpPr>
+          <p:cNvPr id="22" name="TextBox 21"/>
+          <p:cNvSpPr txBox="1"/>
+          <p:nvPr/>
+        </p:nvSpPr>
+        <p:spPr>
+          <a:xfrm>
+            <a:off x="8001000" y="1920240"/>
+            <a:ext cx="3474720" cy="731520"/>
+          </a:xfrm>
+          <a:prstGeom prst="rect">
+            <a:avLst/>
+          </a:prstGeom>
+          <a:noFill/>
+        </p:spPr>
+        <p:txBody>
+          <a:bodyPr wrap="square" anchor="t" lIns="0" rIns="0" tIns="0" bIns="0">
+            <a:spAutoFit/>
+          </a:bodyPr>
+          <a:lstStyle/>
+          <a:p>
+            <a:pPr algn="ctr">
+              <a:lnSpc>
+                <a:spcPct val="100000"/>
+              </a:lnSpc>
+              <a:spcBef>
+                <a:spcPts val="0"/>
+              </a:spcBef>
+              <a:spcAft>
+                <a:spcPts val="400"/>
+              </a:spcAft>
+            </a:pPr>
+            <a:r>
+              <a:rPr sz="1500" b="1">
+                <a:solidFill>
+                  <a:srgbClr val="FFFFFF"/>
+                </a:solidFill>
+                <a:latin typeface="Microsoft YaHei"/>
+                <a:ea typeface="Microsoft YaHei"/>
+              </a:rPr>
+              <a:t>第三阶段</a:t>
+            </a:r>
+          </a:p>
+          <a:p>
+            <a:pPr algn="ctr">
+              <a:lnSpc>
+                <a:spcPct val="100000"/>
+              </a:lnSpc>
+              <a:spcBef>
+                <a:spcPts val="0"/>
+              </a:spcBef>
+              <a:spcAft>
+                <a:spcPts val="400"/>
+              </a:spcAft>
+            </a:pPr>
+            <a:r>
+              <a:rPr sz="1500" b="1">
+                <a:solidFill>
+                  <a:srgbClr val="FFFFFF"/>
+                </a:solidFill>
+                <a:latin typeface="Microsoft YaHei"/>
+                <a:ea typeface="Microsoft YaHei"/>
+              </a:rPr>
+              <a:t>复制</a:t>
+            </a:r>
+          </a:p>
+        </p:txBody>
+      </p:sp>
+      <p:sp>
+        <p:nvSpPr>
+          <p:cNvPr id="23" name="TextBox 22"/>
+          <p:cNvSpPr txBox="1"/>
+          <p:nvPr/>
+        </p:nvSpPr>
+        <p:spPr>
+          <a:xfrm>
+            <a:off x="8275320" y="2880360"/>
+            <a:ext cx="2926080" cy="1097280"/>
+          </a:xfrm>
+          <a:prstGeom prst="rect">
+            <a:avLst/>
+          </a:prstGeom>
+          <a:noFill/>
+        </p:spPr>
+        <p:txBody>
+          <a:bodyPr wrap="square" anchor="t" lIns="0" rIns="0" tIns="0" bIns="0">
+            <a:spAutoFit/>
+          </a:bodyPr>
+          <a:lstStyle/>
+          <a:p>
+            <a:pPr algn="l">
+              <a:lnSpc>
+                <a:spcPct val="115000"/>
+              </a:lnSpc>
+              <a:spcBef>
+                <a:spcPts val="0"/>
+              </a:spcBef>
+              <a:spcAft>
+                <a:spcPts val="400"/>
+              </a:spcAft>
+            </a:pPr>
+            <a:r>
+              <a:rPr sz="1250" b="0">
+                <a:solidFill>
+                  <a:srgbClr val="1B2433"/>
+                </a:solidFill>
+                <a:latin typeface="Microsoft YaHei"/>
+                <a:ea typeface="Microsoft YaHei"/>
+              </a:rPr>
+              <a:t>形成标准化合作模板与政策研究报告，向全区乃至更大范围复制。</a:t>
+            </a:r>
+          </a:p>
+        </p:txBody>
+      </p:sp>
+      <p:sp>
+        <p:nvSpPr>
+          <p:cNvPr id="24" name="Rounded Rectangle 23"/>
+          <p:cNvSpPr/>
+          <p:nvPr/>
+        </p:nvSpPr>
+        <p:spPr>
+          <a:xfrm>
+            <a:off x="777240" y="4526280"/>
+            <a:ext cx="10652760" cy="1417320"/>
+          </a:xfrm>
+          <a:prstGeom prst="roundRect">
+            <a:avLst/>
+          </a:prstGeom>
+          <a:solidFill>
+            <a:srgbClr val="0B2A5B"/>
+          </a:solidFill>
+          <a:ln>
+            <a:noFill/>
+          </a:ln>
+          <a:effectLst/>
+        </p:spPr>
+        <p:style>
+          <a:lnRef idx="1">
+            <a:schemeClr val="accent1"/>
+          </a:lnRef>
+          <a:fillRef idx="3">
+            <a:schemeClr val="accent1"/>
+          </a:fillRef>
+          <a:effectRef idx="2">
+            <a:schemeClr val="accent1"/>
+          </a:effectRef>
+          <a:fontRef idx="minor">
+            <a:schemeClr val="lt1"/>
+          </a:fontRef>
+        </p:style>
+        <p:txBody>
+          <a:bodyPr rtlCol="0" anchor="ctr"/>
+          <a:lstStyle/>
+          <a:p>
+            <a:pPr algn="ctr"/>
+          </a:p>
+        </p:txBody>
+      </p:sp>
+      <p:sp>
+        <p:nvSpPr>
+          <p:cNvPr id="25" name="TextBox 24"/>
+          <p:cNvSpPr txBox="1"/>
+          <p:nvPr/>
+        </p:nvSpPr>
+        <p:spPr>
+          <a:xfrm>
+            <a:off x="1097280" y="4663440"/>
+            <a:ext cx="10058400" cy="457200"/>
+          </a:xfrm>
+          <a:prstGeom prst="rect">
+            <a:avLst/>
+          </a:prstGeom>
+          <a:noFill/>
+        </p:spPr>
+        <p:txBody>
+          <a:bodyPr wrap="square" anchor="t" lIns="0" rIns="0" tIns="0" bIns="0">
+            <a:spAutoFit/>
+          </a:bodyPr>
+          <a:lstStyle/>
+          <a:p>
+            <a:pPr algn="l">
+              <a:lnSpc>
+                <a:spcPct val="100000"/>
+              </a:lnSpc>
+              <a:spcBef>
+                <a:spcPts val="0"/>
+              </a:spcBef>
+              <a:spcAft>
+                <a:spcPts val="400"/>
+              </a:spcAft>
+            </a:pPr>
+            <a:r>
+              <a:rPr sz="1600" b="1">
+                <a:solidFill>
+                  <a:srgbClr val="00B4D8"/>
+                </a:solidFill>
+                <a:latin typeface="Microsoft YaHei"/>
+                <a:ea typeface="Microsoft YaHei"/>
+              </a:rPr>
+              <a:t>下一步行动</a:t>
+            </a:r>
+          </a:p>
+        </p:txBody>
+      </p:sp>
+      <p:sp>
+        <p:nvSpPr>
+          <p:cNvPr id="26" name="TextBox 25"/>
+          <p:cNvSpPr txBox="1"/>
+          <p:nvPr/>
+        </p:nvSpPr>
+        <p:spPr>
+          <a:xfrm>
+            <a:off x="1097280" y="5212080"/>
+            <a:ext cx="3383280" cy="640080"/>
+          </a:xfrm>
+          <a:prstGeom prst="rect">
+            <a:avLst/>
+          </a:prstGeom>
+          <a:noFill/>
+        </p:spPr>
+        <p:txBody>
+          <a:bodyPr wrap="square" anchor="t" lIns="0" rIns="0" tIns="0" bIns="0">
+            <a:spAutoFit/>
+          </a:bodyPr>
+          <a:lstStyle/>
+          <a:p>
+            <a:pPr algn="l">
+              <a:lnSpc>
+                <a:spcPct val="105000"/>
+              </a:lnSpc>
+              <a:spcBef>
+                <a:spcPts val="0"/>
+              </a:spcBef>
+              <a:spcAft>
+                <a:spcPts val="400"/>
+              </a:spcAft>
+            </a:pPr>
+            <a:r>
+              <a:rPr sz="1250" b="0">
+                <a:solidFill>
+                  <a:srgbClr val="FFFFFF"/>
+                </a:solidFill>
+                <a:latin typeface="Microsoft YaHei"/>
+                <a:ea typeface="Microsoft YaHei"/>
+              </a:rPr>
+              <a:t>① 三方明确分工与补贴池规模</a:t>
+            </a:r>
+          </a:p>
+        </p:txBody>
+      </p:sp>
+      <p:sp>
+        <p:nvSpPr>
+          <p:cNvPr id="27" name="TextBox 26"/>
+          <p:cNvSpPr txBox="1"/>
+          <p:nvPr/>
+        </p:nvSpPr>
+        <p:spPr>
+          <a:xfrm>
+            <a:off x="4572000" y="5212080"/>
+            <a:ext cx="3383280" cy="640080"/>
+          </a:xfrm>
+          <a:prstGeom prst="rect">
+            <a:avLst/>
+          </a:prstGeom>
+          <a:noFill/>
+        </p:spPr>
+        <p:txBody>
+          <a:bodyPr wrap="square" anchor="t" lIns="0" rIns="0" tIns="0" bIns="0">
+            <a:spAutoFit/>
+          </a:bodyPr>
+          <a:lstStyle/>
+          <a:p>
+            <a:pPr algn="l">
+              <a:lnSpc>
+                <a:spcPct val="105000"/>
+              </a:lnSpc>
+              <a:spcBef>
+                <a:spcPts val="0"/>
+              </a:spcBef>
+              <a:spcAft>
+                <a:spcPts val="400"/>
+              </a:spcAft>
+            </a:pPr>
+            <a:r>
+              <a:rPr sz="1250" b="0">
+                <a:solidFill>
+                  <a:srgbClr val="FFFFFF"/>
+                </a:solidFill>
+                <a:latin typeface="Microsoft YaHei"/>
+                <a:ea typeface="Microsoft YaHei"/>
+              </a:rPr>
+              <a:t>② 对接大厂确认算力补贴政策</a:t>
+            </a:r>
+          </a:p>
+        </p:txBody>
+      </p:sp>
+      <p:sp>
+        <p:nvSpPr>
+          <p:cNvPr id="28" name="TextBox 27"/>
+          <p:cNvSpPr txBox="1"/>
+          <p:nvPr/>
+        </p:nvSpPr>
+        <p:spPr>
+          <a:xfrm>
+            <a:off x="8046719" y="5212080"/>
+            <a:ext cx="3383280" cy="640080"/>
+          </a:xfrm>
+          <a:prstGeom prst="rect">
+            <a:avLst/>
+          </a:prstGeom>
+          <a:noFill/>
+        </p:spPr>
+        <p:txBody>
+          <a:bodyPr wrap="square" anchor="t" lIns="0" rIns="0" tIns="0" bIns="0">
+            <a:spAutoFit/>
+          </a:bodyPr>
+          <a:lstStyle/>
+          <a:p>
+            <a:pPr algn="l">
+              <a:lnSpc>
+                <a:spcPct val="105000"/>
+              </a:lnSpc>
+              <a:spcBef>
+                <a:spcPts val="0"/>
+              </a:spcBef>
+              <a:spcAft>
+                <a:spcPts val="400"/>
+              </a:spcAft>
+            </a:pPr>
+            <a:r>
+              <a:rPr sz="1250" b="0">
+                <a:solidFill>
+                  <a:srgbClr val="FFFFFF"/>
+                </a:solidFill>
+                <a:latin typeface="Microsoft YaHei"/>
+                <a:ea typeface="Microsoft YaHei"/>
+              </a:rPr>
+              <a:t>③ 确定首批试点载体与企业名单</a:t>
+            </a:r>
+          </a:p>
+        </p:txBody>
+      </p:sp>
+    </p:spTree>
+  </p:cSld>
+  <p:clrMapOvr>
+    <a:masterClrMapping/>
+  </p:clrMapOvr>
+</p:sld>
+</file>
+
+<file path=ppt/slides/slide13.xml><?xml version="1.0" encoding="utf-8"?>
+<p:sld xmlns:a="http://schemas.openxmlformats.org/drawingml/2006/main" xmlns:p="http://schemas.openxmlformats.org/presentationml/2006/main" xmlns:r="http://schemas.openxmlformats.org/officeDocument/2006/relationships">
+  <p:cSld>
+    <p:spTree>
+      <p:nvGrpSpPr>
+        <p:cNvPr id="1" name=""/>
+        <p:cNvGrpSpPr/>
+        <p:nvPr/>
+      </p:nvGrpSpPr>
+      <p:grpSpPr/>
+      <p:sp>
+        <p:nvSpPr>
+          <p:cNvPr id="2" name="Rectangle 1"/>
+          <p:cNvSpPr/>
+          <p:nvPr/>
+        </p:nvSpPr>
+        <p:spPr>
+          <a:xfrm>
+            <a:off x="0" y="0"/>
+            <a:ext cx="12191695" cy="6858000"/>
+          </a:xfrm>
+          <a:prstGeom prst="rect">
+            <a:avLst/>
+          </a:prstGeom>
           <a:gradFill rotWithShape="1">
             <a:gsLst>
               <a:gs pos="0">
@@ -8692,7 +10279,7 @@
                 <a:latin typeface="Microsoft YaHei"/>
                 <a:ea typeface="Microsoft YaHei"/>
               </a:rPr>
-              <a:t>三方共赢价值</a:t>
+              <a:t>火山引擎园区独立政策</a:t>
             </a:r>
           </a:p>
         </p:txBody>
@@ -8738,7 +10325,7 @@
                 <a:latin typeface="Microsoft YaHei"/>
                 <a:ea typeface="Microsoft YaHei"/>
               </a:rPr>
-              <a:t>各方收益与协同效应</a:t>
+              <a:t>半年费用免费 + 大客户额外折扣</a:t>
             </a:r>
           </a:p>
         </p:txBody>
@@ -8918,7 +10505,7 @@
                 <a:latin typeface="Microsoft YaHei"/>
                 <a:ea typeface="Microsoft YaHei"/>
               </a:rPr>
-              <a:t>开放式可复制模式</a:t>
+              <a:t>三方共赢价值</a:t>
             </a:r>
           </a:p>
         </p:txBody>
@@ -8964,7 +10551,7 @@
                 <a:latin typeface="Microsoft YaHei"/>
                 <a:ea typeface="Microsoft YaHei"/>
               </a:rPr>
-              <a:t>标准化模板 · 开放接入 · 可复制</a:t>
+              <a:t>各方收益与协同效应</a:t>
             </a:r>
           </a:p>
         </p:txBody>
@@ -9144,7 +10731,7 @@
                 <a:latin typeface="Microsoft YaHei"/>
                 <a:ea typeface="Microsoft YaHei"/>
               </a:rPr>
-              <a:t>落地路径与下一步</a:t>
+              <a:t>开放式可复制模式</a:t>
             </a:r>
           </a:p>
         </p:txBody>
@@ -9158,6 +10745,232 @@
         <p:spPr>
           <a:xfrm>
             <a:off x="1737360" y="6172200"/>
+            <a:ext cx="4206240" cy="320040"/>
+          </a:xfrm>
+          <a:prstGeom prst="rect">
+            <a:avLst/>
+          </a:prstGeom>
+          <a:noFill/>
+        </p:spPr>
+        <p:txBody>
+          <a:bodyPr wrap="square" anchor="t" lIns="0" rIns="0" tIns="0" bIns="0">
+            <a:spAutoFit/>
+          </a:bodyPr>
+          <a:lstStyle/>
+          <a:p>
+            <a:pPr algn="l">
+              <a:lnSpc>
+                <a:spcPct val="100000"/>
+              </a:lnSpc>
+              <a:spcBef>
+                <a:spcPts val="0"/>
+              </a:spcBef>
+              <a:spcAft>
+                <a:spcPts val="400"/>
+              </a:spcAft>
+            </a:pPr>
+            <a:r>
+              <a:rPr sz="1100" b="0">
+                <a:solidFill>
+                  <a:srgbClr val="5A6472"/>
+                </a:solidFill>
+                <a:latin typeface="Microsoft YaHei"/>
+                <a:ea typeface="Microsoft YaHei"/>
+              </a:rPr>
+              <a:t>标准化模板 · 开放接入 · 可复制</a:t>
+            </a:r>
+          </a:p>
+        </p:txBody>
+      </p:sp>
+      <p:sp>
+        <p:nvSpPr>
+          <p:cNvPr id="54" name="Rounded Rectangle 53"/>
+          <p:cNvSpPr/>
+          <p:nvPr/>
+        </p:nvSpPr>
+        <p:spPr>
+          <a:xfrm>
+            <a:off x="6263640" y="5669280"/>
+            <a:ext cx="5257800" cy="896112"/>
+          </a:xfrm>
+          <a:prstGeom prst="roundRect">
+            <a:avLst/>
+          </a:prstGeom>
+          <a:solidFill>
+            <a:srgbClr val="EAF2FB"/>
+          </a:solidFill>
+          <a:ln>
+            <a:noFill/>
+          </a:ln>
+          <a:effectLst/>
+        </p:spPr>
+        <p:style>
+          <a:lnRef idx="1">
+            <a:schemeClr val="accent1"/>
+          </a:lnRef>
+          <a:fillRef idx="3">
+            <a:schemeClr val="accent1"/>
+          </a:fillRef>
+          <a:effectRef idx="2">
+            <a:schemeClr val="accent1"/>
+          </a:effectRef>
+          <a:fontRef idx="minor">
+            <a:schemeClr val="lt1"/>
+          </a:fontRef>
+        </p:style>
+        <p:txBody>
+          <a:bodyPr rtlCol="0" anchor="ctr"/>
+          <a:lstStyle/>
+          <a:p>
+            <a:pPr algn="ctr"/>
+          </a:p>
+        </p:txBody>
+      </p:sp>
+      <p:sp>
+        <p:nvSpPr>
+          <p:cNvPr id="55" name="Rounded Rectangle 54"/>
+          <p:cNvSpPr/>
+          <p:nvPr/>
+        </p:nvSpPr>
+        <p:spPr>
+          <a:xfrm>
+            <a:off x="6263640" y="5669280"/>
+            <a:ext cx="822960" cy="896112"/>
+          </a:xfrm>
+          <a:prstGeom prst="roundRect">
+            <a:avLst/>
+          </a:prstGeom>
+          <a:solidFill>
+            <a:srgbClr val="125CC4"/>
+          </a:solidFill>
+          <a:ln>
+            <a:noFill/>
+          </a:ln>
+          <a:effectLst/>
+        </p:spPr>
+        <p:style>
+          <a:lnRef idx="1">
+            <a:schemeClr val="accent1"/>
+          </a:lnRef>
+          <a:fillRef idx="3">
+            <a:schemeClr val="accent1"/>
+          </a:fillRef>
+          <a:effectRef idx="2">
+            <a:schemeClr val="accent1"/>
+          </a:effectRef>
+          <a:fontRef idx="minor">
+            <a:schemeClr val="lt1"/>
+          </a:fontRef>
+        </p:style>
+        <p:txBody>
+          <a:bodyPr rtlCol="0" anchor="ctr"/>
+          <a:lstStyle/>
+          <a:p>
+            <a:pPr algn="ctr"/>
+          </a:p>
+        </p:txBody>
+      </p:sp>
+      <p:sp>
+        <p:nvSpPr>
+          <p:cNvPr id="56" name="TextBox 55"/>
+          <p:cNvSpPr txBox="1"/>
+          <p:nvPr/>
+        </p:nvSpPr>
+        <p:spPr>
+          <a:xfrm>
+            <a:off x="6263640" y="5833872"/>
+            <a:ext cx="822960" cy="548640"/>
+          </a:xfrm>
+          <a:prstGeom prst="rect">
+            <a:avLst/>
+          </a:prstGeom>
+          <a:noFill/>
+        </p:spPr>
+        <p:txBody>
+          <a:bodyPr wrap="square" anchor="t" lIns="0" rIns="0" tIns="0" bIns="0">
+            <a:spAutoFit/>
+          </a:bodyPr>
+          <a:lstStyle/>
+          <a:p>
+            <a:pPr algn="ctr">
+              <a:lnSpc>
+                <a:spcPct val="100000"/>
+              </a:lnSpc>
+              <a:spcBef>
+                <a:spcPts val="0"/>
+              </a:spcBef>
+              <a:spcAft>
+                <a:spcPts val="400"/>
+              </a:spcAft>
+            </a:pPr>
+            <a:r>
+              <a:rPr sz="2200" b="1">
+                <a:solidFill>
+                  <a:srgbClr val="FFFFFF"/>
+                </a:solidFill>
+                <a:latin typeface="Microsoft YaHei"/>
+                <a:ea typeface="Microsoft YaHei"/>
+              </a:rPr>
+              <a:t>10</a:t>
+            </a:r>
+          </a:p>
+        </p:txBody>
+      </p:sp>
+      <p:sp>
+        <p:nvSpPr>
+          <p:cNvPr id="57" name="TextBox 56"/>
+          <p:cNvSpPr txBox="1"/>
+          <p:nvPr/>
+        </p:nvSpPr>
+        <p:spPr>
+          <a:xfrm>
+            <a:off x="7269480" y="5797296"/>
+            <a:ext cx="4114800" cy="365760"/>
+          </a:xfrm>
+          <a:prstGeom prst="rect">
+            <a:avLst/>
+          </a:prstGeom>
+          <a:noFill/>
+        </p:spPr>
+        <p:txBody>
+          <a:bodyPr wrap="square" anchor="t" lIns="0" rIns="0" tIns="0" bIns="0">
+            <a:spAutoFit/>
+          </a:bodyPr>
+          <a:lstStyle/>
+          <a:p>
+            <a:pPr algn="l">
+              <a:lnSpc>
+                <a:spcPct val="100000"/>
+              </a:lnSpc>
+              <a:spcBef>
+                <a:spcPts val="0"/>
+              </a:spcBef>
+              <a:spcAft>
+                <a:spcPts val="400"/>
+              </a:spcAft>
+            </a:pPr>
+            <a:r>
+              <a:rPr sz="1600" b="1">
+                <a:solidFill>
+                  <a:srgbClr val="0B2A5B"/>
+                </a:solidFill>
+                <a:latin typeface="Microsoft YaHei"/>
+                <a:ea typeface="Microsoft YaHei"/>
+              </a:rPr>
+              <a:t>落地路径与下一步</a:t>
+            </a:r>
+          </a:p>
+        </p:txBody>
+      </p:sp>
+      <p:sp>
+        <p:nvSpPr>
+          <p:cNvPr id="58" name="TextBox 57"/>
+          <p:cNvSpPr txBox="1"/>
+          <p:nvPr/>
+        </p:nvSpPr>
+        <p:spPr>
+          <a:xfrm>
+            <a:off x="7269480" y="6172200"/>
             <a:ext cx="4206240" cy="320040"/>
           </a:xfrm>
           <a:prstGeom prst="rect">
@@ -9522,7 +11335,7 @@
                 <a:latin typeface="Microsoft YaHei"/>
                 <a:ea typeface="Microsoft YaHei"/>
               </a:rPr>
-              <a:t>01 / 09</a:t>
+              <a:t>01 / 10</a:t>
             </a:r>
           </a:p>
         </p:txBody>
@@ -10620,7 +12433,7 @@
                 <a:latin typeface="Microsoft YaHei"/>
                 <a:ea typeface="Microsoft YaHei"/>
               </a:rPr>
-              <a:t>02 / 09</a:t>
+              <a:t>02 / 10</a:t>
             </a:r>
           </a:p>
         </p:txBody>
@@ -12220,7 +14033,7 @@
                 <a:latin typeface="Microsoft YaHei"/>
                 <a:ea typeface="Microsoft YaHei"/>
               </a:rPr>
-              <a:t>03 / 09</a:t>
+              <a:t>03 / 10</a:t>
             </a:r>
           </a:p>
         </p:txBody>
@@ -13906,7 +15719,7 @@
                 <a:latin typeface="Microsoft YaHei"/>
                 <a:ea typeface="Microsoft YaHei"/>
               </a:rPr>
-              <a:t>04 / 09</a:t>
+              <a:t>04 / 10</a:t>
             </a:r>
           </a:p>
         </p:txBody>
@@ -15228,7 +17041,7 @@
                 <a:latin typeface="Microsoft YaHei"/>
                 <a:ea typeface="Microsoft YaHei"/>
               </a:rPr>
-              <a:t>05 / 09</a:t>
+              <a:t>05 / 10</a:t>
             </a:r>
           </a:p>
         </p:txBody>
@@ -17088,7 +18901,7 @@
                 <a:latin typeface="Microsoft YaHei"/>
                 <a:ea typeface="Microsoft YaHei"/>
               </a:rPr>
-              <a:t>06 / 09</a:t>
+              <a:t>06 / 10</a:t>
             </a:r>
           </a:p>
         </p:txBody>
@@ -18504,7 +20317,7 @@
                 <a:latin typeface="Microsoft YaHei"/>
                 <a:ea typeface="Microsoft YaHei"/>
               </a:rPr>
-              <a:t>07  共赢价值</a:t>
+              <a:t>07  园区政策</a:t>
             </a:r>
           </a:p>
         </p:txBody>
@@ -18550,7 +20363,7 @@
                 <a:latin typeface="Microsoft YaHei"/>
                 <a:ea typeface="Microsoft YaHei"/>
               </a:rPr>
-              <a:t>三方共赢与协同价值</a:t>
+              <a:t>火山引擎 · 园区独立政策</a:t>
             </a:r>
           </a:p>
         </p:txBody>
@@ -18640,7 +20453,7 @@
                 <a:latin typeface="Microsoft YaHei"/>
                 <a:ea typeface="Microsoft YaHei"/>
               </a:rPr>
-              <a:t>07 / 09</a:t>
+              <a:t>07 / 10</a:t>
             </a:r>
           </a:p>
         </p:txBody>
@@ -18693,102 +20506,14 @@
       </p:sp>
       <p:sp>
         <p:nvSpPr>
-          <p:cNvPr id="10" name="Rounded Rectangle 9"/>
-          <p:cNvSpPr/>
-          <p:nvPr/>
-        </p:nvSpPr>
-        <p:spPr>
-          <a:xfrm>
-            <a:off x="731520" y="1783080"/>
-            <a:ext cx="5257800" cy="1874519"/>
-          </a:xfrm>
-          <a:prstGeom prst="roundRect">
-            <a:avLst/>
-          </a:prstGeom>
-          <a:solidFill>
-            <a:srgbClr val="EAF2FB"/>
-          </a:solidFill>
-          <a:ln>
-            <a:noFill/>
-          </a:ln>
-          <a:effectLst/>
-        </p:spPr>
-        <p:style>
-          <a:lnRef idx="1">
-            <a:schemeClr val="accent1"/>
-          </a:lnRef>
-          <a:fillRef idx="3">
-            <a:schemeClr val="accent1"/>
-          </a:fillRef>
-          <a:effectRef idx="2">
-            <a:schemeClr val="accent1"/>
-          </a:effectRef>
-          <a:fontRef idx="minor">
-            <a:schemeClr val="lt1"/>
-          </a:fontRef>
-        </p:style>
-        <p:txBody>
-          <a:bodyPr rtlCol="0" anchor="ctr"/>
-          <a:lstStyle/>
-          <a:p>
-            <a:pPr algn="ctr"/>
-          </a:p>
-        </p:txBody>
-      </p:sp>
-      <p:sp>
-        <p:nvSpPr>
-          <p:cNvPr id="11" name="Rectangle 10"/>
-          <p:cNvSpPr/>
-          <p:nvPr/>
-        </p:nvSpPr>
-        <p:spPr>
-          <a:xfrm>
-            <a:off x="731520" y="1783080"/>
-            <a:ext cx="146304" cy="1874519"/>
-          </a:xfrm>
-          <a:prstGeom prst="rect">
-            <a:avLst/>
-          </a:prstGeom>
-          <a:solidFill>
-            <a:srgbClr val="125CC4"/>
-          </a:solidFill>
-          <a:ln>
-            <a:noFill/>
-          </a:ln>
-          <a:effectLst/>
-        </p:spPr>
-        <p:style>
-          <a:lnRef idx="1">
-            <a:schemeClr val="accent1"/>
-          </a:lnRef>
-          <a:fillRef idx="3">
-            <a:schemeClr val="accent1"/>
-          </a:fillRef>
-          <a:effectRef idx="2">
-            <a:schemeClr val="accent1"/>
-          </a:effectRef>
-          <a:fontRef idx="minor">
-            <a:schemeClr val="lt1"/>
-          </a:fontRef>
-        </p:style>
-        <p:txBody>
-          <a:bodyPr rtlCol="0" anchor="ctr"/>
-          <a:lstStyle/>
-          <a:p>
-            <a:pPr algn="ctr"/>
-          </a:p>
-        </p:txBody>
-      </p:sp>
-      <p:sp>
-        <p:nvSpPr>
-          <p:cNvPr id="12" name="TextBox 11"/>
+          <p:cNvPr id="10" name="TextBox 9"/>
           <p:cNvSpPr txBox="1"/>
           <p:nvPr/>
         </p:nvSpPr>
         <p:spPr>
           <a:xfrm>
-            <a:off x="1097280" y="1947672"/>
-            <a:ext cx="4709160" cy="457200"/>
+            <a:off x="731520" y="1481328"/>
+            <a:ext cx="10698480" cy="365760"/>
           </a:xfrm>
           <a:prstGeom prst="rect">
             <a:avLst/>
@@ -18813,28 +20538,216 @@
               </a:spcAft>
             </a:pPr>
             <a:r>
-              <a:rPr sz="1600" b="1">
-                <a:solidFill>
-                  <a:srgbClr val="125CC4"/>
-                </a:solidFill>
-                <a:latin typeface="Microsoft YaHei"/>
-                <a:ea typeface="Microsoft YaHei"/>
-              </a:rPr>
-              <a:t>大厂（火山/腾讯）</a:t>
-            </a:r>
-          </a:p>
-        </p:txBody>
-      </p:sp>
-      <p:sp>
-        <p:nvSpPr>
-          <p:cNvPr id="13" name="TextBox 12"/>
+              <a:rPr sz="1300" b="1">
+                <a:solidFill>
+                  <a:srgbClr val="F2A02D"/>
+                </a:solidFill>
+                <a:latin typeface="Microsoft YaHei"/>
+                <a:ea typeface="Microsoft YaHei"/>
+              </a:rPr>
+              <a:t>最新进展：</a:t>
+            </a:r>
+            <a:r>
+              <a:rPr sz="1300" b="0">
+                <a:solidFill>
+                  <a:srgbClr val="5A6472"/>
+                </a:solidFill>
+                <a:latin typeface="Microsoft YaHei"/>
+                <a:ea typeface="Microsoft YaHei"/>
+              </a:rPr>
+              <a:t>已为园区申请到火山引擎专属独立政策，以下为已沟通确认方案。</a:t>
+            </a:r>
+          </a:p>
+        </p:txBody>
+      </p:sp>
+      <p:sp>
+        <p:nvSpPr>
+          <p:cNvPr id="11" name="Rounded Rectangle 10"/>
+          <p:cNvSpPr/>
+          <p:nvPr/>
+        </p:nvSpPr>
+        <p:spPr>
+          <a:xfrm>
+            <a:off x="731520" y="1938528"/>
+            <a:ext cx="10698480" cy="1078992"/>
+          </a:xfrm>
+          <a:prstGeom prst="roundRect">
+            <a:avLst/>
+          </a:prstGeom>
+          <a:solidFill>
+            <a:srgbClr val="0B2A5B"/>
+          </a:solidFill>
+          <a:ln>
+            <a:noFill/>
+          </a:ln>
+          <a:effectLst/>
+        </p:spPr>
+        <p:style>
+          <a:lnRef idx="1">
+            <a:schemeClr val="accent1"/>
+          </a:lnRef>
+          <a:fillRef idx="3">
+            <a:schemeClr val="accent1"/>
+          </a:fillRef>
+          <a:effectRef idx="2">
+            <a:schemeClr val="accent1"/>
+          </a:effectRef>
+          <a:fontRef idx="minor">
+            <a:schemeClr val="lt1"/>
+          </a:fontRef>
+        </p:style>
+        <p:txBody>
+          <a:bodyPr rtlCol="0" anchor="ctr"/>
+          <a:lstStyle/>
+          <a:p>
+            <a:pPr algn="ctr"/>
+          </a:p>
+        </p:txBody>
+      </p:sp>
+      <p:sp>
+        <p:nvSpPr>
+          <p:cNvPr id="12" name="Rounded Rectangle 11"/>
+          <p:cNvSpPr/>
+          <p:nvPr/>
+        </p:nvSpPr>
+        <p:spPr>
+          <a:xfrm>
+            <a:off x="731520" y="1938528"/>
+            <a:ext cx="1417320" cy="1078992"/>
+          </a:xfrm>
+          <a:prstGeom prst="roundRect">
+            <a:avLst/>
+          </a:prstGeom>
+          <a:solidFill>
+            <a:srgbClr val="F2A02D"/>
+          </a:solidFill>
+          <a:ln>
+            <a:noFill/>
+          </a:ln>
+          <a:effectLst/>
+        </p:spPr>
+        <p:style>
+          <a:lnRef idx="1">
+            <a:schemeClr val="accent1"/>
+          </a:lnRef>
+          <a:fillRef idx="3">
+            <a:schemeClr val="accent1"/>
+          </a:fillRef>
+          <a:effectRef idx="2">
+            <a:schemeClr val="accent1"/>
+          </a:effectRef>
+          <a:fontRef idx="minor">
+            <a:schemeClr val="lt1"/>
+          </a:fontRef>
+        </p:style>
+        <p:txBody>
+          <a:bodyPr rtlCol="0" anchor="ctr"/>
+          <a:lstStyle/>
+          <a:p>
+            <a:pPr algn="ctr"/>
+          </a:p>
+        </p:txBody>
+      </p:sp>
+      <p:sp>
+        <p:nvSpPr>
+          <p:cNvPr id="13" name="Rectangle 12"/>
+          <p:cNvSpPr/>
+          <p:nvPr/>
+        </p:nvSpPr>
+        <p:spPr>
+          <a:xfrm>
+            <a:off x="1097280" y="1938528"/>
+            <a:ext cx="320040" cy="1078992"/>
+          </a:xfrm>
+          <a:prstGeom prst="rect">
+            <a:avLst/>
+          </a:prstGeom>
+          <a:solidFill>
+            <a:srgbClr val="F2A02D"/>
+          </a:solidFill>
+          <a:ln>
+            <a:noFill/>
+          </a:ln>
+          <a:effectLst/>
+        </p:spPr>
+        <p:style>
+          <a:lnRef idx="1">
+            <a:schemeClr val="accent1"/>
+          </a:lnRef>
+          <a:fillRef idx="3">
+            <a:schemeClr val="accent1"/>
+          </a:fillRef>
+          <a:effectRef idx="2">
+            <a:schemeClr val="accent1"/>
+          </a:effectRef>
+          <a:fontRef idx="minor">
+            <a:schemeClr val="lt1"/>
+          </a:fontRef>
+        </p:style>
+        <p:txBody>
+          <a:bodyPr rtlCol="0" anchor="ctr"/>
+          <a:lstStyle/>
+          <a:p>
+            <a:pPr algn="ctr"/>
+          </a:p>
+        </p:txBody>
+      </p:sp>
+      <p:sp>
+        <p:nvSpPr>
+          <p:cNvPr id="14" name="TextBox 13"/>
           <p:cNvSpPr txBox="1"/>
           <p:nvPr/>
         </p:nvSpPr>
         <p:spPr>
           <a:xfrm>
-            <a:off x="1143000" y="2441448"/>
-            <a:ext cx="4617720" cy="384048"/>
+            <a:off x="731520" y="1938528"/>
+            <a:ext cx="1417320" cy="1078992"/>
+          </a:xfrm>
+          <a:prstGeom prst="rect">
+            <a:avLst/>
+          </a:prstGeom>
+          <a:noFill/>
+        </p:spPr>
+        <p:txBody>
+          <a:bodyPr wrap="square" anchor="ctr" lIns="0" rIns="0" tIns="0" bIns="0">
+            <a:spAutoFit/>
+          </a:bodyPr>
+          <a:lstStyle/>
+          <a:p>
+            <a:pPr algn="ctr">
+              <a:lnSpc>
+                <a:spcPct val="100000"/>
+              </a:lnSpc>
+              <a:spcBef>
+                <a:spcPts val="0"/>
+              </a:spcBef>
+              <a:spcAft>
+                <a:spcPts val="400"/>
+              </a:spcAft>
+            </a:pPr>
+            <a:r>
+              <a:rPr sz="4000" b="1">
+                <a:solidFill>
+                  <a:srgbClr val="FFFFFF"/>
+                </a:solidFill>
+                <a:latin typeface="Microsoft YaHei"/>
+                <a:ea typeface="Microsoft YaHei"/>
+              </a:rPr>
+              <a:t>免</a:t>
+            </a:r>
+          </a:p>
+        </p:txBody>
+      </p:sp>
+      <p:sp>
+        <p:nvSpPr>
+          <p:cNvPr id="15" name="TextBox 14"/>
+          <p:cNvSpPr txBox="1"/>
+          <p:nvPr/>
+        </p:nvSpPr>
+        <p:spPr>
+          <a:xfrm>
+            <a:off x="2423160" y="2121408"/>
+            <a:ext cx="8778240" cy="411480"/>
           </a:xfrm>
           <a:prstGeom prst="rect">
             <a:avLst/>
@@ -18859,38 +20772,28 @@
               </a:spcAft>
             </a:pPr>
             <a:r>
-              <a:rPr sz="1100" b="1">
-                <a:solidFill>
-                  <a:srgbClr val="125CC4"/>
-                </a:solidFill>
-                <a:latin typeface="Microsoft YaHei"/>
-                <a:ea typeface="Microsoft YaHei"/>
-              </a:rPr>
-              <a:t>● </a:t>
-            </a:r>
-            <a:r>
-              <a:rPr sz="1250" b="0">
-                <a:solidFill>
-                  <a:srgbClr val="1B2433"/>
-                </a:solidFill>
-                <a:latin typeface="Microsoft YaHei"/>
-                <a:ea typeface="Microsoft YaHei"/>
-              </a:rPr>
-              <a:t>精准触达 B 端企业客户</a:t>
-            </a:r>
-          </a:p>
-        </p:txBody>
-      </p:sp>
-      <p:sp>
-        <p:nvSpPr>
-          <p:cNvPr id="14" name="TextBox 13"/>
+              <a:rPr sz="1900" b="1">
+                <a:solidFill>
+                  <a:srgbClr val="00B4D8"/>
+                </a:solidFill>
+                <a:latin typeface="Microsoft YaHei"/>
+                <a:ea typeface="Microsoft YaHei"/>
+              </a:rPr>
+              <a:t>（一）无门槛 · 半年费用免费</a:t>
+            </a:r>
+          </a:p>
+        </p:txBody>
+      </p:sp>
+      <p:sp>
+        <p:nvSpPr>
+          <p:cNvPr id="16" name="TextBox 15"/>
           <p:cNvSpPr txBox="1"/>
           <p:nvPr/>
         </p:nvSpPr>
         <p:spPr>
           <a:xfrm>
-            <a:off x="1143000" y="2834640"/>
-            <a:ext cx="4617720" cy="384048"/>
+            <a:off x="2423160" y="2578608"/>
+            <a:ext cx="8778240" cy="384048"/>
           </a:xfrm>
           <a:prstGeom prst="rect">
             <a:avLst/>
@@ -18915,38 +20818,28 @@
               </a:spcAft>
             </a:pPr>
             <a:r>
-              <a:rPr sz="1100" b="1">
-                <a:solidFill>
-                  <a:srgbClr val="125CC4"/>
-                </a:solidFill>
-                <a:latin typeface="Microsoft YaHei"/>
-                <a:ea typeface="Microsoft YaHei"/>
-              </a:rPr>
-              <a:t>● </a:t>
-            </a:r>
-            <a:r>
-              <a:rPr sz="1250" b="0">
-                <a:solidFill>
-                  <a:srgbClr val="1B2433"/>
-                </a:solidFill>
-                <a:latin typeface="Microsoft YaHei"/>
-                <a:ea typeface="Microsoft YaHei"/>
-              </a:rPr>
-              <a:t>补贴转化为云消费与留存</a:t>
-            </a:r>
-          </a:p>
-        </p:txBody>
-      </p:sp>
-      <p:sp>
-        <p:nvSpPr>
-          <p:cNvPr id="15" name="TextBox 14"/>
+              <a:rPr sz="1400" b="0">
+                <a:solidFill>
+                  <a:srgbClr val="EAF2FB"/>
+                </a:solidFill>
+                <a:latin typeface="Microsoft YaHei"/>
+                <a:ea typeface="Microsoft YaHei"/>
+              </a:rPr>
+              <a:t>按预估半年费用一次性发放代金券，园区企业 0 门槛即可享用。</a:t>
+            </a:r>
+          </a:p>
+        </p:txBody>
+      </p:sp>
+      <p:sp>
+        <p:nvSpPr>
+          <p:cNvPr id="17" name="TextBox 16"/>
           <p:cNvSpPr txBox="1"/>
           <p:nvPr/>
         </p:nvSpPr>
         <p:spPr>
           <a:xfrm>
-            <a:off x="1143000" y="3227831"/>
-            <a:ext cx="4617720" cy="384048"/>
+            <a:off x="731520" y="3218688"/>
+            <a:ext cx="10698480" cy="365760"/>
           </a:xfrm>
           <a:prstGeom prst="rect">
             <a:avLst/>
@@ -18971,126 +20864,414 @@
               </a:spcAft>
             </a:pPr>
             <a:r>
-              <a:rPr sz="1100" b="1">
+              <a:rPr sz="1600" b="1">
                 <a:solidFill>
                   <a:srgbClr val="125CC4"/>
                 </a:solidFill>
                 <a:latin typeface="Microsoft YaHei"/>
                 <a:ea typeface="Microsoft YaHei"/>
               </a:rPr>
-              <a:t>● </a:t>
+              <a:t>（二）大客户额外折扣</a:t>
             </a:r>
             <a:r>
               <a:rPr sz="1250" b="0">
                 <a:solidFill>
-                  <a:srgbClr val="1B2433"/>
-                </a:solidFill>
-                <a:latin typeface="Microsoft YaHei"/>
-                <a:ea typeface="Microsoft YaHei"/>
-              </a:rPr>
-              <a:t>打造区域算力普惠样板</a:t>
-            </a:r>
-          </a:p>
-        </p:txBody>
-      </p:sp>
-      <p:sp>
-        <p:nvSpPr>
-          <p:cNvPr id="16" name="Rounded Rectangle 15"/>
-          <p:cNvSpPr/>
-          <p:nvPr/>
-        </p:nvSpPr>
-        <p:spPr>
-          <a:xfrm>
-            <a:off x="6263640" y="1783080"/>
-            <a:ext cx="5257800" cy="1874519"/>
-          </a:xfrm>
-          <a:prstGeom prst="roundRect">
-            <a:avLst/>
-          </a:prstGeom>
-          <a:solidFill>
-            <a:srgbClr val="EAF2FB"/>
-          </a:solidFill>
-          <a:ln>
-            <a:noFill/>
-          </a:ln>
-          <a:effectLst/>
-        </p:spPr>
-        <p:style>
-          <a:lnRef idx="1">
-            <a:schemeClr val="accent1"/>
-          </a:lnRef>
-          <a:fillRef idx="3">
-            <a:schemeClr val="accent1"/>
-          </a:fillRef>
-          <a:effectRef idx="2">
-            <a:schemeClr val="accent1"/>
-          </a:effectRef>
-          <a:fontRef idx="minor">
-            <a:schemeClr val="lt1"/>
-          </a:fontRef>
-        </p:style>
-        <p:txBody>
-          <a:bodyPr rtlCol="0" anchor="ctr"/>
-          <a:lstStyle/>
-          <a:p>
-            <a:pPr algn="ctr"/>
-          </a:p>
-        </p:txBody>
-      </p:sp>
-      <p:sp>
-        <p:nvSpPr>
-          <p:cNvPr id="17" name="Rectangle 16"/>
-          <p:cNvSpPr/>
-          <p:nvPr/>
-        </p:nvSpPr>
-        <p:spPr>
-          <a:xfrm>
-            <a:off x="6263640" y="1783080"/>
-            <a:ext cx="146304" cy="1874519"/>
-          </a:xfrm>
-          <a:prstGeom prst="rect">
-            <a:avLst/>
-          </a:prstGeom>
-          <a:solidFill>
-            <a:srgbClr val="00B4D8"/>
-          </a:solidFill>
-          <a:ln>
-            <a:noFill/>
-          </a:ln>
-          <a:effectLst/>
-        </p:spPr>
-        <p:style>
-          <a:lnRef idx="1">
-            <a:schemeClr val="accent1"/>
-          </a:lnRef>
-          <a:fillRef idx="3">
-            <a:schemeClr val="accent1"/>
-          </a:fillRef>
-          <a:effectRef idx="2">
-            <a:schemeClr val="accent1"/>
-          </a:effectRef>
-          <a:fontRef idx="minor">
-            <a:schemeClr val="lt1"/>
-          </a:fontRef>
-        </p:style>
-        <p:txBody>
-          <a:bodyPr rtlCol="0" anchor="ctr"/>
-          <a:lstStyle/>
-          <a:p>
-            <a:pPr algn="ctr"/>
-          </a:p>
-        </p:txBody>
-      </p:sp>
-      <p:sp>
-        <p:nvSpPr>
-          <p:cNvPr id="18" name="TextBox 17"/>
+                  <a:srgbClr val="5A6472"/>
+                </a:solidFill>
+                <a:latin typeface="Microsoft YaHei"/>
+                <a:ea typeface="Microsoft YaHei"/>
+              </a:rPr>
+              <a:t>（在代金券之外，可叠加；按累计消费分档）</a:t>
+            </a:r>
+          </a:p>
+        </p:txBody>
+      </p:sp>
+      <p:graphicFrame>
+        <p:nvGraphicFramePr>
+          <p:cNvPr id="18" name="Table 17"/>
+          <p:cNvGraphicFramePr>
+            <a:graphicFrameLocks noGrp="1"/>
+          </p:cNvGraphicFramePr>
+          <p:nvPr/>
+        </p:nvGraphicFramePr>
+        <p:xfrm>
+          <a:off x="1984248" y="3584448"/>
+          <a:ext cx="8229600" cy="2304288"/>
+        </p:xfrm>
+        <a:graphic>
+          <a:graphicData uri="http://schemas.openxmlformats.org/drawingml/2006/table">
+            <a:tbl>
+              <a:tblPr>
+                <a:tableStyleId>{5C22544A-7EE6-4342-B048-85BDC9FD1C3A}</a:tableStyleId>
+              </a:tblPr>
+              <a:tblGrid>
+                <a:gridCol w="4114800"/>
+                <a:gridCol w="4114800"/>
+              </a:tblGrid>
+              <a:tr h="384048">
+                <a:tc>
+                  <a:txBody>
+                    <a:bodyPr/>
+                    <a:lstStyle/>
+                    <a:p>
+                      <a:pPr algn="ctr"/>
+                      <a:r>
+                        <a:rPr sz="1300" b="1">
+                          <a:solidFill>
+                            <a:srgbClr val="FFFFFF"/>
+                          </a:solidFill>
+                          <a:latin typeface="Microsoft YaHei"/>
+                          <a:ea typeface="Microsoft YaHei"/>
+                        </a:rPr>
+                        <a:t>累计消费（万元）</a:t>
+                      </a:r>
+                    </a:p>
+                  </a:txBody>
+                  <a:tcPr anchor="ctr" marT="9144" marB="9144">
+                    <a:solidFill>
+                      <a:srgbClr val="0B2A5B"/>
+                    </a:solidFill>
+                  </a:tcPr>
+                </a:tc>
+                <a:tc>
+                  <a:txBody>
+                    <a:bodyPr/>
+                    <a:lstStyle/>
+                    <a:p>
+                      <a:pPr algn="ctr"/>
+                      <a:r>
+                        <a:rPr sz="1300" b="1">
+                          <a:solidFill>
+                            <a:srgbClr val="FFFFFF"/>
+                          </a:solidFill>
+                          <a:latin typeface="Microsoft YaHei"/>
+                          <a:ea typeface="Microsoft YaHei"/>
+                        </a:rPr>
+                        <a:t>额外折扣（除代金券外）</a:t>
+                      </a:r>
+                    </a:p>
+                  </a:txBody>
+                  <a:tcPr anchor="ctr" marT="9144" marB="9144">
+                    <a:solidFill>
+                      <a:srgbClr val="0B2A5B"/>
+                    </a:solidFill>
+                  </a:tcPr>
+                </a:tc>
+              </a:tr>
+              <a:tr h="320040">
+                <a:tc>
+                  <a:txBody>
+                    <a:bodyPr/>
+                    <a:lstStyle/>
+                    <a:p>
+                      <a:pPr algn="ctr"/>
+                      <a:r>
+                        <a:rPr sz="1300" b="0">
+                          <a:solidFill>
+                            <a:srgbClr val="1B2433"/>
+                          </a:solidFill>
+                          <a:latin typeface="Microsoft YaHei"/>
+                          <a:ea typeface="Microsoft YaHei"/>
+                        </a:rPr>
+                        <a:t>0 – 10</a:t>
+                      </a:r>
+                    </a:p>
+                  </a:txBody>
+                  <a:tcPr anchor="ctr" marT="9144" marB="9144">
+                    <a:solidFill>
+                      <a:srgbClr val="FFFFFF"/>
+                    </a:solidFill>
+                  </a:tcPr>
+                </a:tc>
+                <a:tc>
+                  <a:txBody>
+                    <a:bodyPr/>
+                    <a:lstStyle/>
+                    <a:p>
+                      <a:pPr algn="ctr"/>
+                      <a:r>
+                        <a:rPr sz="1300" b="1">
+                          <a:solidFill>
+                            <a:srgbClr val="125CC4"/>
+                          </a:solidFill>
+                          <a:latin typeface="Microsoft YaHei"/>
+                          <a:ea typeface="Microsoft YaHei"/>
+                        </a:rPr>
+                        <a:t>5 折 ～ 7 折</a:t>
+                      </a:r>
+                    </a:p>
+                  </a:txBody>
+                  <a:tcPr anchor="ctr" marT="9144" marB="9144">
+                    <a:solidFill>
+                      <a:srgbClr val="FFFFFF"/>
+                    </a:solidFill>
+                  </a:tcPr>
+                </a:tc>
+              </a:tr>
+              <a:tr h="320040">
+                <a:tc>
+                  <a:txBody>
+                    <a:bodyPr/>
+                    <a:lstStyle/>
+                    <a:p>
+                      <a:pPr algn="ctr"/>
+                      <a:r>
+                        <a:rPr sz="1300" b="0">
+                          <a:solidFill>
+                            <a:srgbClr val="1B2433"/>
+                          </a:solidFill>
+                          <a:latin typeface="Microsoft YaHei"/>
+                          <a:ea typeface="Microsoft YaHei"/>
+                        </a:rPr>
+                        <a:t>10 – 30</a:t>
+                      </a:r>
+                    </a:p>
+                  </a:txBody>
+                  <a:tcPr anchor="ctr" marT="9144" marB="9144">
+                    <a:solidFill>
+                      <a:srgbClr val="EAF2FB"/>
+                    </a:solidFill>
+                  </a:tcPr>
+                </a:tc>
+                <a:tc>
+                  <a:txBody>
+                    <a:bodyPr/>
+                    <a:lstStyle/>
+                    <a:p>
+                      <a:pPr algn="ctr"/>
+                      <a:r>
+                        <a:rPr sz="1300" b="1">
+                          <a:solidFill>
+                            <a:srgbClr val="125CC4"/>
+                          </a:solidFill>
+                          <a:latin typeface="Microsoft YaHei"/>
+                          <a:ea typeface="Microsoft YaHei"/>
+                        </a:rPr>
+                        <a:t>4.5 折 ～ 5 折</a:t>
+                      </a:r>
+                    </a:p>
+                  </a:txBody>
+                  <a:tcPr anchor="ctr" marT="9144" marB="9144">
+                    <a:solidFill>
+                      <a:srgbClr val="EAF2FB"/>
+                    </a:solidFill>
+                  </a:tcPr>
+                </a:tc>
+              </a:tr>
+              <a:tr h="320040">
+                <a:tc>
+                  <a:txBody>
+                    <a:bodyPr/>
+                    <a:lstStyle/>
+                    <a:p>
+                      <a:pPr algn="ctr"/>
+                      <a:r>
+                        <a:rPr sz="1300" b="0">
+                          <a:solidFill>
+                            <a:srgbClr val="1B2433"/>
+                          </a:solidFill>
+                          <a:latin typeface="Microsoft YaHei"/>
+                          <a:ea typeface="Microsoft YaHei"/>
+                        </a:rPr>
+                        <a:t>30 – 50</a:t>
+                      </a:r>
+                    </a:p>
+                  </a:txBody>
+                  <a:tcPr anchor="ctr" marT="9144" marB="9144">
+                    <a:solidFill>
+                      <a:srgbClr val="FFFFFF"/>
+                    </a:solidFill>
+                  </a:tcPr>
+                </a:tc>
+                <a:tc>
+                  <a:txBody>
+                    <a:bodyPr/>
+                    <a:lstStyle/>
+                    <a:p>
+                      <a:pPr algn="ctr"/>
+                      <a:r>
+                        <a:rPr sz="1300" b="1">
+                          <a:solidFill>
+                            <a:srgbClr val="125CC4"/>
+                          </a:solidFill>
+                          <a:latin typeface="Microsoft YaHei"/>
+                          <a:ea typeface="Microsoft YaHei"/>
+                        </a:rPr>
+                        <a:t>4 折 ～ 4.5 折</a:t>
+                      </a:r>
+                    </a:p>
+                  </a:txBody>
+                  <a:tcPr anchor="ctr" marT="9144" marB="9144">
+                    <a:solidFill>
+                      <a:srgbClr val="FFFFFF"/>
+                    </a:solidFill>
+                  </a:tcPr>
+                </a:tc>
+              </a:tr>
+              <a:tr h="320040">
+                <a:tc>
+                  <a:txBody>
+                    <a:bodyPr/>
+                    <a:lstStyle/>
+                    <a:p>
+                      <a:pPr algn="ctr"/>
+                      <a:r>
+                        <a:rPr sz="1300" b="0">
+                          <a:solidFill>
+                            <a:srgbClr val="1B2433"/>
+                          </a:solidFill>
+                          <a:latin typeface="Microsoft YaHei"/>
+                          <a:ea typeface="Microsoft YaHei"/>
+                        </a:rPr>
+                        <a:t>50 – 100</a:t>
+                      </a:r>
+                    </a:p>
+                  </a:txBody>
+                  <a:tcPr anchor="ctr" marT="9144" marB="9144">
+                    <a:solidFill>
+                      <a:srgbClr val="EAF2FB"/>
+                    </a:solidFill>
+                  </a:tcPr>
+                </a:tc>
+                <a:tc>
+                  <a:txBody>
+                    <a:bodyPr/>
+                    <a:lstStyle/>
+                    <a:p>
+                      <a:pPr algn="ctr"/>
+                      <a:r>
+                        <a:rPr sz="1300" b="1">
+                          <a:solidFill>
+                            <a:srgbClr val="125CC4"/>
+                          </a:solidFill>
+                          <a:latin typeface="Microsoft YaHei"/>
+                          <a:ea typeface="Microsoft YaHei"/>
+                        </a:rPr>
+                        <a:t>3.5 折 ～ 4 折</a:t>
+                      </a:r>
+                    </a:p>
+                  </a:txBody>
+                  <a:tcPr anchor="ctr" marT="9144" marB="9144">
+                    <a:solidFill>
+                      <a:srgbClr val="EAF2FB"/>
+                    </a:solidFill>
+                  </a:tcPr>
+                </a:tc>
+              </a:tr>
+              <a:tr h="320040">
+                <a:tc>
+                  <a:txBody>
+                    <a:bodyPr/>
+                    <a:lstStyle/>
+                    <a:p>
+                      <a:pPr algn="ctr"/>
+                      <a:r>
+                        <a:rPr sz="1300" b="0">
+                          <a:solidFill>
+                            <a:srgbClr val="1B2433"/>
+                          </a:solidFill>
+                          <a:latin typeface="Microsoft YaHei"/>
+                          <a:ea typeface="Microsoft YaHei"/>
+                        </a:rPr>
+                        <a:t>100 – 300</a:t>
+                      </a:r>
+                    </a:p>
+                  </a:txBody>
+                  <a:tcPr anchor="ctr" marT="9144" marB="9144">
+                    <a:solidFill>
+                      <a:srgbClr val="FFFFFF"/>
+                    </a:solidFill>
+                  </a:tcPr>
+                </a:tc>
+                <a:tc>
+                  <a:txBody>
+                    <a:bodyPr/>
+                    <a:lstStyle/>
+                    <a:p>
+                      <a:pPr algn="ctr"/>
+                      <a:r>
+                        <a:rPr sz="1300" b="1">
+                          <a:solidFill>
+                            <a:srgbClr val="125CC4"/>
+                          </a:solidFill>
+                          <a:latin typeface="Microsoft YaHei"/>
+                          <a:ea typeface="Microsoft YaHei"/>
+                        </a:rPr>
+                        <a:t>3 折 ～ 3.5 折</a:t>
+                      </a:r>
+                    </a:p>
+                  </a:txBody>
+                  <a:tcPr anchor="ctr" marT="9144" marB="9144">
+                    <a:solidFill>
+                      <a:srgbClr val="FFFFFF"/>
+                    </a:solidFill>
+                  </a:tcPr>
+                </a:tc>
+              </a:tr>
+              <a:tr h="320040">
+                <a:tc>
+                  <a:txBody>
+                    <a:bodyPr/>
+                    <a:lstStyle/>
+                    <a:p>
+                      <a:pPr algn="ctr"/>
+                      <a:r>
+                        <a:rPr sz="1300" b="0">
+                          <a:solidFill>
+                            <a:srgbClr val="1B2433"/>
+                          </a:solidFill>
+                          <a:latin typeface="Microsoft YaHei"/>
+                          <a:ea typeface="Microsoft YaHei"/>
+                        </a:rPr>
+                        <a:t>300 – 500 +</a:t>
+                      </a:r>
+                    </a:p>
+                  </a:txBody>
+                  <a:tcPr anchor="ctr" marT="9144" marB="9144">
+                    <a:solidFill>
+                      <a:srgbClr val="EAF2FB"/>
+                    </a:solidFill>
+                  </a:tcPr>
+                </a:tc>
+                <a:tc>
+                  <a:txBody>
+                    <a:bodyPr/>
+                    <a:lstStyle/>
+                    <a:p>
+                      <a:pPr algn="ctr"/>
+                      <a:r>
+                        <a:rPr sz="1300" b="1">
+                          <a:solidFill>
+                            <a:srgbClr val="125CC4"/>
+                          </a:solidFill>
+                          <a:latin typeface="Microsoft YaHei"/>
+                          <a:ea typeface="Microsoft YaHei"/>
+                        </a:rPr>
+                        <a:t>2.5 折 ～ 3 折</a:t>
+                      </a:r>
+                    </a:p>
+                  </a:txBody>
+                  <a:tcPr anchor="ctr" marT="9144" marB="9144">
+                    <a:solidFill>
+                      <a:srgbClr val="EAF2FB"/>
+                    </a:solidFill>
+                  </a:tcPr>
+                </a:tc>
+              </a:tr>
+            </a:tbl>
+          </a:graphicData>
+        </a:graphic>
+      </p:graphicFrame>
+      <p:sp>
+        <p:nvSpPr>
+          <p:cNvPr id="19" name="TextBox 18"/>
           <p:cNvSpPr txBox="1"/>
           <p:nvPr/>
         </p:nvSpPr>
         <p:spPr>
           <a:xfrm>
-            <a:off x="6629400" y="1947672"/>
-            <a:ext cx="4709160" cy="457200"/>
+            <a:off x="731520" y="6172200"/>
+            <a:ext cx="10698480" cy="320040"/>
           </a:xfrm>
           <a:prstGeom prst="rect">
             <a:avLst/>
@@ -19115,786 +21296,24 @@
               </a:spcAft>
             </a:pPr>
             <a:r>
-              <a:rPr sz="1600" b="1">
-                <a:solidFill>
-                  <a:srgbClr val="00B4D8"/>
-                </a:solidFill>
-                <a:latin typeface="Microsoft YaHei"/>
-                <a:ea typeface="Microsoft YaHei"/>
-              </a:rPr>
-              <a:t>楼宇 / 园区物业</a:t>
-            </a:r>
-          </a:p>
-        </p:txBody>
-      </p:sp>
-      <p:sp>
-        <p:nvSpPr>
-          <p:cNvPr id="19" name="TextBox 18"/>
-          <p:cNvSpPr txBox="1"/>
-          <p:nvPr/>
-        </p:nvSpPr>
-        <p:spPr>
-          <a:xfrm>
-            <a:off x="6675120" y="2441448"/>
-            <a:ext cx="4617720" cy="384048"/>
-          </a:xfrm>
-          <a:prstGeom prst="rect">
-            <a:avLst/>
-          </a:prstGeom>
-          <a:noFill/>
-        </p:spPr>
-        <p:txBody>
-          <a:bodyPr wrap="square" anchor="t" lIns="0" rIns="0" tIns="0" bIns="0">
-            <a:spAutoFit/>
-          </a:bodyPr>
-          <a:lstStyle/>
-          <a:p>
-            <a:pPr algn="l">
-              <a:lnSpc>
-                <a:spcPct val="100000"/>
-              </a:lnSpc>
-              <a:spcBef>
-                <a:spcPts val="0"/>
-              </a:spcBef>
-              <a:spcAft>
-                <a:spcPts val="400"/>
-              </a:spcAft>
-            </a:pPr>
-            <a:r>
               <a:rPr sz="1100" b="1">
                 <a:solidFill>
-                  <a:srgbClr val="00B4D8"/>
-                </a:solidFill>
-                <a:latin typeface="Microsoft YaHei"/>
-                <a:ea typeface="Microsoft YaHei"/>
-              </a:rPr>
-              <a:t>● </a:t>
-            </a:r>
-            <a:r>
-              <a:rPr sz="1250" b="0">
-                <a:solidFill>
-                  <a:srgbClr val="1B2433"/>
-                </a:solidFill>
-                <a:latin typeface="Microsoft YaHei"/>
-                <a:ea typeface="Microsoft YaHei"/>
-              </a:rPr>
-              <a:t>差异化招商卖点</a:t>
-            </a:r>
-          </a:p>
-        </p:txBody>
-      </p:sp>
-      <p:sp>
-        <p:nvSpPr>
-          <p:cNvPr id="20" name="TextBox 19"/>
-          <p:cNvSpPr txBox="1"/>
-          <p:nvPr/>
-        </p:nvSpPr>
-        <p:spPr>
-          <a:xfrm>
-            <a:off x="6675120" y="2834640"/>
-            <a:ext cx="4617720" cy="384048"/>
-          </a:xfrm>
-          <a:prstGeom prst="rect">
-            <a:avLst/>
-          </a:prstGeom>
-          <a:noFill/>
-        </p:spPr>
-        <p:txBody>
-          <a:bodyPr wrap="square" anchor="t" lIns="0" rIns="0" tIns="0" bIns="0">
-            <a:spAutoFit/>
-          </a:bodyPr>
-          <a:lstStyle/>
-          <a:p>
-            <a:pPr algn="l">
-              <a:lnSpc>
-                <a:spcPct val="100000"/>
-              </a:lnSpc>
-              <a:spcBef>
-                <a:spcPts val="0"/>
-              </a:spcBef>
-              <a:spcAft>
-                <a:spcPts val="400"/>
-              </a:spcAft>
-            </a:pPr>
-            <a:r>
-              <a:rPr sz="1100" b="1">
-                <a:solidFill>
-                  <a:srgbClr val="00B4D8"/>
-                </a:solidFill>
-                <a:latin typeface="Microsoft YaHei"/>
-                <a:ea typeface="Microsoft YaHei"/>
-              </a:rPr>
-              <a:t>● </a:t>
-            </a:r>
-            <a:r>
-              <a:rPr sz="1250" b="0">
-                <a:solidFill>
-                  <a:srgbClr val="1B2433"/>
-                </a:solidFill>
-                <a:latin typeface="Microsoft YaHei"/>
-                <a:ea typeface="Microsoft YaHei"/>
-              </a:rPr>
-              <a:t>提升入驻率与续约率</a:t>
-            </a:r>
-          </a:p>
-        </p:txBody>
-      </p:sp>
-      <p:sp>
-        <p:nvSpPr>
-          <p:cNvPr id="21" name="TextBox 20"/>
-          <p:cNvSpPr txBox="1"/>
-          <p:nvPr/>
-        </p:nvSpPr>
-        <p:spPr>
-          <a:xfrm>
-            <a:off x="6675120" y="3227831"/>
-            <a:ext cx="4617720" cy="384048"/>
-          </a:xfrm>
-          <a:prstGeom prst="rect">
-            <a:avLst/>
-          </a:prstGeom>
-          <a:noFill/>
-        </p:spPr>
-        <p:txBody>
-          <a:bodyPr wrap="square" anchor="t" lIns="0" rIns="0" tIns="0" bIns="0">
-            <a:spAutoFit/>
-          </a:bodyPr>
-          <a:lstStyle/>
-          <a:p>
-            <a:pPr algn="l">
-              <a:lnSpc>
-                <a:spcPct val="100000"/>
-              </a:lnSpc>
-              <a:spcBef>
-                <a:spcPts val="0"/>
-              </a:spcBef>
-              <a:spcAft>
-                <a:spcPts val="400"/>
-              </a:spcAft>
-            </a:pPr>
-            <a:r>
-              <a:rPr sz="1100" b="1">
-                <a:solidFill>
-                  <a:srgbClr val="00B4D8"/>
-                </a:solidFill>
-                <a:latin typeface="Microsoft YaHei"/>
-                <a:ea typeface="Microsoft YaHei"/>
-              </a:rPr>
-              <a:t>● </a:t>
-            </a:r>
-            <a:r>
-              <a:rPr sz="1250" b="0">
-                <a:solidFill>
-                  <a:srgbClr val="1B2433"/>
-                </a:solidFill>
-                <a:latin typeface="Microsoft YaHei"/>
-                <a:ea typeface="Microsoft YaHei"/>
-              </a:rPr>
-              <a:t>升级为“算力友好型”载体</a:t>
-            </a:r>
-          </a:p>
-        </p:txBody>
-      </p:sp>
-      <p:sp>
-        <p:nvSpPr>
-          <p:cNvPr id="22" name="Rounded Rectangle 21"/>
-          <p:cNvSpPr/>
-          <p:nvPr/>
-        </p:nvSpPr>
-        <p:spPr>
-          <a:xfrm>
-            <a:off x="731520" y="3840480"/>
-            <a:ext cx="5257800" cy="1874519"/>
-          </a:xfrm>
-          <a:prstGeom prst="roundRect">
-            <a:avLst/>
-          </a:prstGeom>
-          <a:solidFill>
-            <a:srgbClr val="EAF2FB"/>
-          </a:solidFill>
-          <a:ln>
-            <a:noFill/>
-          </a:ln>
-          <a:effectLst/>
-        </p:spPr>
-        <p:style>
-          <a:lnRef idx="1">
-            <a:schemeClr val="accent1"/>
-          </a:lnRef>
-          <a:fillRef idx="3">
-            <a:schemeClr val="accent1"/>
-          </a:fillRef>
-          <a:effectRef idx="2">
-            <a:schemeClr val="accent1"/>
-          </a:effectRef>
-          <a:fontRef idx="minor">
-            <a:schemeClr val="lt1"/>
-          </a:fontRef>
-        </p:style>
-        <p:txBody>
-          <a:bodyPr rtlCol="0" anchor="ctr"/>
-          <a:lstStyle/>
-          <a:p>
-            <a:pPr algn="ctr"/>
-          </a:p>
-        </p:txBody>
-      </p:sp>
-      <p:sp>
-        <p:nvSpPr>
-          <p:cNvPr id="23" name="Rectangle 22"/>
-          <p:cNvSpPr/>
-          <p:nvPr/>
-        </p:nvSpPr>
-        <p:spPr>
-          <a:xfrm>
-            <a:off x="731520" y="3840480"/>
-            <a:ext cx="146304" cy="1874519"/>
-          </a:xfrm>
-          <a:prstGeom prst="rect">
-            <a:avLst/>
-          </a:prstGeom>
-          <a:solidFill>
-            <a:srgbClr val="F2A02D"/>
-          </a:solidFill>
-          <a:ln>
-            <a:noFill/>
-          </a:ln>
-          <a:effectLst/>
-        </p:spPr>
-        <p:style>
-          <a:lnRef idx="1">
-            <a:schemeClr val="accent1"/>
-          </a:lnRef>
-          <a:fillRef idx="3">
-            <a:schemeClr val="accent1"/>
-          </a:fillRef>
-          <a:effectRef idx="2">
-            <a:schemeClr val="accent1"/>
-          </a:effectRef>
-          <a:fontRef idx="minor">
-            <a:schemeClr val="lt1"/>
-          </a:fontRef>
-        </p:style>
-        <p:txBody>
-          <a:bodyPr rtlCol="0" anchor="ctr"/>
-          <a:lstStyle/>
-          <a:p>
-            <a:pPr algn="ctr"/>
-          </a:p>
-        </p:txBody>
-      </p:sp>
-      <p:sp>
-        <p:nvSpPr>
-          <p:cNvPr id="24" name="TextBox 23"/>
-          <p:cNvSpPr txBox="1"/>
-          <p:nvPr/>
-        </p:nvSpPr>
-        <p:spPr>
-          <a:xfrm>
-            <a:off x="1097280" y="4005072"/>
-            <a:ext cx="4709160" cy="457200"/>
-          </a:xfrm>
-          <a:prstGeom prst="rect">
-            <a:avLst/>
-          </a:prstGeom>
-          <a:noFill/>
-        </p:spPr>
-        <p:txBody>
-          <a:bodyPr wrap="square" anchor="t" lIns="0" rIns="0" tIns="0" bIns="0">
-            <a:spAutoFit/>
-          </a:bodyPr>
-          <a:lstStyle/>
-          <a:p>
-            <a:pPr algn="l">
-              <a:lnSpc>
-                <a:spcPct val="100000"/>
-              </a:lnSpc>
-              <a:spcBef>
-                <a:spcPts val="0"/>
-              </a:spcBef>
-              <a:spcAft>
-                <a:spcPts val="400"/>
-              </a:spcAft>
-            </a:pPr>
-            <a:r>
-              <a:rPr sz="1600" b="1">
-                <a:solidFill>
                   <a:srgbClr val="F2A02D"/>
                 </a:solidFill>
                 <a:latin typeface="Microsoft YaHei"/>
                 <a:ea typeface="Microsoft YaHei"/>
               </a:rPr>
-              <a:t>入驻 B 端企业</a:t>
-            </a:r>
-          </a:p>
-        </p:txBody>
-      </p:sp>
-      <p:sp>
-        <p:nvSpPr>
-          <p:cNvPr id="25" name="TextBox 24"/>
-          <p:cNvSpPr txBox="1"/>
-          <p:nvPr/>
-        </p:nvSpPr>
-        <p:spPr>
-          <a:xfrm>
-            <a:off x="1143000" y="4498848"/>
-            <a:ext cx="4617720" cy="384048"/>
-          </a:xfrm>
-          <a:prstGeom prst="rect">
-            <a:avLst/>
-          </a:prstGeom>
-          <a:noFill/>
-        </p:spPr>
-        <p:txBody>
-          <a:bodyPr wrap="square" anchor="t" lIns="0" rIns="0" tIns="0" bIns="0">
-            <a:spAutoFit/>
-          </a:bodyPr>
-          <a:lstStyle/>
-          <a:p>
-            <a:pPr algn="l">
-              <a:lnSpc>
-                <a:spcPct val="100000"/>
-              </a:lnSpc>
-              <a:spcBef>
-                <a:spcPts val="0"/>
-              </a:spcBef>
-              <a:spcAft>
-                <a:spcPts val="400"/>
-              </a:spcAft>
-            </a:pPr>
-            <a:r>
-              <a:rPr sz="1100" b="1">
-                <a:solidFill>
-                  <a:srgbClr val="F2A02D"/>
-                </a:solidFill>
-                <a:latin typeface="Microsoft YaHei"/>
-                <a:ea typeface="Microsoft YaHei"/>
-              </a:rPr>
-              <a:t>● </a:t>
-            </a:r>
-            <a:r>
-              <a:rPr sz="1250" b="0">
-                <a:solidFill>
-                  <a:srgbClr val="1B2433"/>
-                </a:solidFill>
-                <a:latin typeface="Microsoft YaHei"/>
-                <a:ea typeface="Microsoft YaHei"/>
-              </a:rPr>
-              <a:t>降低用云与租金成本</a:t>
-            </a:r>
-          </a:p>
-        </p:txBody>
-      </p:sp>
-      <p:sp>
-        <p:nvSpPr>
-          <p:cNvPr id="26" name="TextBox 25"/>
-          <p:cNvSpPr txBox="1"/>
-          <p:nvPr/>
-        </p:nvSpPr>
-        <p:spPr>
-          <a:xfrm>
-            <a:off x="1143000" y="4892040"/>
-            <a:ext cx="4617720" cy="384048"/>
-          </a:xfrm>
-          <a:prstGeom prst="rect">
-            <a:avLst/>
-          </a:prstGeom>
-          <a:noFill/>
-        </p:spPr>
-        <p:txBody>
-          <a:bodyPr wrap="square" anchor="t" lIns="0" rIns="0" tIns="0" bIns="0">
-            <a:spAutoFit/>
-          </a:bodyPr>
-          <a:lstStyle/>
-          <a:p>
-            <a:pPr algn="l">
-              <a:lnSpc>
-                <a:spcPct val="100000"/>
-              </a:lnSpc>
-              <a:spcBef>
-                <a:spcPts val="0"/>
-              </a:spcBef>
-              <a:spcAft>
-                <a:spcPts val="400"/>
-              </a:spcAft>
-            </a:pPr>
-            <a:r>
-              <a:rPr sz="1100" b="1">
-                <a:solidFill>
-                  <a:srgbClr val="F2A02D"/>
-                </a:solidFill>
-                <a:latin typeface="Microsoft YaHei"/>
-                <a:ea typeface="Microsoft YaHei"/>
-              </a:rPr>
-              <a:t>● </a:t>
-            </a:r>
-            <a:r>
-              <a:rPr sz="1250" b="0">
-                <a:solidFill>
-                  <a:srgbClr val="1B2433"/>
-                </a:solidFill>
-                <a:latin typeface="Microsoft YaHei"/>
-                <a:ea typeface="Microsoft YaHei"/>
-              </a:rPr>
-              <a:t>获得算力与上云支持</a:t>
-            </a:r>
-          </a:p>
-        </p:txBody>
-      </p:sp>
-      <p:sp>
-        <p:nvSpPr>
-          <p:cNvPr id="27" name="TextBox 26"/>
-          <p:cNvSpPr txBox="1"/>
-          <p:nvPr/>
-        </p:nvSpPr>
-        <p:spPr>
-          <a:xfrm>
-            <a:off x="1143000" y="5285231"/>
-            <a:ext cx="4617720" cy="384048"/>
-          </a:xfrm>
-          <a:prstGeom prst="rect">
-            <a:avLst/>
-          </a:prstGeom>
-          <a:noFill/>
-        </p:spPr>
-        <p:txBody>
-          <a:bodyPr wrap="square" anchor="t" lIns="0" rIns="0" tIns="0" bIns="0">
-            <a:spAutoFit/>
-          </a:bodyPr>
-          <a:lstStyle/>
-          <a:p>
-            <a:pPr algn="l">
-              <a:lnSpc>
-                <a:spcPct val="100000"/>
-              </a:lnSpc>
-              <a:spcBef>
-                <a:spcPts val="0"/>
-              </a:spcBef>
-              <a:spcAft>
-                <a:spcPts val="400"/>
-              </a:spcAft>
-            </a:pPr>
-            <a:r>
-              <a:rPr sz="1100" b="1">
-                <a:solidFill>
-                  <a:srgbClr val="F2A02D"/>
-                </a:solidFill>
-                <a:latin typeface="Microsoft YaHei"/>
-                <a:ea typeface="Microsoft YaHei"/>
-              </a:rPr>
-              <a:t>● </a:t>
-            </a:r>
-            <a:r>
-              <a:rPr sz="1250" b="0">
-                <a:solidFill>
-                  <a:srgbClr val="1B2433"/>
-                </a:solidFill>
-                <a:latin typeface="Microsoft YaHei"/>
-                <a:ea typeface="Microsoft YaHei"/>
-              </a:rPr>
-              <a:t>加速 AI 应用落地</a:t>
-            </a:r>
-          </a:p>
-        </p:txBody>
-      </p:sp>
-      <p:sp>
-        <p:nvSpPr>
-          <p:cNvPr id="28" name="Rounded Rectangle 27"/>
-          <p:cNvSpPr/>
-          <p:nvPr/>
-        </p:nvSpPr>
-        <p:spPr>
-          <a:xfrm>
-            <a:off x="6263640" y="3840480"/>
-            <a:ext cx="5257800" cy="1874519"/>
-          </a:xfrm>
-          <a:prstGeom prst="roundRect">
-            <a:avLst/>
-          </a:prstGeom>
-          <a:solidFill>
-            <a:srgbClr val="EAF2FB"/>
-          </a:solidFill>
-          <a:ln>
-            <a:noFill/>
-          </a:ln>
-          <a:effectLst/>
-        </p:spPr>
-        <p:style>
-          <a:lnRef idx="1">
-            <a:schemeClr val="accent1"/>
-          </a:lnRef>
-          <a:fillRef idx="3">
-            <a:schemeClr val="accent1"/>
-          </a:fillRef>
-          <a:effectRef idx="2">
-            <a:schemeClr val="accent1"/>
-          </a:effectRef>
-          <a:fontRef idx="minor">
-            <a:schemeClr val="lt1"/>
-          </a:fontRef>
-        </p:style>
-        <p:txBody>
-          <a:bodyPr rtlCol="0" anchor="ctr"/>
-          <a:lstStyle/>
-          <a:p>
-            <a:pPr algn="ctr"/>
-          </a:p>
-        </p:txBody>
-      </p:sp>
-      <p:sp>
-        <p:nvSpPr>
-          <p:cNvPr id="29" name="Rectangle 28"/>
-          <p:cNvSpPr/>
-          <p:nvPr/>
-        </p:nvSpPr>
-        <p:spPr>
-          <a:xfrm>
-            <a:off x="6263640" y="3840480"/>
-            <a:ext cx="146304" cy="1874519"/>
-          </a:xfrm>
-          <a:prstGeom prst="rect">
-            <a:avLst/>
-          </a:prstGeom>
-          <a:solidFill>
-            <a:srgbClr val="0B2A5B"/>
-          </a:solidFill>
-          <a:ln>
-            <a:noFill/>
-          </a:ln>
-          <a:effectLst/>
-        </p:spPr>
-        <p:style>
-          <a:lnRef idx="1">
-            <a:schemeClr val="accent1"/>
-          </a:lnRef>
-          <a:fillRef idx="3">
-            <a:schemeClr val="accent1"/>
-          </a:fillRef>
-          <a:effectRef idx="2">
-            <a:schemeClr val="accent1"/>
-          </a:effectRef>
-          <a:fontRef idx="minor">
-            <a:schemeClr val="lt1"/>
-          </a:fontRef>
-        </p:style>
-        <p:txBody>
-          <a:bodyPr rtlCol="0" anchor="ctr"/>
-          <a:lstStyle/>
-          <a:p>
-            <a:pPr algn="ctr"/>
-          </a:p>
-        </p:txBody>
-      </p:sp>
-      <p:sp>
-        <p:nvSpPr>
-          <p:cNvPr id="30" name="TextBox 29"/>
-          <p:cNvSpPr txBox="1"/>
-          <p:nvPr/>
-        </p:nvSpPr>
-        <p:spPr>
-          <a:xfrm>
-            <a:off x="6629400" y="4005072"/>
-            <a:ext cx="4709160" cy="457200"/>
-          </a:xfrm>
-          <a:prstGeom prst="rect">
-            <a:avLst/>
-          </a:prstGeom>
-          <a:noFill/>
-        </p:spPr>
-        <p:txBody>
-          <a:bodyPr wrap="square" anchor="t" lIns="0" rIns="0" tIns="0" bIns="0">
-            <a:spAutoFit/>
-          </a:bodyPr>
-          <a:lstStyle/>
-          <a:p>
-            <a:pPr algn="l">
-              <a:lnSpc>
-                <a:spcPct val="100000"/>
-              </a:lnSpc>
-              <a:spcBef>
-                <a:spcPts val="0"/>
-              </a:spcBef>
-              <a:spcAft>
-                <a:spcPts val="400"/>
-              </a:spcAft>
-            </a:pPr>
-            <a:r>
-              <a:rPr sz="1600" b="1">
-                <a:solidFill>
-                  <a:srgbClr val="0B2A5B"/>
-                </a:solidFill>
-                <a:latin typeface="Microsoft YaHei"/>
-                <a:ea typeface="Microsoft YaHei"/>
-              </a:rPr>
-              <a:t>源信网络 + 研究中心 + 联合会</a:t>
-            </a:r>
-          </a:p>
-        </p:txBody>
-      </p:sp>
-      <p:sp>
-        <p:nvSpPr>
-          <p:cNvPr id="31" name="TextBox 30"/>
-          <p:cNvSpPr txBox="1"/>
-          <p:nvPr/>
-        </p:nvSpPr>
-        <p:spPr>
-          <a:xfrm>
-            <a:off x="6675120" y="4498848"/>
-            <a:ext cx="4617720" cy="384048"/>
-          </a:xfrm>
-          <a:prstGeom prst="rect">
-            <a:avLst/>
-          </a:prstGeom>
-          <a:noFill/>
-        </p:spPr>
-        <p:txBody>
-          <a:bodyPr wrap="square" anchor="t" lIns="0" rIns="0" tIns="0" bIns="0">
-            <a:spAutoFit/>
-          </a:bodyPr>
-          <a:lstStyle/>
-          <a:p>
-            <a:pPr algn="l">
-              <a:lnSpc>
-                <a:spcPct val="100000"/>
-              </a:lnSpc>
-              <a:spcBef>
-                <a:spcPts val="0"/>
-              </a:spcBef>
-              <a:spcAft>
-                <a:spcPts val="400"/>
-              </a:spcAft>
-            </a:pPr>
-            <a:r>
-              <a:rPr sz="1100" b="1">
-                <a:solidFill>
-                  <a:srgbClr val="0B2A5B"/>
-                </a:solidFill>
-                <a:latin typeface="Microsoft YaHei"/>
-                <a:ea typeface="Microsoft YaHei"/>
-              </a:rPr>
-              <a:t>● </a:t>
-            </a:r>
-            <a:r>
-              <a:rPr sz="1250" b="0">
-                <a:solidFill>
-                  <a:srgbClr val="1B2433"/>
-                </a:solidFill>
-                <a:latin typeface="Microsoft YaHei"/>
-                <a:ea typeface="Microsoft YaHei"/>
-              </a:rPr>
-              <a:t>运营服务与生态收益</a:t>
-            </a:r>
-          </a:p>
-        </p:txBody>
-      </p:sp>
-      <p:sp>
-        <p:nvSpPr>
-          <p:cNvPr id="32" name="TextBox 31"/>
-          <p:cNvSpPr txBox="1"/>
-          <p:nvPr/>
-        </p:nvSpPr>
-        <p:spPr>
-          <a:xfrm>
-            <a:off x="6675120" y="4892040"/>
-            <a:ext cx="4617720" cy="384048"/>
-          </a:xfrm>
-          <a:prstGeom prst="rect">
-            <a:avLst/>
-          </a:prstGeom>
-          <a:noFill/>
-        </p:spPr>
-        <p:txBody>
-          <a:bodyPr wrap="square" anchor="t" lIns="0" rIns="0" tIns="0" bIns="0">
-            <a:spAutoFit/>
-          </a:bodyPr>
-          <a:lstStyle/>
-          <a:p>
-            <a:pPr algn="l">
-              <a:lnSpc>
-                <a:spcPct val="100000"/>
-              </a:lnSpc>
-              <a:spcBef>
-                <a:spcPts val="0"/>
-              </a:spcBef>
-              <a:spcAft>
-                <a:spcPts val="400"/>
-              </a:spcAft>
-            </a:pPr>
-            <a:r>
-              <a:rPr sz="1100" b="1">
-                <a:solidFill>
-                  <a:srgbClr val="0B2A5B"/>
-                </a:solidFill>
-                <a:latin typeface="Microsoft YaHei"/>
-                <a:ea typeface="Microsoft YaHei"/>
-              </a:rPr>
-              <a:t>● </a:t>
-            </a:r>
-            <a:r>
-              <a:rPr sz="1250" b="0">
-                <a:solidFill>
-                  <a:srgbClr val="1B2433"/>
-                </a:solidFill>
-                <a:latin typeface="Microsoft YaHei"/>
-                <a:ea typeface="Microsoft YaHei"/>
-              </a:rPr>
-              <a:t>政策研究与成果背书</a:t>
-            </a:r>
-          </a:p>
-        </p:txBody>
-      </p:sp>
-      <p:sp>
-        <p:nvSpPr>
-          <p:cNvPr id="33" name="TextBox 32"/>
-          <p:cNvSpPr txBox="1"/>
-          <p:nvPr/>
-        </p:nvSpPr>
-        <p:spPr>
-          <a:xfrm>
-            <a:off x="6675120" y="5285231"/>
-            <a:ext cx="4617720" cy="384048"/>
-          </a:xfrm>
-          <a:prstGeom prst="rect">
-            <a:avLst/>
-          </a:prstGeom>
-          <a:noFill/>
-        </p:spPr>
-        <p:txBody>
-          <a:bodyPr wrap="square" anchor="t" lIns="0" rIns="0" tIns="0" bIns="0">
-            <a:spAutoFit/>
-          </a:bodyPr>
-          <a:lstStyle/>
-          <a:p>
-            <a:pPr algn="l">
-              <a:lnSpc>
-                <a:spcPct val="100000"/>
-              </a:lnSpc>
-              <a:spcBef>
-                <a:spcPts val="0"/>
-              </a:spcBef>
-              <a:spcAft>
-                <a:spcPts val="400"/>
-              </a:spcAft>
-            </a:pPr>
-            <a:r>
-              <a:rPr sz="1100" b="1">
-                <a:solidFill>
-                  <a:srgbClr val="0B2A5B"/>
-                </a:solidFill>
-                <a:latin typeface="Microsoft YaHei"/>
-                <a:ea typeface="Microsoft YaHei"/>
-              </a:rPr>
-              <a:t>● </a:t>
-            </a:r>
-            <a:r>
-              <a:rPr sz="1250" b="0">
-                <a:solidFill>
-                  <a:srgbClr val="1B2433"/>
-                </a:solidFill>
-                <a:latin typeface="Microsoft YaHei"/>
-                <a:ea typeface="Microsoft YaHei"/>
-              </a:rPr>
-              <a:t>区域科创影响力提升</a:t>
+              <a:t>说明：</a:t>
+            </a:r>
+            <a:r>
+              <a:rPr sz="1100" b="0">
+                <a:solidFill>
+                  <a:srgbClr val="5A6472"/>
+                </a:solidFill>
+                <a:latin typeface="Microsoft YaHei"/>
+                <a:ea typeface="Microsoft YaHei"/>
+              </a:rPr>
+              <a:t>折扣随累计消费提升而走低（越用越优惠），与半年免费代金券可叠加享受；具体以火山引擎最终政策为准。</a:t>
             </a:r>
           </a:p>
         </p:txBody>
